--- a/aulas/aula-03-ciencia-de-dados/slides/aula-03-ciencia-de-dados.pptx
+++ b/aulas/aula-03-ciencia-de-dados/slides/aula-03-ciencia-de-dados.pptx
@@ -1176,7 +1176,7 @@
           <a:lstStyle/>
           <a:p>
             <a:r>
-              <a:t>Todos medidos no dataset com seed 42, corte 2026-08-01, janela de 7 dias, score out-of-fold. O zero da segunda linha é o melhor número da aula: a intuição mais comum do comercial acerta nenhum dos 200.</a:t>
+              <a:t>Todos medidos no workspace com seed 42, corte 2026-08-01, janela de 7 dias, score out-of-fold. O zero da segunda linha é o melhor número da aula: a intuição mais comum do comercial acerta nenhum dos 200. E ordenar pelo atraso puro, sem modelo, acerta 1.</a:t>
             </a:r>
           </a:p>
         </p:txBody>
@@ -17794,7 +17794,7 @@
                 </a:solidFill>
                 <a:latin typeface="Arial"/>
               </a:rPr>
-              <a:t>0,37</a:t>
+              <a:t>0,35</a:t>
             </a:r>
           </a:p>
         </p:txBody>
@@ -18188,7 +18188,7 @@
                 </a:solidFill>
                 <a:latin typeface="Arial"/>
               </a:rPr>
-              <a:t>0,62</a:t>
+              <a:t>0,64</a:t>
             </a:r>
           </a:p>
         </p:txBody>
@@ -18266,7 +18266,7 @@
                 </a:solidFill>
                 <a:latin typeface="Arial"/>
               </a:rPr>
-              <a:t>acerta 62 de cada</a:t>
+              <a:t>acerta 64 de cada</a:t>
             </a:r>
           </a:p>
           <a:p>
@@ -18385,7 +18385,7 @@
                 </a:solidFill>
                 <a:latin typeface="Arial"/>
               </a:rPr>
-              <a:t>0,85</a:t>
+              <a:t>0,88</a:t>
             </a:r>
           </a:p>
         </p:txBody>
@@ -18479,7 +18479,7 @@
                 </a:solidFill>
                 <a:latin typeface="Arial"/>
               </a:rPr>
-              <a:t>na frente em 85</a:t>
+              <a:t>na frente em 88</a:t>
             </a:r>
           </a:p>
           <a:p>
@@ -30729,7 +30729,7 @@
                 </a:solidFill>
                 <a:latin typeface="Arial"/>
               </a:rPr>
-              <a:t>75 vendas</a:t>
+              <a:t>86 vendas</a:t>
             </a:r>
           </a:p>
         </p:txBody>
@@ -30816,7 +30816,7 @@
                 </a:solidFill>
                 <a:latin typeface="Arial"/>
               </a:rPr>
-              <a:t>Mesmo time. Mesmas 200 ligações. Quase quatro vezes mais resultado.</a:t>
+              <a:t>Mesmo time. Mesmas 200 ligações. Mais de quatro vezes o resultado.</a:t>
             </a:r>
           </a:p>
         </p:txBody>
@@ -33592,7 +33592,7 @@
                 </a:solidFill>
                 <a:latin typeface="Arial"/>
               </a:rPr>
-              <a:t>75     ·  3,7× o aleatório</a:t>
+              <a:t>86     ·  4,25× o aleatório</a:t>
             </a:r>
           </a:p>
         </p:txBody>

--- a/aulas/aula-03-ciencia-de-dados/slides/aula-03-ciencia-de-dados.pptx
+++ b/aulas/aula-03-ciencia-de-dados/slides/aula-03-ciencia-de-dados.pptx
@@ -50,6 +50,7 @@
     <p:sldId id="298" r:id="rId50"/>
     <p:sldId id="299" r:id="rId51"/>
     <p:sldId id="300" r:id="rId52"/>
+    <p:sldId id="301" r:id="rId53"/>
   </p:sldIdLst>
   <p:sldSz cx="12191695" cy="6858000" type="screen4x3"/>
   <p:notesSz cx="6858000" cy="9144000"/>
@@ -922,6 +923,76 @@
 </file>
 
 <file path=ppt/notesSlides/notesSlide15.xml><?xml version="1.0" encoding="utf-8"?>
+<p:notes xmlns:a="http://schemas.openxmlformats.org/drawingml/2006/main" xmlns:p="http://schemas.openxmlformats.org/presentationml/2006/main" xmlns:r="http://schemas.openxmlformats.org/officeDocument/2006/relationships">
+  <p:cSld>
+    <p:spTree>
+      <p:nvGrpSpPr>
+        <p:cNvPr id="1" name=""/>
+        <p:cNvGrpSpPr/>
+        <p:nvPr/>
+      </p:nvGrpSpPr>
+      <p:grpSpPr>
+        <a:xfrm>
+          <a:off x="0" y="0"/>
+          <a:ext cx="0" cy="0"/>
+          <a:chOff x="0" y="0"/>
+          <a:chExt cx="0" cy="0"/>
+        </a:xfrm>
+      </p:grpSpPr>
+      <p:sp>
+        <p:nvSpPr>
+          <p:cNvPr id="2" name="Slide Image Placeholder 1"/>
+          <p:cNvSpPr>
+            <a:spLocks noGrp="1"/>
+          </p:cNvSpPr>
+          <p:nvPr>
+            <p:ph type="sldImg" idx="2"/>
+          </p:nvPr>
+        </p:nvSpPr>
+        <p:spPr/>
+      </p:sp>
+      <p:sp>
+        <p:nvSpPr>
+          <p:cNvPr id="3" name="Notes Placeholder 2"/>
+          <p:cNvSpPr>
+            <a:spLocks noGrp="1"/>
+          </p:cNvSpPr>
+          <p:nvPr>
+            <p:ph type="body" idx="3" sz="quarter"/>
+          </p:nvPr>
+        </p:nvSpPr>
+        <p:spPr/>
+        <p:txBody>
+          <a:bodyPr/>
+          <a:lstStyle/>
+          <a:p>
+            <a:r>
+              <a:t>Abra o dashboard primeiro — é o que responde a pergunta do diretor. A query é o plano B se algo não carregar ao vivo, e está pronta no passo-a-passo. O Genie fica por último, porque é o mais impressionante e o menos previsível.</a:t>
+            </a:r>
+          </a:p>
+        </p:txBody>
+      </p:sp>
+      <p:sp>
+        <p:nvSpPr>
+          <p:cNvPr id="4" name="Slide Number Placeholder 3"/>
+          <p:cNvSpPr>
+            <a:spLocks noGrp="1"/>
+          </p:cNvSpPr>
+          <p:nvPr>
+            <p:ph type="sldNum" idx="5" sz="quarter"/>
+          </p:nvPr>
+        </p:nvSpPr>
+        <p:spPr/>
+      </p:sp>
+    </p:spTree>
+  </p:cSld>
+  <p:clrMapOvr>
+    <a:masterClrMapping/>
+  </p:clrMapOvr>
+</p:notes>
+</file>
+
+<file path=ppt/notesSlides/notesSlide16.xml><?xml version="1.0" encoding="utf-8"?>
 <p:notes xmlns:a="http://schemas.openxmlformats.org/drawingml/2006/main" xmlns:p="http://schemas.openxmlformats.org/presentationml/2006/main" xmlns:r="http://schemas.openxmlformats.org/officeDocument/2006/relationships">
   <p:cSld>
     <p:spTree>
@@ -28105,7 +28176,7 @@
                 </a:solidFill>
                 <a:latin typeface="Arial"/>
               </a:rPr>
-              <a:t>A ÚLTIMA CAMADA</a:t>
+              <a:t>A PERGUNTA QUE TODO MUNDO FAZ</a:t>
             </a:r>
           </a:p>
         </p:txBody>
@@ -28144,7 +28215,7 @@
                 </a:solidFill>
                 <a:latin typeface="Arial"/>
               </a:rPr>
-              <a:t>Ele não inventa. Ele consulta.</a:t>
+              <a:t>E onde eu vejo esses 200?</a:t>
             </a:r>
           </a:p>
         </p:txBody>
@@ -28190,92 +28261,220 @@
       </p:sp>
       <p:sp>
         <p:nvSpPr>
-          <p:cNvPr id="5" name="TextBox 4"/>
-          <p:cNvSpPr txBox="1"/>
-          <p:nvPr/>
-        </p:nvSpPr>
-        <p:spPr>
-          <a:xfrm>
-            <a:off x="996696" y="1508760"/>
-            <a:ext cx="4572000" cy="274320"/>
-          </a:xfrm>
-          <a:prstGeom prst="rect">
-            <a:avLst/>
-          </a:prstGeom>
-          <a:noFill/>
-        </p:spPr>
-        <p:txBody>
-          <a:bodyPr wrap="square" lIns="0" rIns="0" tIns="0" bIns="0" anchor="t">
-            <a:spAutoFit/>
-          </a:bodyPr>
-          <a:lstStyle/>
-          <a:p>
-            <a:pPr algn="l">
-              <a:lnSpc>
-                <a:spcPct val="100000"/>
-              </a:lnSpc>
-            </a:pPr>
-            <a:r>
-              <a:rPr sz="1100" b="1" spc="140">
+          <p:cNvPr id="5" name="Rounded Rectangle 4"/>
+          <p:cNvSpPr/>
+          <p:nvPr/>
+        </p:nvSpPr>
+        <p:spPr>
+          <a:xfrm>
+            <a:off x="685800" y="1508760"/>
+            <a:ext cx="3448202" cy="2286000"/>
+          </a:xfrm>
+          <a:prstGeom prst="roundRect">
+            <a:avLst>
+              <a:gd name="adj" fmla="val 8000"/>
+            </a:avLst>
+          </a:prstGeom>
+          <a:solidFill>
+            <a:srgbClr val="142337"/>
+          </a:solidFill>
+          <a:ln w="19050">
+            <a:solidFill>
+              <a:srgbClr val="3B9DF5"/>
+            </a:solidFill>
+          </a:ln>
+          <a:effectLst/>
+        </p:spPr>
+        <p:style>
+          <a:lnRef idx="1">
+            <a:schemeClr val="accent1"/>
+          </a:lnRef>
+          <a:fillRef idx="3">
+            <a:schemeClr val="accent1"/>
+          </a:fillRef>
+          <a:effectRef idx="2">
+            <a:schemeClr val="accent1"/>
+          </a:effectRef>
+          <a:fontRef idx="minor">
+            <a:schemeClr val="lt1"/>
+          </a:fontRef>
+        </p:style>
+        <p:txBody>
+          <a:bodyPr rtlCol="0" anchor="ctr"/>
+          <a:lstStyle/>
+          <a:p>
+            <a:pPr algn="ctr"/>
+          </a:p>
+        </p:txBody>
+      </p:sp>
+      <p:sp>
+        <p:nvSpPr>
+          <p:cNvPr id="6" name="TextBox 5"/>
+          <p:cNvSpPr txBox="1"/>
+          <p:nvPr/>
+        </p:nvSpPr>
+        <p:spPr>
+          <a:xfrm>
+            <a:off x="941832" y="1746504"/>
+            <a:ext cx="2936138" cy="822960"/>
+          </a:xfrm>
+          <a:prstGeom prst="rect">
+            <a:avLst/>
+          </a:prstGeom>
+          <a:noFill/>
+        </p:spPr>
+        <p:txBody>
+          <a:bodyPr wrap="square" lIns="0" rIns="0" tIns="0" bIns="0" anchor="t">
+            <a:spAutoFit/>
+          </a:bodyPr>
+          <a:lstStyle/>
+          <a:p>
+            <a:pPr algn="l">
+              <a:lnSpc>
+                <a:spcPct val="105000"/>
+              </a:lnSpc>
+            </a:pPr>
+            <a:r>
+              <a:rPr sz="1800" b="1">
                 <a:solidFill>
                   <a:srgbClr val="3B9DF5"/>
                 </a:solidFill>
                 <a:latin typeface="Arial"/>
               </a:rPr>
-              <a:t>FERRAMENTA</a:t>
-            </a:r>
-          </a:p>
-        </p:txBody>
-      </p:sp>
-      <p:sp>
-        <p:nvSpPr>
-          <p:cNvPr id="6" name="TextBox 5"/>
-          <p:cNvSpPr txBox="1"/>
-          <p:nvPr/>
-        </p:nvSpPr>
-        <p:spPr>
-          <a:xfrm>
-            <a:off x="5568696" y="1508760"/>
-            <a:ext cx="5608015" cy="274320"/>
-          </a:xfrm>
-          <a:prstGeom prst="rect">
-            <a:avLst/>
-          </a:prstGeom>
-          <a:noFill/>
-        </p:spPr>
-        <p:txBody>
-          <a:bodyPr wrap="square" lIns="0" rIns="0" tIns="0" bIns="0" anchor="t">
-            <a:spAutoFit/>
-          </a:bodyPr>
-          <a:lstStyle/>
-          <a:p>
-            <a:pPr algn="l">
-              <a:lnSpc>
-                <a:spcPct val="100000"/>
-              </a:lnSpc>
-            </a:pPr>
-            <a:r>
-              <a:rPr sz="1100" b="1" spc="140">
-                <a:solidFill>
-                  <a:srgbClr val="3B9DF5"/>
-                </a:solidFill>
-                <a:latin typeface="Arial"/>
-              </a:rPr>
-              <a:t>O QUE FAZ</a:t>
-            </a:r>
-          </a:p>
-        </p:txBody>
-      </p:sp>
-      <p:sp>
-        <p:nvSpPr>
-          <p:cNvPr id="7" name="Rounded Rectangle 6"/>
+              <a:t>1 · No dashboard</a:t>
+            </a:r>
+          </a:p>
+        </p:txBody>
+      </p:sp>
+      <p:sp>
+        <p:nvSpPr>
+          <p:cNvPr id="7" name="TextBox 6"/>
+          <p:cNvSpPr txBox="1"/>
+          <p:nvPr/>
+        </p:nvSpPr>
+        <p:spPr>
+          <a:xfrm>
+            <a:off x="941832" y="2171700"/>
+            <a:ext cx="2936138" cy="2286000"/>
+          </a:xfrm>
+          <a:prstGeom prst="rect">
+            <a:avLst/>
+          </a:prstGeom>
+          <a:noFill/>
+        </p:spPr>
+        <p:txBody>
+          <a:bodyPr wrap="square" lIns="0" rIns="0" tIns="0" bIns="0" anchor="t">
+            <a:spAutoFit/>
+          </a:bodyPr>
+          <a:lstStyle/>
+          <a:p>
+            <a:pPr algn="l">
+              <a:lnSpc>
+                <a:spcPct val="128000"/>
+              </a:lnSpc>
+            </a:pPr>
+            <a:r>
+              <a:rPr sz="1250" b="0">
+                <a:solidFill>
+                  <a:srgbClr val="9BAAC0"/>
+                </a:solidFill>
+                <a:latin typeface="Arial"/>
+              </a:rPr>
+              <a:t>A aba 'Fila da semana'.</a:t>
+            </a:r>
+          </a:p>
+          <a:p>
+            <a:pPr algn="l">
+              <a:lnSpc>
+                <a:spcPct val="128000"/>
+              </a:lnSpc>
+            </a:pPr>
+            <a:r>
+              <a:rPr sz="1250" b="0">
+                <a:solidFill>
+                  <a:srgbClr val="9BAAC0"/>
+                </a:solidFill>
+                <a:latin typeface="Arial"/>
+              </a:rPr>
+              <a:t>O vendedor escolhe o</a:t>
+            </a:r>
+          </a:p>
+          <a:p>
+            <a:pPr algn="l">
+              <a:lnSpc>
+                <a:spcPct val="128000"/>
+              </a:lnSpc>
+            </a:pPr>
+            <a:r>
+              <a:rPr sz="1250" b="0">
+                <a:solidFill>
+                  <a:srgbClr val="9BAAC0"/>
+                </a:solidFill>
+                <a:latin typeface="Arial"/>
+              </a:rPr>
+              <a:t>nome dele no filtro e vê</a:t>
+            </a:r>
+          </a:p>
+          <a:p>
+            <a:pPr algn="l">
+              <a:lnSpc>
+                <a:spcPct val="128000"/>
+              </a:lnSpc>
+            </a:pPr>
+            <a:r>
+              <a:rPr sz="1250" b="0">
+                <a:solidFill>
+                  <a:srgbClr val="9BAAC0"/>
+                </a:solidFill>
+                <a:latin typeface="Arial"/>
+              </a:rPr>
+              <a:t>a lista em ordem.</a:t>
+            </a:r>
+          </a:p>
+          <a:p>
+            <a:pPr algn="l">
+              <a:lnSpc>
+                <a:spcPct val="128000"/>
+              </a:lnSpc>
+            </a:pPr>
+            <a:r>
+              <a:rPr sz="1250" b="0">
+                <a:solidFill>
+                  <a:srgbClr val="9BAAC0"/>
+                </a:solidFill>
+                <a:latin typeface="Arial"/>
+              </a:rPr>
+              <a:t/>
+            </a:r>
+          </a:p>
+          <a:p>
+            <a:pPr algn="l">
+              <a:lnSpc>
+                <a:spcPct val="128000"/>
+              </a:lnSpc>
+            </a:pPr>
+            <a:r>
+              <a:rPr sz="1250" b="0">
+                <a:solidFill>
+                  <a:srgbClr val="9BAAC0"/>
+                </a:solidFill>
+                <a:latin typeface="Arial"/>
+              </a:rPr>
+              <a:t>É a tela dele.</a:t>
+            </a:r>
+          </a:p>
+        </p:txBody>
+      </p:sp>
+      <p:sp>
+        <p:nvSpPr>
+          <p:cNvPr id="8" name="Rounded Rectangle 7"/>
           <p:cNvSpPr/>
           <p:nvPr/>
         </p:nvSpPr>
         <p:spPr>
           <a:xfrm>
-            <a:off x="685800" y="1892808"/>
-            <a:ext cx="10820095" cy="621792"/>
+            <a:off x="4371746" y="1508760"/>
+            <a:ext cx="3448202" cy="2286000"/>
           </a:xfrm>
           <a:prstGeom prst="roundRect">
             <a:avLst>
@@ -28316,92 +28515,172 @@
       </p:sp>
       <p:sp>
         <p:nvSpPr>
-          <p:cNvPr id="8" name="TextBox 7"/>
-          <p:cNvSpPr txBox="1"/>
-          <p:nvPr/>
-        </p:nvSpPr>
-        <p:spPr>
-          <a:xfrm>
-            <a:off x="996696" y="2092261"/>
-            <a:ext cx="4389120" cy="621792"/>
-          </a:xfrm>
-          <a:prstGeom prst="rect">
-            <a:avLst/>
-          </a:prstGeom>
-          <a:noFill/>
-        </p:spPr>
-        <p:txBody>
-          <a:bodyPr wrap="square" lIns="0" rIns="0" tIns="0" bIns="0" anchor="t">
-            <a:spAutoFit/>
-          </a:bodyPr>
-          <a:lstStyle/>
-          <a:p>
-            <a:pPr algn="l">
-              <a:lnSpc>
-                <a:spcPct val="100000"/>
-              </a:lnSpc>
-            </a:pPr>
-            <a:r>
-              <a:rPr sz="1350" b="1">
+          <p:cNvPr id="9" name="TextBox 8"/>
+          <p:cNvSpPr txBox="1"/>
+          <p:nvPr/>
+        </p:nvSpPr>
+        <p:spPr>
+          <a:xfrm>
+            <a:off x="4627778" y="1746504"/>
+            <a:ext cx="2936138" cy="822960"/>
+          </a:xfrm>
+          <a:prstGeom prst="rect">
+            <a:avLst/>
+          </a:prstGeom>
+          <a:noFill/>
+        </p:spPr>
+        <p:txBody>
+          <a:bodyPr wrap="square" lIns="0" rIns="0" tIns="0" bIns="0" anchor="t">
+            <a:spAutoFit/>
+          </a:bodyPr>
+          <a:lstStyle/>
+          <a:p>
+            <a:pPr algn="l">
+              <a:lnSpc>
+                <a:spcPct val="105000"/>
+              </a:lnSpc>
+            </a:pPr>
+            <a:r>
+              <a:rPr sz="1800" b="1">
                 <a:solidFill>
                   <a:srgbClr val="FFFFFF"/>
                 </a:solidFill>
                 <a:latin typeface="Arial"/>
               </a:rPr>
-              <a:t>priorizar_carteira</a:t>
-            </a:r>
-          </a:p>
-        </p:txBody>
-      </p:sp>
-      <p:sp>
-        <p:nvSpPr>
-          <p:cNvPr id="9" name="TextBox 8"/>
-          <p:cNvSpPr txBox="1"/>
-          <p:nvPr/>
-        </p:nvSpPr>
-        <p:spPr>
-          <a:xfrm>
-            <a:off x="5568696" y="2092261"/>
-            <a:ext cx="5608015" cy="621792"/>
-          </a:xfrm>
-          <a:prstGeom prst="rect">
-            <a:avLst/>
-          </a:prstGeom>
-          <a:noFill/>
-        </p:spPr>
-        <p:txBody>
-          <a:bodyPr wrap="square" lIns="0" rIns="0" tIns="0" bIns="0" anchor="t">
-            <a:spAutoFit/>
-          </a:bodyPr>
-          <a:lstStyle/>
-          <a:p>
-            <a:pPr algn="l">
-              <a:lnSpc>
-                <a:spcPct val="100000"/>
-              </a:lnSpc>
-            </a:pPr>
-            <a:r>
-              <a:rPr sz="1350" b="0">
+              <a:t>2 · Numa query</a:t>
+            </a:r>
+          </a:p>
+        </p:txBody>
+      </p:sp>
+      <p:sp>
+        <p:nvSpPr>
+          <p:cNvPr id="10" name="TextBox 9"/>
+          <p:cNvSpPr txBox="1"/>
+          <p:nvPr/>
+        </p:nvSpPr>
+        <p:spPr>
+          <a:xfrm>
+            <a:off x="4627778" y="2171700"/>
+            <a:ext cx="2936138" cy="2286000"/>
+          </a:xfrm>
+          <a:prstGeom prst="rect">
+            <a:avLst/>
+          </a:prstGeom>
+          <a:noFill/>
+        </p:spPr>
+        <p:txBody>
+          <a:bodyPr wrap="square" lIns="0" rIns="0" tIns="0" bIns="0" anchor="t">
+            <a:spAutoFit/>
+          </a:bodyPr>
+          <a:lstStyle/>
+          <a:p>
+            <a:pPr algn="l">
+              <a:lnSpc>
+                <a:spcPct val="128000"/>
+              </a:lnSpc>
+            </a:pPr>
+            <a:r>
+              <a:rPr sz="1250" b="0">
                 <a:solidFill>
                   <a:srgbClr val="9BAAC0"/>
                 </a:solidFill>
                 <a:latin typeface="Arial"/>
               </a:rPr>
-              <a:t>Cruza carteira + score + features e ordena</a:t>
-            </a:r>
-          </a:p>
-        </p:txBody>
-      </p:sp>
-      <p:sp>
-        <p:nvSpPr>
-          <p:cNvPr id="10" name="Rounded Rectangle 9"/>
+              <a:t>SELECT * FROM</a:t>
+            </a:r>
+          </a:p>
+          <a:p>
+            <a:pPr algn="l">
+              <a:lnSpc>
+                <a:spcPct val="128000"/>
+              </a:lnSpc>
+            </a:pPr>
+            <a:r>
+              <a:rPr sz="1250" b="0">
+                <a:solidFill>
+                  <a:srgbClr val="9BAAC0"/>
+                </a:solidFill>
+                <a:latin typeface="Arial"/>
+              </a:rPr>
+              <a:t>fila_semanal</a:t>
+            </a:r>
+          </a:p>
+          <a:p>
+            <a:pPr algn="l">
+              <a:lnSpc>
+                <a:spcPct val="128000"/>
+              </a:lnSpc>
+            </a:pPr>
+            <a:r>
+              <a:rPr sz="1250" b="0">
+                <a:solidFill>
+                  <a:srgbClr val="9BAAC0"/>
+                </a:solidFill>
+                <a:latin typeface="Arial"/>
+              </a:rPr>
+              <a:t>WHERE vendedor = '...'</a:t>
+            </a:r>
+          </a:p>
+          <a:p>
+            <a:pPr algn="l">
+              <a:lnSpc>
+                <a:spcPct val="128000"/>
+              </a:lnSpc>
+            </a:pPr>
+            <a:r>
+              <a:rPr sz="1250" b="0">
+                <a:solidFill>
+                  <a:srgbClr val="9BAAC0"/>
+                </a:solidFill>
+                <a:latin typeface="Arial"/>
+              </a:rPr>
+              <a:t/>
+            </a:r>
+          </a:p>
+          <a:p>
+            <a:pPr algn="l">
+              <a:lnSpc>
+                <a:spcPct val="128000"/>
+              </a:lnSpc>
+            </a:pPr>
+            <a:r>
+              <a:rPr sz="1250" b="0">
+                <a:solidFill>
+                  <a:srgbClr val="9BAAC0"/>
+                </a:solidFill>
+                <a:latin typeface="Arial"/>
+              </a:rPr>
+              <a:t>É uma tabela como</a:t>
+            </a:r>
+          </a:p>
+          <a:p>
+            <a:pPr algn="l">
+              <a:lnSpc>
+                <a:spcPct val="128000"/>
+              </a:lnSpc>
+            </a:pPr>
+            <a:r>
+              <a:rPr sz="1250" b="0">
+                <a:solidFill>
+                  <a:srgbClr val="9BAAC0"/>
+                </a:solidFill>
+                <a:latin typeface="Arial"/>
+              </a:rPr>
+              <a:t>qualquer outra.</a:t>
+            </a:r>
+          </a:p>
+        </p:txBody>
+      </p:sp>
+      <p:sp>
+        <p:nvSpPr>
+          <p:cNvPr id="11" name="Rounded Rectangle 10"/>
           <p:cNvSpPr/>
           <p:nvPr/>
         </p:nvSpPr>
         <p:spPr>
           <a:xfrm>
-            <a:off x="685800" y="2642616"/>
-            <a:ext cx="10820095" cy="621792"/>
+            <a:off x="8057692" y="1508760"/>
+            <a:ext cx="3448202" cy="2286000"/>
           </a:xfrm>
           <a:prstGeom prst="roundRect">
             <a:avLst>
@@ -28442,344 +28721,172 @@
       </p:sp>
       <p:sp>
         <p:nvSpPr>
-          <p:cNvPr id="11" name="TextBox 10"/>
-          <p:cNvSpPr txBox="1"/>
-          <p:nvPr/>
-        </p:nvSpPr>
-        <p:spPr>
-          <a:xfrm>
-            <a:off x="996696" y="2842069"/>
-            <a:ext cx="4389120" cy="621792"/>
-          </a:xfrm>
-          <a:prstGeom prst="rect">
-            <a:avLst/>
-          </a:prstGeom>
-          <a:noFill/>
-        </p:spPr>
-        <p:txBody>
-          <a:bodyPr wrap="square" lIns="0" rIns="0" tIns="0" bIns="0" anchor="t">
-            <a:spAutoFit/>
-          </a:bodyPr>
-          <a:lstStyle/>
-          <a:p>
-            <a:pPr algn="l">
-              <a:lnSpc>
-                <a:spcPct val="100000"/>
-              </a:lnSpc>
-            </a:pPr>
-            <a:r>
-              <a:rPr sz="1350" b="1">
+          <p:cNvPr id="12" name="TextBox 11"/>
+          <p:cNvSpPr txBox="1"/>
+          <p:nvPr/>
+        </p:nvSpPr>
+        <p:spPr>
+          <a:xfrm>
+            <a:off x="8313724" y="1746504"/>
+            <a:ext cx="2936138" cy="822960"/>
+          </a:xfrm>
+          <a:prstGeom prst="rect">
+            <a:avLst/>
+          </a:prstGeom>
+          <a:noFill/>
+        </p:spPr>
+        <p:txBody>
+          <a:bodyPr wrap="square" lIns="0" rIns="0" tIns="0" bIns="0" anchor="t">
+            <a:spAutoFit/>
+          </a:bodyPr>
+          <a:lstStyle/>
+          <a:p>
+            <a:pPr algn="l">
+              <a:lnSpc>
+                <a:spcPct val="105000"/>
+              </a:lnSpc>
+            </a:pPr>
+            <a:r>
+              <a:rPr sz="1800" b="1">
                 <a:solidFill>
                   <a:srgbClr val="FFFFFF"/>
                 </a:solidFill>
                 <a:latin typeface="Arial"/>
               </a:rPr>
-              <a:t>contexto_cliente</a:t>
-            </a:r>
-          </a:p>
-        </p:txBody>
-      </p:sp>
-      <p:sp>
-        <p:nvSpPr>
-          <p:cNvPr id="12" name="TextBox 11"/>
-          <p:cNvSpPr txBox="1"/>
-          <p:nvPr/>
-        </p:nvSpPr>
-        <p:spPr>
-          <a:xfrm>
-            <a:off x="5568696" y="2842069"/>
-            <a:ext cx="5608015" cy="621792"/>
-          </a:xfrm>
-          <a:prstGeom prst="rect">
-            <a:avLst/>
-          </a:prstGeom>
-          <a:noFill/>
-        </p:spPr>
-        <p:txBody>
-          <a:bodyPr wrap="square" lIns="0" rIns="0" tIns="0" bIns="0" anchor="t">
-            <a:spAutoFit/>
-          </a:bodyPr>
-          <a:lstStyle/>
-          <a:p>
-            <a:pPr algn="l">
-              <a:lnSpc>
-                <a:spcPct val="100000"/>
-              </a:lnSpc>
-            </a:pPr>
-            <a:r>
-              <a:rPr sz="1350" b="0">
+              <a:t>3 · Perguntando</a:t>
+            </a:r>
+          </a:p>
+        </p:txBody>
+      </p:sp>
+      <p:sp>
+        <p:nvSpPr>
+          <p:cNvPr id="13" name="TextBox 12"/>
+          <p:cNvSpPr txBox="1"/>
+          <p:nvPr/>
+        </p:nvSpPr>
+        <p:spPr>
+          <a:xfrm>
+            <a:off x="8313724" y="2171700"/>
+            <a:ext cx="2936138" cy="2286000"/>
+          </a:xfrm>
+          <a:prstGeom prst="rect">
+            <a:avLst/>
+          </a:prstGeom>
+          <a:noFill/>
+        </p:spPr>
+        <p:txBody>
+          <a:bodyPr wrap="square" lIns="0" rIns="0" tIns="0" bIns="0" anchor="t">
+            <a:spAutoFit/>
+          </a:bodyPr>
+          <a:lstStyle/>
+          <a:p>
+            <a:pPr algn="l">
+              <a:lnSpc>
+                <a:spcPct val="128000"/>
+              </a:lnSpc>
+            </a:pPr>
+            <a:r>
+              <a:rPr sz="1250" b="0">
                 <a:solidFill>
                   <a:srgbClr val="9BAAC0"/>
                 </a:solidFill>
                 <a:latin typeface="Arial"/>
               </a:rPr>
-              <a:t>Histórico, ticket médio, marcas preferidas</a:t>
-            </a:r>
-          </a:p>
-        </p:txBody>
-      </p:sp>
-      <p:sp>
-        <p:nvSpPr>
-          <p:cNvPr id="13" name="Rounded Rectangle 12"/>
+              <a:t>'Quem eu ligo essa</a:t>
+            </a:r>
+          </a:p>
+          <a:p>
+            <a:pPr algn="l">
+              <a:lnSpc>
+                <a:spcPct val="128000"/>
+              </a:lnSpc>
+            </a:pPr>
+            <a:r>
+              <a:rPr sz="1250" b="0">
+                <a:solidFill>
+                  <a:srgbClr val="9BAAC0"/>
+                </a:solidFill>
+                <a:latin typeface="Arial"/>
+              </a:rPr>
+              <a:t>semana?'</a:t>
+            </a:r>
+          </a:p>
+          <a:p>
+            <a:pPr algn="l">
+              <a:lnSpc>
+                <a:spcPct val="128000"/>
+              </a:lnSpc>
+            </a:pPr>
+            <a:r>
+              <a:rPr sz="1250" b="0">
+                <a:solidFill>
+                  <a:srgbClr val="9BAAC0"/>
+                </a:solidFill>
+                <a:latin typeface="Arial"/>
+              </a:rPr>
+              <a:t/>
+            </a:r>
+          </a:p>
+          <a:p>
+            <a:pPr algn="l">
+              <a:lnSpc>
+                <a:spcPct val="128000"/>
+              </a:lnSpc>
+            </a:pPr>
+            <a:r>
+              <a:rPr sz="1250" b="0">
+                <a:solidFill>
+                  <a:srgbClr val="9BAAC0"/>
+                </a:solidFill>
+                <a:latin typeface="Arial"/>
+              </a:rPr>
+              <a:t>O Genie responde em</a:t>
+            </a:r>
+          </a:p>
+          <a:p>
+            <a:pPr algn="l">
+              <a:lnSpc>
+                <a:spcPct val="128000"/>
+              </a:lnSpc>
+            </a:pPr>
+            <a:r>
+              <a:rPr sz="1250" b="0">
+                <a:solidFill>
+                  <a:srgbClr val="9BAAC0"/>
+                </a:solidFill>
+                <a:latin typeface="Arial"/>
+              </a:rPr>
+              <a:t>português — e mostra</a:t>
+            </a:r>
+          </a:p>
+          <a:p>
+            <a:pPr algn="l">
+              <a:lnSpc>
+                <a:spcPct val="128000"/>
+              </a:lnSpc>
+            </a:pPr>
+            <a:r>
+              <a:rPr sz="1250" b="0">
+                <a:solidFill>
+                  <a:srgbClr val="9BAAC0"/>
+                </a:solidFill>
+                <a:latin typeface="Arial"/>
+              </a:rPr>
+              <a:t>o SQL que gerou.</a:t>
+            </a:r>
+          </a:p>
+        </p:txBody>
+      </p:sp>
+      <p:sp>
+        <p:nvSpPr>
+          <p:cNvPr id="14" name="Rounded Rectangle 13"/>
           <p:cNvSpPr/>
           <p:nvPr/>
         </p:nvSpPr>
         <p:spPr>
           <a:xfrm>
-            <a:off x="685800" y="3392424"/>
-            <a:ext cx="10820095" cy="621792"/>
-          </a:xfrm>
-          <a:prstGeom prst="roundRect">
-            <a:avLst>
-              <a:gd name="adj" fmla="val 8000"/>
-            </a:avLst>
-          </a:prstGeom>
-          <a:solidFill>
-            <a:srgbClr val="0D1522"/>
-          </a:solidFill>
-          <a:ln w="15875">
-            <a:solidFill>
-              <a:srgbClr val="1F3A5A"/>
-            </a:solidFill>
-          </a:ln>
-          <a:effectLst/>
-        </p:spPr>
-        <p:style>
-          <a:lnRef idx="1">
-            <a:schemeClr val="accent1"/>
-          </a:lnRef>
-          <a:fillRef idx="3">
-            <a:schemeClr val="accent1"/>
-          </a:fillRef>
-          <a:effectRef idx="2">
-            <a:schemeClr val="accent1"/>
-          </a:effectRef>
-          <a:fontRef idx="minor">
-            <a:schemeClr val="lt1"/>
-          </a:fontRef>
-        </p:style>
-        <p:txBody>
-          <a:bodyPr rtlCol="0" anchor="ctr"/>
-          <a:lstStyle/>
-          <a:p>
-            <a:pPr algn="ctr"/>
-          </a:p>
-        </p:txBody>
-      </p:sp>
-      <p:sp>
-        <p:nvSpPr>
-          <p:cNvPr id="14" name="TextBox 13"/>
-          <p:cNvSpPr txBox="1"/>
-          <p:nvPr/>
-        </p:nvSpPr>
-        <p:spPr>
-          <a:xfrm>
-            <a:off x="996696" y="3591877"/>
-            <a:ext cx="4389120" cy="621792"/>
-          </a:xfrm>
-          <a:prstGeom prst="rect">
-            <a:avLst/>
-          </a:prstGeom>
-          <a:noFill/>
-        </p:spPr>
-        <p:txBody>
-          <a:bodyPr wrap="square" lIns="0" rIns="0" tIns="0" bIns="0" anchor="t">
-            <a:spAutoFit/>
-          </a:bodyPr>
-          <a:lstStyle/>
-          <a:p>
-            <a:pPr algn="l">
-              <a:lnSpc>
-                <a:spcPct val="100000"/>
-              </a:lnSpc>
-            </a:pPr>
-            <a:r>
-              <a:rPr sz="1350" b="1">
-                <a:solidFill>
-                  <a:srgbClr val="FFFFFF"/>
-                </a:solidFill>
-                <a:latin typeface="Arial"/>
-              </a:rPr>
-              <a:t>sugerir_produtos</a:t>
-            </a:r>
-          </a:p>
-        </p:txBody>
-      </p:sp>
-      <p:sp>
-        <p:nvSpPr>
-          <p:cNvPr id="15" name="TextBox 14"/>
-          <p:cNvSpPr txBox="1"/>
-          <p:nvPr/>
-        </p:nvSpPr>
-        <p:spPr>
-          <a:xfrm>
-            <a:off x="5568696" y="3591877"/>
-            <a:ext cx="5608015" cy="621792"/>
-          </a:xfrm>
-          <a:prstGeom prst="rect">
-            <a:avLst/>
-          </a:prstGeom>
-          <a:noFill/>
-        </p:spPr>
-        <p:txBody>
-          <a:bodyPr wrap="square" lIns="0" rIns="0" tIns="0" bIns="0" anchor="t">
-            <a:spAutoFit/>
-          </a:bodyPr>
-          <a:lstStyle/>
-          <a:p>
-            <a:pPr algn="l">
-              <a:lnSpc>
-                <a:spcPct val="100000"/>
-              </a:lnSpc>
-            </a:pPr>
-            <a:r>
-              <a:rPr sz="1350" b="0">
-                <a:solidFill>
-                  <a:srgbClr val="9BAAC0"/>
-                </a:solidFill>
-                <a:latin typeface="Arial"/>
-              </a:rPr>
-              <a:t>O que ele compra e parou de comprar</a:t>
-            </a:r>
-          </a:p>
-        </p:txBody>
-      </p:sp>
-      <p:sp>
-        <p:nvSpPr>
-          <p:cNvPr id="16" name="Rounded Rectangle 15"/>
-          <p:cNvSpPr/>
-          <p:nvPr/>
-        </p:nvSpPr>
-        <p:spPr>
-          <a:xfrm>
-            <a:off x="685800" y="4142232"/>
-            <a:ext cx="10820095" cy="621792"/>
-          </a:xfrm>
-          <a:prstGeom prst="roundRect">
-            <a:avLst>
-              <a:gd name="adj" fmla="val 8000"/>
-            </a:avLst>
-          </a:prstGeom>
-          <a:solidFill>
-            <a:srgbClr val="0D1522"/>
-          </a:solidFill>
-          <a:ln w="15875">
-            <a:solidFill>
-              <a:srgbClr val="1F3A5A"/>
-            </a:solidFill>
-          </a:ln>
-          <a:effectLst/>
-        </p:spPr>
-        <p:style>
-          <a:lnRef idx="1">
-            <a:schemeClr val="accent1"/>
-          </a:lnRef>
-          <a:fillRef idx="3">
-            <a:schemeClr val="accent1"/>
-          </a:fillRef>
-          <a:effectRef idx="2">
-            <a:schemeClr val="accent1"/>
-          </a:effectRef>
-          <a:fontRef idx="minor">
-            <a:schemeClr val="lt1"/>
-          </a:fontRef>
-        </p:style>
-        <p:txBody>
-          <a:bodyPr rtlCol="0" anchor="ctr"/>
-          <a:lstStyle/>
-          <a:p>
-            <a:pPr algn="ctr"/>
-          </a:p>
-        </p:txBody>
-      </p:sp>
-      <p:sp>
-        <p:nvSpPr>
-          <p:cNvPr id="17" name="TextBox 16"/>
-          <p:cNvSpPr txBox="1"/>
-          <p:nvPr/>
-        </p:nvSpPr>
-        <p:spPr>
-          <a:xfrm>
-            <a:off x="996696" y="4341685"/>
-            <a:ext cx="4389120" cy="621792"/>
-          </a:xfrm>
-          <a:prstGeom prst="rect">
-            <a:avLst/>
-          </a:prstGeom>
-          <a:noFill/>
-        </p:spPr>
-        <p:txBody>
-          <a:bodyPr wrap="square" lIns="0" rIns="0" tIns="0" bIns="0" anchor="t">
-            <a:spAutoFit/>
-          </a:bodyPr>
-          <a:lstStyle/>
-          <a:p>
-            <a:pPr algn="l">
-              <a:lnSpc>
-                <a:spcPct val="100000"/>
-              </a:lnSpc>
-            </a:pPr>
-            <a:r>
-              <a:rPr sz="1350" b="1">
-                <a:solidFill>
-                  <a:srgbClr val="FFFFFF"/>
-                </a:solidFill>
-                <a:latin typeface="Arial"/>
-              </a:rPr>
-              <a:t>checar_disponibilidade</a:t>
-            </a:r>
-          </a:p>
-        </p:txBody>
-      </p:sp>
-      <p:sp>
-        <p:nvSpPr>
-          <p:cNvPr id="18" name="TextBox 17"/>
-          <p:cNvSpPr txBox="1"/>
-          <p:nvPr/>
-        </p:nvSpPr>
-        <p:spPr>
-          <a:xfrm>
-            <a:off x="5568696" y="4341685"/>
-            <a:ext cx="5608015" cy="621792"/>
-          </a:xfrm>
-          <a:prstGeom prst="rect">
-            <a:avLst/>
-          </a:prstGeom>
-          <a:noFill/>
-        </p:spPr>
-        <p:txBody>
-          <a:bodyPr wrap="square" lIns="0" rIns="0" tIns="0" bIns="0" anchor="t">
-            <a:spAutoFit/>
-          </a:bodyPr>
-          <a:lstStyle/>
-          <a:p>
-            <a:pPr algn="l">
-              <a:lnSpc>
-                <a:spcPct val="100000"/>
-              </a:lnSpc>
-            </a:pPr>
-            <a:r>
-              <a:rPr sz="1350" b="0">
-                <a:solidFill>
-                  <a:srgbClr val="9BAAC0"/>
-                </a:solidFill>
-                <a:latin typeface="Arial"/>
-              </a:rPr>
-              <a:t>Estoque real, com flag de ruptura</a:t>
-            </a:r>
-          </a:p>
-        </p:txBody>
-      </p:sp>
-      <p:sp>
-        <p:nvSpPr>
-          <p:cNvPr id="19" name="Rounded Rectangle 18"/>
-          <p:cNvSpPr/>
-          <p:nvPr/>
-        </p:nvSpPr>
-        <p:spPr>
-          <a:xfrm>
-            <a:off x="685800" y="5504688"/>
-            <a:ext cx="10820095" cy="914400"/>
+            <a:off x="685800" y="4023360"/>
+            <a:ext cx="10820095" cy="960120"/>
           </a:xfrm>
           <a:prstGeom prst="roundRect">
             <a:avLst>
@@ -28820,14 +28927,14 @@
       </p:sp>
       <p:sp>
         <p:nvSpPr>
-          <p:cNvPr id="20" name="TextBox 19"/>
-          <p:cNvSpPr txBox="1"/>
-          <p:nvPr/>
-        </p:nvSpPr>
-        <p:spPr>
-          <a:xfrm>
-            <a:off x="1069848" y="5720079"/>
-            <a:ext cx="10051999" cy="914400"/>
+          <p:cNvPr id="15" name="TextBox 14"/>
+          <p:cNvSpPr txBox="1"/>
+          <p:nvPr/>
+        </p:nvSpPr>
+        <p:spPr>
+          <a:xfrm>
+            <a:off x="1069848" y="4261612"/>
+            <a:ext cx="10051999" cy="960120"/>
           </a:xfrm>
           <a:prstGeom prst="rect">
             <a:avLst/>
@@ -28852,7 +28959,7 @@
                 </a:solidFill>
                 <a:latin typeface="Arial"/>
               </a:rPr>
-              <a:t>Regra do sistema: use sempre as ferramentas, nunca invente número.</a:t>
+              <a:t>As três leem a MESMA tabela. Nenhuma delas tem número inventado:</a:t>
             </a:r>
           </a:p>
           <a:p>
@@ -28868,7 +28975,7 @@
                 </a:solidFill>
                 <a:latin typeface="Arial"/>
               </a:rPr>
-              <a:t>Agente sem dado organizado por trás é chute com sotaque.</a:t>
+              <a:t>o que muda é só a porta de entrada.</a:t>
             </a:r>
           </a:p>
         </p:txBody>
@@ -28933,7 +29040,7 @@
                 </a:solidFill>
                 <a:latin typeface="Arial"/>
               </a:rPr>
-              <a:t>O QUE O VENDEDOR ABRE NA SEGUNDA DE MANHÃ</a:t>
+              <a:t>A ÚLTIMA CAMADA</a:t>
             </a:r>
           </a:p>
         </p:txBody>
@@ -28972,7 +29079,7 @@
                 </a:solidFill>
                 <a:latin typeface="Arial"/>
               </a:rPr>
-              <a:t>A resposta para o diretor</a:t>
+              <a:t>Ele não inventa. Ele consulta.</a:t>
             </a:r>
           </a:p>
         </p:txBody>
@@ -29018,14 +29125,92 @@
       </p:sp>
       <p:sp>
         <p:nvSpPr>
-          <p:cNvPr id="5" name="Rounded Rectangle 4"/>
+          <p:cNvPr id="5" name="TextBox 4"/>
+          <p:cNvSpPr txBox="1"/>
+          <p:nvPr/>
+        </p:nvSpPr>
+        <p:spPr>
+          <a:xfrm>
+            <a:off x="996696" y="1508760"/>
+            <a:ext cx="4572000" cy="274320"/>
+          </a:xfrm>
+          <a:prstGeom prst="rect">
+            <a:avLst/>
+          </a:prstGeom>
+          <a:noFill/>
+        </p:spPr>
+        <p:txBody>
+          <a:bodyPr wrap="square" lIns="0" rIns="0" tIns="0" bIns="0" anchor="t">
+            <a:spAutoFit/>
+          </a:bodyPr>
+          <a:lstStyle/>
+          <a:p>
+            <a:pPr algn="l">
+              <a:lnSpc>
+                <a:spcPct val="100000"/>
+              </a:lnSpc>
+            </a:pPr>
+            <a:r>
+              <a:rPr sz="1100" b="1" spc="140">
+                <a:solidFill>
+                  <a:srgbClr val="3B9DF5"/>
+                </a:solidFill>
+                <a:latin typeface="Arial"/>
+              </a:rPr>
+              <a:t>FERRAMENTA</a:t>
+            </a:r>
+          </a:p>
+        </p:txBody>
+      </p:sp>
+      <p:sp>
+        <p:nvSpPr>
+          <p:cNvPr id="6" name="TextBox 5"/>
+          <p:cNvSpPr txBox="1"/>
+          <p:nvPr/>
+        </p:nvSpPr>
+        <p:spPr>
+          <a:xfrm>
+            <a:off x="5568696" y="1508760"/>
+            <a:ext cx="5608015" cy="274320"/>
+          </a:xfrm>
+          <a:prstGeom prst="rect">
+            <a:avLst/>
+          </a:prstGeom>
+          <a:noFill/>
+        </p:spPr>
+        <p:txBody>
+          <a:bodyPr wrap="square" lIns="0" rIns="0" tIns="0" bIns="0" anchor="t">
+            <a:spAutoFit/>
+          </a:bodyPr>
+          <a:lstStyle/>
+          <a:p>
+            <a:pPr algn="l">
+              <a:lnSpc>
+                <a:spcPct val="100000"/>
+              </a:lnSpc>
+            </a:pPr>
+            <a:r>
+              <a:rPr sz="1100" b="1" spc="140">
+                <a:solidFill>
+                  <a:srgbClr val="3B9DF5"/>
+                </a:solidFill>
+                <a:latin typeface="Arial"/>
+              </a:rPr>
+              <a:t>O QUE FAZ</a:t>
+            </a:r>
+          </a:p>
+        </p:txBody>
+      </p:sp>
+      <p:sp>
+        <p:nvSpPr>
+          <p:cNvPr id="7" name="Rounded Rectangle 6"/>
           <p:cNvSpPr/>
           <p:nvPr/>
         </p:nvSpPr>
         <p:spPr>
           <a:xfrm>
-            <a:off x="685800" y="1508760"/>
-            <a:ext cx="10820095" cy="3703320"/>
+            <a:off x="685800" y="1892808"/>
+            <a:ext cx="10820095" cy="621792"/>
           </a:xfrm>
           <a:prstGeom prst="roundRect">
             <a:avLst>
@@ -29034,6 +29219,510 @@
           </a:prstGeom>
           <a:solidFill>
             <a:srgbClr val="0D1522"/>
+          </a:solidFill>
+          <a:ln w="15875">
+            <a:solidFill>
+              <a:srgbClr val="1F3A5A"/>
+            </a:solidFill>
+          </a:ln>
+          <a:effectLst/>
+        </p:spPr>
+        <p:style>
+          <a:lnRef idx="1">
+            <a:schemeClr val="accent1"/>
+          </a:lnRef>
+          <a:fillRef idx="3">
+            <a:schemeClr val="accent1"/>
+          </a:fillRef>
+          <a:effectRef idx="2">
+            <a:schemeClr val="accent1"/>
+          </a:effectRef>
+          <a:fontRef idx="minor">
+            <a:schemeClr val="lt1"/>
+          </a:fontRef>
+        </p:style>
+        <p:txBody>
+          <a:bodyPr rtlCol="0" anchor="ctr"/>
+          <a:lstStyle/>
+          <a:p>
+            <a:pPr algn="ctr"/>
+          </a:p>
+        </p:txBody>
+      </p:sp>
+      <p:sp>
+        <p:nvSpPr>
+          <p:cNvPr id="8" name="TextBox 7"/>
+          <p:cNvSpPr txBox="1"/>
+          <p:nvPr/>
+        </p:nvSpPr>
+        <p:spPr>
+          <a:xfrm>
+            <a:off x="996696" y="2092261"/>
+            <a:ext cx="4389120" cy="621792"/>
+          </a:xfrm>
+          <a:prstGeom prst="rect">
+            <a:avLst/>
+          </a:prstGeom>
+          <a:noFill/>
+        </p:spPr>
+        <p:txBody>
+          <a:bodyPr wrap="square" lIns="0" rIns="0" tIns="0" bIns="0" anchor="t">
+            <a:spAutoFit/>
+          </a:bodyPr>
+          <a:lstStyle/>
+          <a:p>
+            <a:pPr algn="l">
+              <a:lnSpc>
+                <a:spcPct val="100000"/>
+              </a:lnSpc>
+            </a:pPr>
+            <a:r>
+              <a:rPr sz="1350" b="1">
+                <a:solidFill>
+                  <a:srgbClr val="FFFFFF"/>
+                </a:solidFill>
+                <a:latin typeface="Arial"/>
+              </a:rPr>
+              <a:t>priorizar_carteira</a:t>
+            </a:r>
+          </a:p>
+        </p:txBody>
+      </p:sp>
+      <p:sp>
+        <p:nvSpPr>
+          <p:cNvPr id="9" name="TextBox 8"/>
+          <p:cNvSpPr txBox="1"/>
+          <p:nvPr/>
+        </p:nvSpPr>
+        <p:spPr>
+          <a:xfrm>
+            <a:off x="5568696" y="2092261"/>
+            <a:ext cx="5608015" cy="621792"/>
+          </a:xfrm>
+          <a:prstGeom prst="rect">
+            <a:avLst/>
+          </a:prstGeom>
+          <a:noFill/>
+        </p:spPr>
+        <p:txBody>
+          <a:bodyPr wrap="square" lIns="0" rIns="0" tIns="0" bIns="0" anchor="t">
+            <a:spAutoFit/>
+          </a:bodyPr>
+          <a:lstStyle/>
+          <a:p>
+            <a:pPr algn="l">
+              <a:lnSpc>
+                <a:spcPct val="100000"/>
+              </a:lnSpc>
+            </a:pPr>
+            <a:r>
+              <a:rPr sz="1350" b="0">
+                <a:solidFill>
+                  <a:srgbClr val="9BAAC0"/>
+                </a:solidFill>
+                <a:latin typeface="Arial"/>
+              </a:rPr>
+              <a:t>Cruza carteira + score + features e ordena</a:t>
+            </a:r>
+          </a:p>
+        </p:txBody>
+      </p:sp>
+      <p:sp>
+        <p:nvSpPr>
+          <p:cNvPr id="10" name="Rounded Rectangle 9"/>
+          <p:cNvSpPr/>
+          <p:nvPr/>
+        </p:nvSpPr>
+        <p:spPr>
+          <a:xfrm>
+            <a:off x="685800" y="2642616"/>
+            <a:ext cx="10820095" cy="621792"/>
+          </a:xfrm>
+          <a:prstGeom prst="roundRect">
+            <a:avLst>
+              <a:gd name="adj" fmla="val 8000"/>
+            </a:avLst>
+          </a:prstGeom>
+          <a:solidFill>
+            <a:srgbClr val="0D1522"/>
+          </a:solidFill>
+          <a:ln w="15875">
+            <a:solidFill>
+              <a:srgbClr val="1F3A5A"/>
+            </a:solidFill>
+          </a:ln>
+          <a:effectLst/>
+        </p:spPr>
+        <p:style>
+          <a:lnRef idx="1">
+            <a:schemeClr val="accent1"/>
+          </a:lnRef>
+          <a:fillRef idx="3">
+            <a:schemeClr val="accent1"/>
+          </a:fillRef>
+          <a:effectRef idx="2">
+            <a:schemeClr val="accent1"/>
+          </a:effectRef>
+          <a:fontRef idx="minor">
+            <a:schemeClr val="lt1"/>
+          </a:fontRef>
+        </p:style>
+        <p:txBody>
+          <a:bodyPr rtlCol="0" anchor="ctr"/>
+          <a:lstStyle/>
+          <a:p>
+            <a:pPr algn="ctr"/>
+          </a:p>
+        </p:txBody>
+      </p:sp>
+      <p:sp>
+        <p:nvSpPr>
+          <p:cNvPr id="11" name="TextBox 10"/>
+          <p:cNvSpPr txBox="1"/>
+          <p:nvPr/>
+        </p:nvSpPr>
+        <p:spPr>
+          <a:xfrm>
+            <a:off x="996696" y="2842069"/>
+            <a:ext cx="4389120" cy="621792"/>
+          </a:xfrm>
+          <a:prstGeom prst="rect">
+            <a:avLst/>
+          </a:prstGeom>
+          <a:noFill/>
+        </p:spPr>
+        <p:txBody>
+          <a:bodyPr wrap="square" lIns="0" rIns="0" tIns="0" bIns="0" anchor="t">
+            <a:spAutoFit/>
+          </a:bodyPr>
+          <a:lstStyle/>
+          <a:p>
+            <a:pPr algn="l">
+              <a:lnSpc>
+                <a:spcPct val="100000"/>
+              </a:lnSpc>
+            </a:pPr>
+            <a:r>
+              <a:rPr sz="1350" b="1">
+                <a:solidFill>
+                  <a:srgbClr val="FFFFFF"/>
+                </a:solidFill>
+                <a:latin typeface="Arial"/>
+              </a:rPr>
+              <a:t>contexto_cliente</a:t>
+            </a:r>
+          </a:p>
+        </p:txBody>
+      </p:sp>
+      <p:sp>
+        <p:nvSpPr>
+          <p:cNvPr id="12" name="TextBox 11"/>
+          <p:cNvSpPr txBox="1"/>
+          <p:nvPr/>
+        </p:nvSpPr>
+        <p:spPr>
+          <a:xfrm>
+            <a:off x="5568696" y="2842069"/>
+            <a:ext cx="5608015" cy="621792"/>
+          </a:xfrm>
+          <a:prstGeom prst="rect">
+            <a:avLst/>
+          </a:prstGeom>
+          <a:noFill/>
+        </p:spPr>
+        <p:txBody>
+          <a:bodyPr wrap="square" lIns="0" rIns="0" tIns="0" bIns="0" anchor="t">
+            <a:spAutoFit/>
+          </a:bodyPr>
+          <a:lstStyle/>
+          <a:p>
+            <a:pPr algn="l">
+              <a:lnSpc>
+                <a:spcPct val="100000"/>
+              </a:lnSpc>
+            </a:pPr>
+            <a:r>
+              <a:rPr sz="1350" b="0">
+                <a:solidFill>
+                  <a:srgbClr val="9BAAC0"/>
+                </a:solidFill>
+                <a:latin typeface="Arial"/>
+              </a:rPr>
+              <a:t>Histórico, ticket médio, marcas preferidas</a:t>
+            </a:r>
+          </a:p>
+        </p:txBody>
+      </p:sp>
+      <p:sp>
+        <p:nvSpPr>
+          <p:cNvPr id="13" name="Rounded Rectangle 12"/>
+          <p:cNvSpPr/>
+          <p:nvPr/>
+        </p:nvSpPr>
+        <p:spPr>
+          <a:xfrm>
+            <a:off x="685800" y="3392424"/>
+            <a:ext cx="10820095" cy="621792"/>
+          </a:xfrm>
+          <a:prstGeom prst="roundRect">
+            <a:avLst>
+              <a:gd name="adj" fmla="val 8000"/>
+            </a:avLst>
+          </a:prstGeom>
+          <a:solidFill>
+            <a:srgbClr val="0D1522"/>
+          </a:solidFill>
+          <a:ln w="15875">
+            <a:solidFill>
+              <a:srgbClr val="1F3A5A"/>
+            </a:solidFill>
+          </a:ln>
+          <a:effectLst/>
+        </p:spPr>
+        <p:style>
+          <a:lnRef idx="1">
+            <a:schemeClr val="accent1"/>
+          </a:lnRef>
+          <a:fillRef idx="3">
+            <a:schemeClr val="accent1"/>
+          </a:fillRef>
+          <a:effectRef idx="2">
+            <a:schemeClr val="accent1"/>
+          </a:effectRef>
+          <a:fontRef idx="minor">
+            <a:schemeClr val="lt1"/>
+          </a:fontRef>
+        </p:style>
+        <p:txBody>
+          <a:bodyPr rtlCol="0" anchor="ctr"/>
+          <a:lstStyle/>
+          <a:p>
+            <a:pPr algn="ctr"/>
+          </a:p>
+        </p:txBody>
+      </p:sp>
+      <p:sp>
+        <p:nvSpPr>
+          <p:cNvPr id="14" name="TextBox 13"/>
+          <p:cNvSpPr txBox="1"/>
+          <p:nvPr/>
+        </p:nvSpPr>
+        <p:spPr>
+          <a:xfrm>
+            <a:off x="996696" y="3591877"/>
+            <a:ext cx="4389120" cy="621792"/>
+          </a:xfrm>
+          <a:prstGeom prst="rect">
+            <a:avLst/>
+          </a:prstGeom>
+          <a:noFill/>
+        </p:spPr>
+        <p:txBody>
+          <a:bodyPr wrap="square" lIns="0" rIns="0" tIns="0" bIns="0" anchor="t">
+            <a:spAutoFit/>
+          </a:bodyPr>
+          <a:lstStyle/>
+          <a:p>
+            <a:pPr algn="l">
+              <a:lnSpc>
+                <a:spcPct val="100000"/>
+              </a:lnSpc>
+            </a:pPr>
+            <a:r>
+              <a:rPr sz="1350" b="1">
+                <a:solidFill>
+                  <a:srgbClr val="FFFFFF"/>
+                </a:solidFill>
+                <a:latin typeface="Arial"/>
+              </a:rPr>
+              <a:t>sugerir_produtos</a:t>
+            </a:r>
+          </a:p>
+        </p:txBody>
+      </p:sp>
+      <p:sp>
+        <p:nvSpPr>
+          <p:cNvPr id="15" name="TextBox 14"/>
+          <p:cNvSpPr txBox="1"/>
+          <p:nvPr/>
+        </p:nvSpPr>
+        <p:spPr>
+          <a:xfrm>
+            <a:off x="5568696" y="3591877"/>
+            <a:ext cx="5608015" cy="621792"/>
+          </a:xfrm>
+          <a:prstGeom prst="rect">
+            <a:avLst/>
+          </a:prstGeom>
+          <a:noFill/>
+        </p:spPr>
+        <p:txBody>
+          <a:bodyPr wrap="square" lIns="0" rIns="0" tIns="0" bIns="0" anchor="t">
+            <a:spAutoFit/>
+          </a:bodyPr>
+          <a:lstStyle/>
+          <a:p>
+            <a:pPr algn="l">
+              <a:lnSpc>
+                <a:spcPct val="100000"/>
+              </a:lnSpc>
+            </a:pPr>
+            <a:r>
+              <a:rPr sz="1350" b="0">
+                <a:solidFill>
+                  <a:srgbClr val="9BAAC0"/>
+                </a:solidFill>
+                <a:latin typeface="Arial"/>
+              </a:rPr>
+              <a:t>O que ele compra e parou de comprar</a:t>
+            </a:r>
+          </a:p>
+        </p:txBody>
+      </p:sp>
+      <p:sp>
+        <p:nvSpPr>
+          <p:cNvPr id="16" name="Rounded Rectangle 15"/>
+          <p:cNvSpPr/>
+          <p:nvPr/>
+        </p:nvSpPr>
+        <p:spPr>
+          <a:xfrm>
+            <a:off x="685800" y="4142232"/>
+            <a:ext cx="10820095" cy="621792"/>
+          </a:xfrm>
+          <a:prstGeom prst="roundRect">
+            <a:avLst>
+              <a:gd name="adj" fmla="val 8000"/>
+            </a:avLst>
+          </a:prstGeom>
+          <a:solidFill>
+            <a:srgbClr val="0D1522"/>
+          </a:solidFill>
+          <a:ln w="15875">
+            <a:solidFill>
+              <a:srgbClr val="1F3A5A"/>
+            </a:solidFill>
+          </a:ln>
+          <a:effectLst/>
+        </p:spPr>
+        <p:style>
+          <a:lnRef idx="1">
+            <a:schemeClr val="accent1"/>
+          </a:lnRef>
+          <a:fillRef idx="3">
+            <a:schemeClr val="accent1"/>
+          </a:fillRef>
+          <a:effectRef idx="2">
+            <a:schemeClr val="accent1"/>
+          </a:effectRef>
+          <a:fontRef idx="minor">
+            <a:schemeClr val="lt1"/>
+          </a:fontRef>
+        </p:style>
+        <p:txBody>
+          <a:bodyPr rtlCol="0" anchor="ctr"/>
+          <a:lstStyle/>
+          <a:p>
+            <a:pPr algn="ctr"/>
+          </a:p>
+        </p:txBody>
+      </p:sp>
+      <p:sp>
+        <p:nvSpPr>
+          <p:cNvPr id="17" name="TextBox 16"/>
+          <p:cNvSpPr txBox="1"/>
+          <p:nvPr/>
+        </p:nvSpPr>
+        <p:spPr>
+          <a:xfrm>
+            <a:off x="996696" y="4341685"/>
+            <a:ext cx="4389120" cy="621792"/>
+          </a:xfrm>
+          <a:prstGeom prst="rect">
+            <a:avLst/>
+          </a:prstGeom>
+          <a:noFill/>
+        </p:spPr>
+        <p:txBody>
+          <a:bodyPr wrap="square" lIns="0" rIns="0" tIns="0" bIns="0" anchor="t">
+            <a:spAutoFit/>
+          </a:bodyPr>
+          <a:lstStyle/>
+          <a:p>
+            <a:pPr algn="l">
+              <a:lnSpc>
+                <a:spcPct val="100000"/>
+              </a:lnSpc>
+            </a:pPr>
+            <a:r>
+              <a:rPr sz="1350" b="1">
+                <a:solidFill>
+                  <a:srgbClr val="FFFFFF"/>
+                </a:solidFill>
+                <a:latin typeface="Arial"/>
+              </a:rPr>
+              <a:t>checar_disponibilidade</a:t>
+            </a:r>
+          </a:p>
+        </p:txBody>
+      </p:sp>
+      <p:sp>
+        <p:nvSpPr>
+          <p:cNvPr id="18" name="TextBox 17"/>
+          <p:cNvSpPr txBox="1"/>
+          <p:nvPr/>
+        </p:nvSpPr>
+        <p:spPr>
+          <a:xfrm>
+            <a:off x="5568696" y="4341685"/>
+            <a:ext cx="5608015" cy="621792"/>
+          </a:xfrm>
+          <a:prstGeom prst="rect">
+            <a:avLst/>
+          </a:prstGeom>
+          <a:noFill/>
+        </p:spPr>
+        <p:txBody>
+          <a:bodyPr wrap="square" lIns="0" rIns="0" tIns="0" bIns="0" anchor="t">
+            <a:spAutoFit/>
+          </a:bodyPr>
+          <a:lstStyle/>
+          <a:p>
+            <a:pPr algn="l">
+              <a:lnSpc>
+                <a:spcPct val="100000"/>
+              </a:lnSpc>
+            </a:pPr>
+            <a:r>
+              <a:rPr sz="1350" b="0">
+                <a:solidFill>
+                  <a:srgbClr val="9BAAC0"/>
+                </a:solidFill>
+                <a:latin typeface="Arial"/>
+              </a:rPr>
+              <a:t>Estoque real, com flag de ruptura</a:t>
+            </a:r>
+          </a:p>
+        </p:txBody>
+      </p:sp>
+      <p:sp>
+        <p:nvSpPr>
+          <p:cNvPr id="19" name="Rounded Rectangle 18"/>
+          <p:cNvSpPr/>
+          <p:nvPr/>
+        </p:nvSpPr>
+        <p:spPr>
+          <a:xfrm>
+            <a:off x="685800" y="5504688"/>
+            <a:ext cx="10820095" cy="914400"/>
+          </a:xfrm>
+          <a:prstGeom prst="roundRect">
+            <a:avLst>
+              <a:gd name="adj" fmla="val 8000"/>
+            </a:avLst>
+          </a:prstGeom>
+          <a:solidFill>
+            <a:srgbClr val="142337"/>
           </a:solidFill>
           <a:ln w="19050">
             <a:solidFill>
@@ -29066,445 +29755,55 @@
       </p:sp>
       <p:sp>
         <p:nvSpPr>
-          <p:cNvPr id="6" name="TextBox 5"/>
-          <p:cNvSpPr txBox="1"/>
-          <p:nvPr/>
-        </p:nvSpPr>
-        <p:spPr>
-          <a:xfrm>
-            <a:off x="1143000" y="1783080"/>
-            <a:ext cx="1463040" cy="274320"/>
-          </a:xfrm>
-          <a:prstGeom prst="rect">
-            <a:avLst/>
-          </a:prstGeom>
-          <a:noFill/>
-        </p:spPr>
-        <p:txBody>
-          <a:bodyPr wrap="square" lIns="0" rIns="0" tIns="0" bIns="0" anchor="t">
-            <a:spAutoFit/>
-          </a:bodyPr>
-          <a:lstStyle/>
-          <a:p>
-            <a:pPr algn="l">
-              <a:lnSpc>
-                <a:spcPct val="100000"/>
-              </a:lnSpc>
-            </a:pPr>
-            <a:r>
-              <a:rPr sz="1300" b="1">
-                <a:solidFill>
-                  <a:srgbClr val="566A85"/>
-                </a:solidFill>
-                <a:latin typeface="Arial"/>
-              </a:rPr>
-              <a:t>Vendedor:</a:t>
-            </a:r>
-          </a:p>
-        </p:txBody>
-      </p:sp>
-      <p:sp>
-        <p:nvSpPr>
-          <p:cNvPr id="7" name="TextBox 6"/>
-          <p:cNvSpPr txBox="1"/>
-          <p:nvPr/>
-        </p:nvSpPr>
-        <p:spPr>
-          <a:xfrm>
-            <a:off x="2697480" y="1783080"/>
-            <a:ext cx="7315200" cy="274320"/>
-          </a:xfrm>
-          <a:prstGeom prst="rect">
-            <a:avLst/>
-          </a:prstGeom>
-          <a:noFill/>
-        </p:spPr>
-        <p:txBody>
-          <a:bodyPr wrap="square" lIns="0" rIns="0" tIns="0" bIns="0" anchor="t">
-            <a:spAutoFit/>
-          </a:bodyPr>
-          <a:lstStyle/>
-          <a:p>
-            <a:pPr algn="l">
-              <a:lnSpc>
-                <a:spcPct val="100000"/>
-              </a:lnSpc>
-            </a:pPr>
-            <a:r>
-              <a:rPr sz="1450" b="0">
+          <p:cNvPr id="20" name="TextBox 19"/>
+          <p:cNvSpPr txBox="1"/>
+          <p:nvPr/>
+        </p:nvSpPr>
+        <p:spPr>
+          <a:xfrm>
+            <a:off x="1069848" y="5720079"/>
+            <a:ext cx="10051999" cy="914400"/>
+          </a:xfrm>
+          <a:prstGeom prst="rect">
+            <a:avLst/>
+          </a:prstGeom>
+          <a:noFill/>
+        </p:spPr>
+        <p:txBody>
+          <a:bodyPr wrap="square" lIns="0" rIns="0" tIns="0" bIns="0" anchor="t">
+            <a:spAutoFit/>
+          </a:bodyPr>
+          <a:lstStyle/>
+          <a:p>
+            <a:pPr algn="l">
+              <a:lnSpc>
+                <a:spcPct val="128000"/>
+              </a:lnSpc>
+            </a:pPr>
+            <a:r>
+              <a:rPr sz="1600" b="1">
                 <a:solidFill>
                   <a:srgbClr val="FFFFFF"/>
                 </a:solidFill>
                 <a:latin typeface="Arial"/>
               </a:rPr>
-              <a:t>Quem eu ligo essa semana?</a:t>
-            </a:r>
-          </a:p>
-        </p:txBody>
-      </p:sp>
-      <p:sp>
-        <p:nvSpPr>
-          <p:cNvPr id="8" name="TextBox 7"/>
-          <p:cNvSpPr txBox="1"/>
-          <p:nvPr/>
-        </p:nvSpPr>
-        <p:spPr>
-          <a:xfrm>
-            <a:off x="1143000" y="2221992"/>
-            <a:ext cx="1463040" cy="274320"/>
-          </a:xfrm>
-          <a:prstGeom prst="rect">
-            <a:avLst/>
-          </a:prstGeom>
-          <a:noFill/>
-        </p:spPr>
-        <p:txBody>
-          <a:bodyPr wrap="square" lIns="0" rIns="0" tIns="0" bIns="0" anchor="t">
-            <a:spAutoFit/>
-          </a:bodyPr>
-          <a:lstStyle/>
-          <a:p>
-            <a:pPr algn="l">
-              <a:lnSpc>
-                <a:spcPct val="100000"/>
-              </a:lnSpc>
-            </a:pPr>
-            <a:r>
-              <a:rPr sz="1300" b="1">
-                <a:solidFill>
-                  <a:srgbClr val="3B9DF5"/>
-                </a:solidFill>
-                <a:latin typeface="Arial"/>
-              </a:rPr>
-              <a:t>Agente:</a:t>
-            </a:r>
-          </a:p>
-        </p:txBody>
-      </p:sp>
-      <p:sp>
-        <p:nvSpPr>
-          <p:cNvPr id="9" name="TextBox 8"/>
-          <p:cNvSpPr txBox="1"/>
-          <p:nvPr/>
-        </p:nvSpPr>
-        <p:spPr>
-          <a:xfrm>
-            <a:off x="2697480" y="2221992"/>
-            <a:ext cx="7315200" cy="274320"/>
-          </a:xfrm>
-          <a:prstGeom prst="rect">
-            <a:avLst/>
-          </a:prstGeom>
-          <a:noFill/>
-        </p:spPr>
-        <p:txBody>
-          <a:bodyPr wrap="square" lIns="0" rIns="0" tIns="0" bIns="0" anchor="t">
-            <a:spAutoFit/>
-          </a:bodyPr>
-          <a:lstStyle/>
-          <a:p>
-            <a:pPr algn="l">
-              <a:lnSpc>
-                <a:spcPct val="100000"/>
-              </a:lnSpc>
-            </a:pPr>
-            <a:r>
-              <a:rPr sz="1450" b="0">
+              <a:t>Regra do sistema: use sempre as ferramentas, nunca invente número.</a:t>
+            </a:r>
+          </a:p>
+          <a:p>
+            <a:pPr algn="l">
+              <a:lnSpc>
+                <a:spcPct val="128000"/>
+              </a:lnSpc>
+            </a:pPr>
+            <a:r>
+              <a:rPr sz="1600" b="1">
                 <a:solidFill>
                   <a:srgbClr val="FFFFFF"/>
                 </a:solidFill>
                 <a:latin typeface="Arial"/>
               </a:rPr>
-              <a:t>Seus 6 desta semana, em ordem:</a:t>
-            </a:r>
-          </a:p>
-        </p:txBody>
-      </p:sp>
-      <p:sp>
-        <p:nvSpPr>
-          <p:cNvPr id="10" name="TextBox 9"/>
-          <p:cNvSpPr txBox="1"/>
-          <p:nvPr/>
-        </p:nvSpPr>
-        <p:spPr>
-          <a:xfrm>
-            <a:off x="1325880" y="2679192"/>
-            <a:ext cx="9539935" cy="274320"/>
-          </a:xfrm>
-          <a:prstGeom prst="rect">
-            <a:avLst/>
-          </a:prstGeom>
-          <a:noFill/>
-        </p:spPr>
-        <p:txBody>
-          <a:bodyPr wrap="square" lIns="0" rIns="0" tIns="0" bIns="0" anchor="t">
-            <a:spAutoFit/>
-          </a:bodyPr>
-          <a:lstStyle/>
-          <a:p>
-            <a:pPr algn="l">
-              <a:lnSpc>
-                <a:spcPct val="100000"/>
-              </a:lnSpc>
-            </a:pPr>
-            <a:r>
-              <a:rPr sz="1500" b="1">
-                <a:solidFill>
-                  <a:srgbClr val="7CC8FF"/>
-                </a:solidFill>
-                <a:latin typeface="Arial"/>
-              </a:rPr>
-              <a:t>1. Perfumaria Aurora — score 0,91</a:t>
-            </a:r>
-          </a:p>
-        </p:txBody>
-      </p:sp>
-      <p:sp>
-        <p:nvSpPr>
-          <p:cNvPr id="11" name="TextBox 10"/>
-          <p:cNvSpPr txBox="1"/>
-          <p:nvPr/>
-        </p:nvSpPr>
-        <p:spPr>
-          <a:xfrm>
-            <a:off x="1325880" y="2953512"/>
-            <a:ext cx="9539935" cy="548640"/>
-          </a:xfrm>
-          <a:prstGeom prst="rect">
-            <a:avLst/>
-          </a:prstGeom>
-          <a:noFill/>
-        </p:spPr>
-        <p:txBody>
-          <a:bodyPr wrap="square" lIns="0" rIns="0" tIns="0" bIns="0" anchor="t">
-            <a:spAutoFit/>
-          </a:bodyPr>
-          <a:lstStyle/>
-          <a:p>
-            <a:pPr algn="l">
-              <a:lnSpc>
-                <a:spcPct val="130000"/>
-              </a:lnSpc>
-            </a:pPr>
-            <a:r>
-              <a:rPr sz="1300" b="0">
-                <a:solidFill>
-                  <a:srgbClr val="9BAAC0"/>
-                </a:solidFill>
-                <a:latin typeface="Arial"/>
-              </a:rPr>
-              <a:t>Comprava a cada 8 dias, está há 26 sem pedido. Risco de perder.</a:t>
-            </a:r>
-          </a:p>
-          <a:p>
-            <a:pPr algn="l">
-              <a:lnSpc>
-                <a:spcPct val="130000"/>
-              </a:lnSpc>
-            </a:pPr>
-            <a:r>
-              <a:rPr sz="1300" b="0">
-                <a:solidFill>
-                  <a:srgbClr val="9BAAC0"/>
-                </a:solidFill>
-                <a:latin typeface="Arial"/>
-              </a:rPr>
-              <a:t>Ofereça: Layali Oud EDP — em estoque.</a:t>
-            </a:r>
-          </a:p>
-        </p:txBody>
-      </p:sp>
-      <p:sp>
-        <p:nvSpPr>
-          <p:cNvPr id="12" name="TextBox 11"/>
-          <p:cNvSpPr txBox="1"/>
-          <p:nvPr/>
-        </p:nvSpPr>
-        <p:spPr>
-          <a:xfrm>
-            <a:off x="1325880" y="3648456"/>
-            <a:ext cx="9539935" cy="274320"/>
-          </a:xfrm>
-          <a:prstGeom prst="rect">
-            <a:avLst/>
-          </a:prstGeom>
-          <a:noFill/>
-        </p:spPr>
-        <p:txBody>
-          <a:bodyPr wrap="square" lIns="0" rIns="0" tIns="0" bIns="0" anchor="t">
-            <a:spAutoFit/>
-          </a:bodyPr>
-          <a:lstStyle/>
-          <a:p>
-            <a:pPr algn="l">
-              <a:lnSpc>
-                <a:spcPct val="100000"/>
-              </a:lnSpc>
-            </a:pPr>
-            <a:r>
-              <a:rPr sz="1500" b="1">
-                <a:solidFill>
-                  <a:srgbClr val="7CC8FF"/>
-                </a:solidFill>
-                <a:latin typeface="Arial"/>
-              </a:rPr>
-              <a:t>2. Drogaria Bella Vita — score 0,87</a:t>
-            </a:r>
-          </a:p>
-        </p:txBody>
-      </p:sp>
-      <p:sp>
-        <p:nvSpPr>
-          <p:cNvPr id="13" name="TextBox 12"/>
-          <p:cNvSpPr txBox="1"/>
-          <p:nvPr/>
-        </p:nvSpPr>
-        <p:spPr>
-          <a:xfrm>
-            <a:off x="1325880" y="3922776"/>
-            <a:ext cx="9539935" cy="548640"/>
-          </a:xfrm>
-          <a:prstGeom prst="rect">
-            <a:avLst/>
-          </a:prstGeom>
-          <a:noFill/>
-        </p:spPr>
-        <p:txBody>
-          <a:bodyPr wrap="square" lIns="0" rIns="0" tIns="0" bIns="0" anchor="t">
-            <a:spAutoFit/>
-          </a:bodyPr>
-          <a:lstStyle/>
-          <a:p>
-            <a:pPr algn="l">
-              <a:lnSpc>
-                <a:spcPct val="130000"/>
-              </a:lnSpc>
-            </a:pPr>
-            <a:r>
-              <a:rPr sz="1300" b="0">
-                <a:solidFill>
-                  <a:srgbClr val="9BAAC0"/>
-                </a:solidFill>
-                <a:latin typeface="Arial"/>
-              </a:rPr>
-              <a:t>Comprou o lançamento no mês passado. Alta chance de repetir.</a:t>
-            </a:r>
-          </a:p>
-        </p:txBody>
-      </p:sp>
-      <p:sp>
-        <p:nvSpPr>
-          <p:cNvPr id="14" name="TextBox 13"/>
-          <p:cNvSpPr txBox="1"/>
-          <p:nvPr/>
-        </p:nvSpPr>
-        <p:spPr>
-          <a:xfrm>
-            <a:off x="1325880" y="4379976"/>
-            <a:ext cx="9539935" cy="274320"/>
-          </a:xfrm>
-          <a:prstGeom prst="rect">
-            <a:avLst/>
-          </a:prstGeom>
-          <a:noFill/>
-        </p:spPr>
-        <p:txBody>
-          <a:bodyPr wrap="square" lIns="0" rIns="0" tIns="0" bIns="0" anchor="t">
-            <a:spAutoFit/>
-          </a:bodyPr>
-          <a:lstStyle/>
-          <a:p>
-            <a:pPr algn="l">
-              <a:lnSpc>
-                <a:spcPct val="100000"/>
-              </a:lnSpc>
-            </a:pPr>
-            <a:r>
-              <a:rPr sz="1500" b="1">
-                <a:solidFill>
-                  <a:srgbClr val="7CC8FF"/>
-                </a:solidFill>
-                <a:latin typeface="Arial"/>
-              </a:rPr>
-              <a:t>3. Boutique Essenza — score 0,84</a:t>
-            </a:r>
-          </a:p>
-        </p:txBody>
-      </p:sp>
-      <p:sp>
-        <p:nvSpPr>
-          <p:cNvPr id="15" name="TextBox 14"/>
-          <p:cNvSpPr txBox="1"/>
-          <p:nvPr/>
-        </p:nvSpPr>
-        <p:spPr>
-          <a:xfrm>
-            <a:off x="1325880" y="4654296"/>
-            <a:ext cx="9539935" cy="548640"/>
-          </a:xfrm>
-          <a:prstGeom prst="rect">
-            <a:avLst/>
-          </a:prstGeom>
-          <a:noFill/>
-        </p:spPr>
-        <p:txBody>
-          <a:bodyPr wrap="square" lIns="0" rIns="0" tIns="0" bIns="0" anchor="t">
-            <a:spAutoFit/>
-          </a:bodyPr>
-          <a:lstStyle/>
-          <a:p>
-            <a:pPr algn="l">
-              <a:lnSpc>
-                <a:spcPct val="130000"/>
-              </a:lnSpc>
-            </a:pPr>
-            <a:r>
-              <a:rPr sz="1300" b="0">
-                <a:solidFill>
-                  <a:srgbClr val="9BAAC0"/>
-                </a:solidFill>
-                <a:latin typeface="Arial"/>
-              </a:rPr>
-              <a:t>R$ 62 mil no ano. Cliente grande, manter próximo.</a:t>
-            </a:r>
-          </a:p>
-        </p:txBody>
-      </p:sp>
-      <p:sp>
-        <p:nvSpPr>
-          <p:cNvPr id="16" name="TextBox 15"/>
-          <p:cNvSpPr txBox="1"/>
-          <p:nvPr/>
-        </p:nvSpPr>
-        <p:spPr>
-          <a:xfrm>
-            <a:off x="685800" y="5870448"/>
-            <a:ext cx="10820095" cy="365760"/>
-          </a:xfrm>
-          <a:prstGeom prst="rect">
-            <a:avLst/>
-          </a:prstGeom>
-          <a:noFill/>
-        </p:spPr>
-        <p:txBody>
-          <a:bodyPr wrap="square" lIns="0" rIns="0" tIns="0" bIns="0" anchor="t">
-            <a:spAutoFit/>
-          </a:bodyPr>
-          <a:lstStyle/>
-          <a:p>
-            <a:pPr algn="l">
-              <a:lnSpc>
-                <a:spcPct val="100000"/>
-              </a:lnSpc>
-            </a:pPr>
-            <a:r>
-              <a:rPr sz="1600" b="1">
-                <a:solidFill>
-                  <a:srgbClr val="7CC8FF"/>
-                </a:solidFill>
-                <a:latin typeface="Arial"/>
-              </a:rPr>
-              <a:t>Os 200 de maior score da base inteira — e a fatia de cada vendedor varia de 2 a 10.</a:t>
+              <a:t>Agente sem dado organizado por trás é chute com sotaque.</a:t>
             </a:r>
           </a:p>
         </p:txBody>
@@ -29569,7 +29868,7 @@
                 </a:solidFill>
                 <a:latin typeface="Arial"/>
               </a:rPr>
-              <a:t>A LISTA NÃO REPETE A MESMA DESCULPA</a:t>
+              <a:t>O QUE O VENDEDOR ABRE NA SEGUNDA DE MANHÃ</a:t>
             </a:r>
           </a:p>
         </p:txBody>
@@ -29608,7 +29907,7 @@
                 </a:solidFill>
                 <a:latin typeface="Arial"/>
               </a:rPr>
-              <a:t>Seis motivos, 200 contatos</a:t>
+              <a:t>A resposta para o diretor</a:t>
             </a:r>
           </a:p>
         </p:txBody>
@@ -29654,131 +29953,14 @@
       </p:sp>
       <p:sp>
         <p:nvSpPr>
-          <p:cNvPr id="5" name="TextBox 4"/>
-          <p:cNvSpPr txBox="1"/>
-          <p:nvPr/>
-        </p:nvSpPr>
-        <p:spPr>
-          <a:xfrm>
-            <a:off x="886968" y="1508760"/>
-            <a:ext cx="3017520" cy="274320"/>
-          </a:xfrm>
-          <a:prstGeom prst="rect">
-            <a:avLst/>
-          </a:prstGeom>
-          <a:noFill/>
-        </p:spPr>
-        <p:txBody>
-          <a:bodyPr wrap="square" lIns="0" rIns="0" tIns="0" bIns="0" anchor="t">
-            <a:spAutoFit/>
-          </a:bodyPr>
-          <a:lstStyle/>
-          <a:p>
-            <a:pPr algn="l">
-              <a:lnSpc>
-                <a:spcPct val="100000"/>
-              </a:lnSpc>
-            </a:pPr>
-            <a:r>
-              <a:rPr sz="1100" b="1" spc="120">
-                <a:solidFill>
-                  <a:srgbClr val="3B9DF5"/>
-                </a:solidFill>
-                <a:latin typeface="Arial"/>
-              </a:rPr>
-              <a:t>MOTIVO</a:t>
-            </a:r>
-          </a:p>
-        </p:txBody>
-      </p:sp>
-      <p:sp>
-        <p:nvSpPr>
-          <p:cNvPr id="6" name="TextBox 5"/>
-          <p:cNvSpPr txBox="1"/>
-          <p:nvPr/>
-        </p:nvSpPr>
-        <p:spPr>
-          <a:xfrm>
-            <a:off x="4178807" y="1508760"/>
-            <a:ext cx="1280160" cy="274320"/>
-          </a:xfrm>
-          <a:prstGeom prst="rect">
-            <a:avLst/>
-          </a:prstGeom>
-          <a:noFill/>
-        </p:spPr>
-        <p:txBody>
-          <a:bodyPr wrap="square" lIns="0" rIns="0" tIns="0" bIns="0" anchor="t">
-            <a:spAutoFit/>
-          </a:bodyPr>
-          <a:lstStyle/>
-          <a:p>
-            <a:pPr algn="l">
-              <a:lnSpc>
-                <a:spcPct val="100000"/>
-              </a:lnSpc>
-            </a:pPr>
-            <a:r>
-              <a:rPr sz="1100" b="1" spc="120">
-                <a:solidFill>
-                  <a:srgbClr val="3B9DF5"/>
-                </a:solidFill>
-                <a:latin typeface="Arial"/>
-              </a:rPr>
-              <a:t>CONTATOS</a:t>
-            </a:r>
-          </a:p>
-        </p:txBody>
-      </p:sp>
-      <p:sp>
-        <p:nvSpPr>
-          <p:cNvPr id="7" name="TextBox 6"/>
-          <p:cNvSpPr txBox="1"/>
-          <p:nvPr/>
-        </p:nvSpPr>
-        <p:spPr>
-          <a:xfrm>
-            <a:off x="5733288" y="1508760"/>
-            <a:ext cx="5696712" cy="274320"/>
-          </a:xfrm>
-          <a:prstGeom prst="rect">
-            <a:avLst/>
-          </a:prstGeom>
-          <a:noFill/>
-        </p:spPr>
-        <p:txBody>
-          <a:bodyPr wrap="square" lIns="0" rIns="0" tIns="0" bIns="0" anchor="t">
-            <a:spAutoFit/>
-          </a:bodyPr>
-          <a:lstStyle/>
-          <a:p>
-            <a:pPr algn="l">
-              <a:lnSpc>
-                <a:spcPct val="100000"/>
-              </a:lnSpc>
-            </a:pPr>
-            <a:r>
-              <a:rPr sz="1100" b="1" spc="120">
-                <a:solidFill>
-                  <a:srgbClr val="3B9DF5"/>
-                </a:solidFill>
-                <a:latin typeface="Arial"/>
-              </a:rPr>
-              <a:t>O QUE O VENDEDOR FAZ</a:t>
-            </a:r>
-          </a:p>
-        </p:txBody>
-      </p:sp>
-      <p:sp>
-        <p:nvSpPr>
-          <p:cNvPr id="8" name="Rounded Rectangle 7"/>
+          <p:cNvPr id="5" name="Rounded Rectangle 4"/>
           <p:cNvSpPr/>
           <p:nvPr/>
         </p:nvSpPr>
         <p:spPr>
           <a:xfrm>
-            <a:off x="685800" y="1874520"/>
-            <a:ext cx="10820095" cy="457200"/>
+            <a:off x="685800" y="1508760"/>
+            <a:ext cx="10820095" cy="3703320"/>
           </a:xfrm>
           <a:prstGeom prst="roundRect">
             <a:avLst>
@@ -29788,9 +29970,9 @@
           <a:solidFill>
             <a:srgbClr val="0D1522"/>
           </a:solidFill>
-          <a:ln w="15875">
+          <a:ln w="19050">
             <a:solidFill>
-              <a:srgbClr val="1F3A5A"/>
+              <a:srgbClr val="3B9DF5"/>
             </a:solidFill>
           </a:ln>
           <a:effectLst/>
@@ -29819,14 +30001,131 @@
       </p:sp>
       <p:sp>
         <p:nvSpPr>
+          <p:cNvPr id="6" name="TextBox 5"/>
+          <p:cNvSpPr txBox="1"/>
+          <p:nvPr/>
+        </p:nvSpPr>
+        <p:spPr>
+          <a:xfrm>
+            <a:off x="1143000" y="1783080"/>
+            <a:ext cx="1463040" cy="274320"/>
+          </a:xfrm>
+          <a:prstGeom prst="rect">
+            <a:avLst/>
+          </a:prstGeom>
+          <a:noFill/>
+        </p:spPr>
+        <p:txBody>
+          <a:bodyPr wrap="square" lIns="0" rIns="0" tIns="0" bIns="0" anchor="t">
+            <a:spAutoFit/>
+          </a:bodyPr>
+          <a:lstStyle/>
+          <a:p>
+            <a:pPr algn="l">
+              <a:lnSpc>
+                <a:spcPct val="100000"/>
+              </a:lnSpc>
+            </a:pPr>
+            <a:r>
+              <a:rPr sz="1300" b="1">
+                <a:solidFill>
+                  <a:srgbClr val="566A85"/>
+                </a:solidFill>
+                <a:latin typeface="Arial"/>
+              </a:rPr>
+              <a:t>Vendedor:</a:t>
+            </a:r>
+          </a:p>
+        </p:txBody>
+      </p:sp>
+      <p:sp>
+        <p:nvSpPr>
+          <p:cNvPr id="7" name="TextBox 6"/>
+          <p:cNvSpPr txBox="1"/>
+          <p:nvPr/>
+        </p:nvSpPr>
+        <p:spPr>
+          <a:xfrm>
+            <a:off x="2697480" y="1783080"/>
+            <a:ext cx="7315200" cy="274320"/>
+          </a:xfrm>
+          <a:prstGeom prst="rect">
+            <a:avLst/>
+          </a:prstGeom>
+          <a:noFill/>
+        </p:spPr>
+        <p:txBody>
+          <a:bodyPr wrap="square" lIns="0" rIns="0" tIns="0" bIns="0" anchor="t">
+            <a:spAutoFit/>
+          </a:bodyPr>
+          <a:lstStyle/>
+          <a:p>
+            <a:pPr algn="l">
+              <a:lnSpc>
+                <a:spcPct val="100000"/>
+              </a:lnSpc>
+            </a:pPr>
+            <a:r>
+              <a:rPr sz="1450" b="0">
+                <a:solidFill>
+                  <a:srgbClr val="FFFFFF"/>
+                </a:solidFill>
+                <a:latin typeface="Arial"/>
+              </a:rPr>
+              <a:t>Quem eu ligo essa semana?</a:t>
+            </a:r>
+          </a:p>
+        </p:txBody>
+      </p:sp>
+      <p:sp>
+        <p:nvSpPr>
+          <p:cNvPr id="8" name="TextBox 7"/>
+          <p:cNvSpPr txBox="1"/>
+          <p:nvPr/>
+        </p:nvSpPr>
+        <p:spPr>
+          <a:xfrm>
+            <a:off x="1143000" y="2221992"/>
+            <a:ext cx="1463040" cy="274320"/>
+          </a:xfrm>
+          <a:prstGeom prst="rect">
+            <a:avLst/>
+          </a:prstGeom>
+          <a:noFill/>
+        </p:spPr>
+        <p:txBody>
+          <a:bodyPr wrap="square" lIns="0" rIns="0" tIns="0" bIns="0" anchor="t">
+            <a:spAutoFit/>
+          </a:bodyPr>
+          <a:lstStyle/>
+          <a:p>
+            <a:pPr algn="l">
+              <a:lnSpc>
+                <a:spcPct val="100000"/>
+              </a:lnSpc>
+            </a:pPr>
+            <a:r>
+              <a:rPr sz="1300" b="1">
+                <a:solidFill>
+                  <a:srgbClr val="3B9DF5"/>
+                </a:solidFill>
+                <a:latin typeface="Arial"/>
+              </a:rPr>
+              <a:t>Agente:</a:t>
+            </a:r>
+          </a:p>
+        </p:txBody>
+      </p:sp>
+      <p:sp>
+        <p:nvSpPr>
           <p:cNvPr id="9" name="TextBox 8"/>
           <p:cNvSpPr txBox="1"/>
           <p:nvPr/>
         </p:nvSpPr>
         <p:spPr>
           <a:xfrm>
-            <a:off x="886968" y="1999932"/>
-            <a:ext cx="3017520" cy="457200"/>
+            <a:off x="2697480" y="2221992"/>
+            <a:ext cx="7315200" cy="274320"/>
           </a:xfrm>
           <a:prstGeom prst="rect">
             <a:avLst/>
@@ -29845,13 +30144,13 @@
               </a:lnSpc>
             </a:pPr>
             <a:r>
-              <a:rPr sz="1250" b="1">
+              <a:rPr sz="1450" b="0">
                 <a:solidFill>
                   <a:srgbClr val="FFFFFF"/>
                 </a:solidFill>
                 <a:latin typeface="Arial"/>
               </a:rPr>
-              <a:t>Comprou lançamento</a:t>
+              <a:t>Seus 6 desta semana, em ordem:</a:t>
             </a:r>
           </a:p>
         </p:txBody>
@@ -29864,8 +30163,8 @@
         </p:nvSpPr>
         <p:spPr>
           <a:xfrm>
-            <a:off x="4178807" y="1999932"/>
-            <a:ext cx="1280160" cy="457200"/>
+            <a:off x="1325880" y="2679192"/>
+            <a:ext cx="9539935" cy="274320"/>
           </a:xfrm>
           <a:prstGeom prst="rect">
             <a:avLst/>
@@ -29884,27 +30183,82 @@
               </a:lnSpc>
             </a:pPr>
             <a:r>
-              <a:rPr sz="1250" b="0">
+              <a:rPr sz="1500" b="1">
+                <a:solidFill>
+                  <a:srgbClr val="7CC8FF"/>
+                </a:solidFill>
+                <a:latin typeface="Arial"/>
+              </a:rPr>
+              <a:t>1. Perfumaria Aurora — score 0,91</a:t>
+            </a:r>
+          </a:p>
+        </p:txBody>
+      </p:sp>
+      <p:sp>
+        <p:nvSpPr>
+          <p:cNvPr id="11" name="TextBox 10"/>
+          <p:cNvSpPr txBox="1"/>
+          <p:nvPr/>
+        </p:nvSpPr>
+        <p:spPr>
+          <a:xfrm>
+            <a:off x="1325880" y="2953512"/>
+            <a:ext cx="9539935" cy="548640"/>
+          </a:xfrm>
+          <a:prstGeom prst="rect">
+            <a:avLst/>
+          </a:prstGeom>
+          <a:noFill/>
+        </p:spPr>
+        <p:txBody>
+          <a:bodyPr wrap="square" lIns="0" rIns="0" tIns="0" bIns="0" anchor="t">
+            <a:spAutoFit/>
+          </a:bodyPr>
+          <a:lstStyle/>
+          <a:p>
+            <a:pPr algn="l">
+              <a:lnSpc>
+                <a:spcPct val="130000"/>
+              </a:lnSpc>
+            </a:pPr>
+            <a:r>
+              <a:rPr sz="1300" b="0">
                 <a:solidFill>
                   <a:srgbClr val="9BAAC0"/>
                 </a:solidFill>
-                <a:latin typeface="Consolas"/>
-              </a:rPr>
-              <a:t>67</a:t>
-            </a:r>
-          </a:p>
-        </p:txBody>
-      </p:sp>
-      <p:sp>
-        <p:nvSpPr>
-          <p:cNvPr id="11" name="TextBox 10"/>
-          <p:cNvSpPr txBox="1"/>
-          <p:nvPr/>
-        </p:nvSpPr>
-        <p:spPr>
-          <a:xfrm>
-            <a:off x="5733288" y="1999932"/>
-            <a:ext cx="5696712" cy="457200"/>
+                <a:latin typeface="Arial"/>
+              </a:rPr>
+              <a:t>Comprava a cada 8 dias, está há 26 sem pedido. Risco de perder.</a:t>
+            </a:r>
+          </a:p>
+          <a:p>
+            <a:pPr algn="l">
+              <a:lnSpc>
+                <a:spcPct val="130000"/>
+              </a:lnSpc>
+            </a:pPr>
+            <a:r>
+              <a:rPr sz="1300" b="0">
+                <a:solidFill>
+                  <a:srgbClr val="9BAAC0"/>
+                </a:solidFill>
+                <a:latin typeface="Arial"/>
+              </a:rPr>
+              <a:t>Ofereça: Layali Oud EDP — em estoque.</a:t>
+            </a:r>
+          </a:p>
+        </p:txBody>
+      </p:sp>
+      <p:sp>
+        <p:nvSpPr>
+          <p:cNvPr id="12" name="TextBox 11"/>
+          <p:cNvSpPr txBox="1"/>
+          <p:nvPr/>
+        </p:nvSpPr>
+        <p:spPr>
+          <a:xfrm>
+            <a:off x="1325880" y="3648456"/>
+            <a:ext cx="9539935" cy="274320"/>
           </a:xfrm>
           <a:prstGeom prst="rect">
             <a:avLst/>
@@ -29923,75 +30277,66 @@
               </a:lnSpc>
             </a:pPr>
             <a:r>
-              <a:rPr sz="1250" b="0">
+              <a:rPr sz="1500" b="1">
+                <a:solidFill>
+                  <a:srgbClr val="7CC8FF"/>
+                </a:solidFill>
+                <a:latin typeface="Arial"/>
+              </a:rPr>
+              <a:t>2. Drogaria Bella Vita — score 0,87</a:t>
+            </a:r>
+          </a:p>
+        </p:txBody>
+      </p:sp>
+      <p:sp>
+        <p:nvSpPr>
+          <p:cNvPr id="13" name="TextBox 12"/>
+          <p:cNvSpPr txBox="1"/>
+          <p:nvPr/>
+        </p:nvSpPr>
+        <p:spPr>
+          <a:xfrm>
+            <a:off x="1325880" y="3922776"/>
+            <a:ext cx="9539935" cy="548640"/>
+          </a:xfrm>
+          <a:prstGeom prst="rect">
+            <a:avLst/>
+          </a:prstGeom>
+          <a:noFill/>
+        </p:spPr>
+        <p:txBody>
+          <a:bodyPr wrap="square" lIns="0" rIns="0" tIns="0" bIns="0" anchor="t">
+            <a:spAutoFit/>
+          </a:bodyPr>
+          <a:lstStyle/>
+          <a:p>
+            <a:pPr algn="l">
+              <a:lnSpc>
+                <a:spcPct val="130000"/>
+              </a:lnSpc>
+            </a:pPr>
+            <a:r>
+              <a:rPr sz="1300" b="0">
                 <a:solidFill>
                   <a:srgbClr val="9BAAC0"/>
                 </a:solidFill>
-                <a:latin typeface="Consolas"/>
-              </a:rPr>
-              <a:t>Oferece o resto da linha nova</a:t>
-            </a:r>
-          </a:p>
-        </p:txBody>
-      </p:sp>
-      <p:sp>
-        <p:nvSpPr>
-          <p:cNvPr id="12" name="Rounded Rectangle 11"/>
-          <p:cNvSpPr/>
-          <p:nvPr/>
-        </p:nvSpPr>
-        <p:spPr>
-          <a:xfrm>
-            <a:off x="685800" y="2423160"/>
-            <a:ext cx="10820095" cy="457200"/>
-          </a:xfrm>
-          <a:prstGeom prst="roundRect">
-            <a:avLst>
-              <a:gd name="adj" fmla="val 8000"/>
-            </a:avLst>
-          </a:prstGeom>
-          <a:solidFill>
-            <a:srgbClr val="0D1522"/>
-          </a:solidFill>
-          <a:ln w="15875">
-            <a:solidFill>
-              <a:srgbClr val="1F3A5A"/>
-            </a:solidFill>
-          </a:ln>
-          <a:effectLst/>
-        </p:spPr>
-        <p:style>
-          <a:lnRef idx="1">
-            <a:schemeClr val="accent1"/>
-          </a:lnRef>
-          <a:fillRef idx="3">
-            <a:schemeClr val="accent1"/>
-          </a:fillRef>
-          <a:effectRef idx="2">
-            <a:schemeClr val="accent1"/>
-          </a:effectRef>
-          <a:fontRef idx="minor">
-            <a:schemeClr val="lt1"/>
-          </a:fontRef>
-        </p:style>
-        <p:txBody>
-          <a:bodyPr rtlCol="0" anchor="ctr"/>
-          <a:lstStyle/>
-          <a:p>
-            <a:pPr algn="ctr"/>
-          </a:p>
-        </p:txBody>
-      </p:sp>
-      <p:sp>
-        <p:nvSpPr>
-          <p:cNvPr id="13" name="TextBox 12"/>
-          <p:cNvSpPr txBox="1"/>
-          <p:nvPr/>
-        </p:nvSpPr>
-        <p:spPr>
-          <a:xfrm>
-            <a:off x="886968" y="2548572"/>
-            <a:ext cx="3017520" cy="457200"/>
+                <a:latin typeface="Arial"/>
+              </a:rPr>
+              <a:t>Comprou o lançamento no mês passado. Alta chance de repetir.</a:t>
+            </a:r>
+          </a:p>
+        </p:txBody>
+      </p:sp>
+      <p:sp>
+        <p:nvSpPr>
+          <p:cNvPr id="14" name="TextBox 13"/>
+          <p:cNvSpPr txBox="1"/>
+          <p:nvPr/>
+        </p:nvSpPr>
+        <p:spPr>
+          <a:xfrm>
+            <a:off x="1325880" y="4379976"/>
+            <a:ext cx="9539935" cy="274320"/>
           </a:xfrm>
           <a:prstGeom prst="rect">
             <a:avLst/>
@@ -30010,27 +30355,66 @@
               </a:lnSpc>
             </a:pPr>
             <a:r>
-              <a:rPr sz="1250" b="1">
-                <a:solidFill>
-                  <a:srgbClr val="FFFFFF"/>
-                </a:solidFill>
-                <a:latin typeface="Arial"/>
-              </a:rPr>
-              <a:t>Ciclo curto</a:t>
-            </a:r>
-          </a:p>
-        </p:txBody>
-      </p:sp>
-      <p:sp>
-        <p:nvSpPr>
-          <p:cNvPr id="14" name="TextBox 13"/>
-          <p:cNvSpPr txBox="1"/>
-          <p:nvPr/>
-        </p:nvSpPr>
-        <p:spPr>
-          <a:xfrm>
-            <a:off x="4178807" y="2548572"/>
-            <a:ext cx="1280160" cy="457200"/>
+              <a:rPr sz="1500" b="1">
+                <a:solidFill>
+                  <a:srgbClr val="7CC8FF"/>
+                </a:solidFill>
+                <a:latin typeface="Arial"/>
+              </a:rPr>
+              <a:t>3. Boutique Essenza — score 0,84</a:t>
+            </a:r>
+          </a:p>
+        </p:txBody>
+      </p:sp>
+      <p:sp>
+        <p:nvSpPr>
+          <p:cNvPr id="15" name="TextBox 14"/>
+          <p:cNvSpPr txBox="1"/>
+          <p:nvPr/>
+        </p:nvSpPr>
+        <p:spPr>
+          <a:xfrm>
+            <a:off x="1325880" y="4654296"/>
+            <a:ext cx="9539935" cy="548640"/>
+          </a:xfrm>
+          <a:prstGeom prst="rect">
+            <a:avLst/>
+          </a:prstGeom>
+          <a:noFill/>
+        </p:spPr>
+        <p:txBody>
+          <a:bodyPr wrap="square" lIns="0" rIns="0" tIns="0" bIns="0" anchor="t">
+            <a:spAutoFit/>
+          </a:bodyPr>
+          <a:lstStyle/>
+          <a:p>
+            <a:pPr algn="l">
+              <a:lnSpc>
+                <a:spcPct val="130000"/>
+              </a:lnSpc>
+            </a:pPr>
+            <a:r>
+              <a:rPr sz="1300" b="0">
+                <a:solidFill>
+                  <a:srgbClr val="9BAAC0"/>
+                </a:solidFill>
+                <a:latin typeface="Arial"/>
+              </a:rPr>
+              <a:t>R$ 62 mil no ano. Cliente grande, manter próximo.</a:t>
+            </a:r>
+          </a:p>
+        </p:txBody>
+      </p:sp>
+      <p:sp>
+        <p:nvSpPr>
+          <p:cNvPr id="16" name="TextBox 15"/>
+          <p:cNvSpPr txBox="1"/>
+          <p:nvPr/>
+        </p:nvSpPr>
+        <p:spPr>
+          <a:xfrm>
+            <a:off x="685800" y="5870448"/>
+            <a:ext cx="10820095" cy="365760"/>
           </a:xfrm>
           <a:prstGeom prst="rect">
             <a:avLst/>
@@ -30049,751 +30433,13 @@
               </a:lnSpc>
             </a:pPr>
             <a:r>
-              <a:rPr sz="1250" b="0">
-                <a:solidFill>
-                  <a:srgbClr val="9BAAC0"/>
-                </a:solidFill>
-                <a:latin typeface="Consolas"/>
-              </a:rPr>
-              <a:t>60</a:t>
-            </a:r>
-          </a:p>
-        </p:txBody>
-      </p:sp>
-      <p:sp>
-        <p:nvSpPr>
-          <p:cNvPr id="15" name="TextBox 14"/>
-          <p:cNvSpPr txBox="1"/>
-          <p:nvPr/>
-        </p:nvSpPr>
-        <p:spPr>
-          <a:xfrm>
-            <a:off x="5733288" y="2548572"/>
-            <a:ext cx="5696712" cy="457200"/>
-          </a:xfrm>
-          <a:prstGeom prst="rect">
-            <a:avLst/>
-          </a:prstGeom>
-          <a:noFill/>
-        </p:spPr>
-        <p:txBody>
-          <a:bodyPr wrap="square" lIns="0" rIns="0" tIns="0" bIns="0" anchor="t">
-            <a:spAutoFit/>
-          </a:bodyPr>
-          <a:lstStyle/>
-          <a:p>
-            <a:pPr algn="l">
-              <a:lnSpc>
-                <a:spcPct val="100000"/>
-              </a:lnSpc>
-            </a:pPr>
-            <a:r>
-              <a:rPr sz="1250" b="0">
-                <a:solidFill>
-                  <a:srgbClr val="9BAAC0"/>
-                </a:solidFill>
-                <a:latin typeface="Consolas"/>
-              </a:rPr>
-              <a:t>Mantém a cadência, não deixa esfriar</a:t>
-            </a:r>
-          </a:p>
-        </p:txBody>
-      </p:sp>
-      <p:sp>
-        <p:nvSpPr>
-          <p:cNvPr id="16" name="Rounded Rectangle 15"/>
-          <p:cNvSpPr/>
-          <p:nvPr/>
-        </p:nvSpPr>
-        <p:spPr>
-          <a:xfrm>
-            <a:off x="685800" y="2971800"/>
-            <a:ext cx="10820095" cy="457200"/>
-          </a:xfrm>
-          <a:prstGeom prst="roundRect">
-            <a:avLst>
-              <a:gd name="adj" fmla="val 8000"/>
-            </a:avLst>
-          </a:prstGeom>
-          <a:solidFill>
-            <a:srgbClr val="0D1522"/>
-          </a:solidFill>
-          <a:ln w="15875">
-            <a:solidFill>
-              <a:srgbClr val="1F3A5A"/>
-            </a:solidFill>
-          </a:ln>
-          <a:effectLst/>
-        </p:spPr>
-        <p:style>
-          <a:lnRef idx="1">
-            <a:schemeClr val="accent1"/>
-          </a:lnRef>
-          <a:fillRef idx="3">
-            <a:schemeClr val="accent1"/>
-          </a:fillRef>
-          <a:effectRef idx="2">
-            <a:schemeClr val="accent1"/>
-          </a:effectRef>
-          <a:fontRef idx="minor">
-            <a:schemeClr val="lt1"/>
-          </a:fontRef>
-        </p:style>
-        <p:txBody>
-          <a:bodyPr rtlCol="0" anchor="ctr"/>
-          <a:lstStyle/>
-          <a:p>
-            <a:pPr algn="ctr"/>
-          </a:p>
-        </p:txBody>
-      </p:sp>
-      <p:sp>
-        <p:nvSpPr>
-          <p:cNvPr id="17" name="TextBox 16"/>
-          <p:cNvSpPr txBox="1"/>
-          <p:nvPr/>
-        </p:nvSpPr>
-        <p:spPr>
-          <a:xfrm>
-            <a:off x="886968" y="3097212"/>
-            <a:ext cx="3017520" cy="457200"/>
-          </a:xfrm>
-          <a:prstGeom prst="rect">
-            <a:avLst/>
-          </a:prstGeom>
-          <a:noFill/>
-        </p:spPr>
-        <p:txBody>
-          <a:bodyPr wrap="square" lIns="0" rIns="0" tIns="0" bIns="0" anchor="t">
-            <a:spAutoFit/>
-          </a:bodyPr>
-          <a:lstStyle/>
-          <a:p>
-            <a:pPr algn="l">
-              <a:lnSpc>
-                <a:spcPct val="100000"/>
-              </a:lnSpc>
-            </a:pPr>
-            <a:r>
-              <a:rPr sz="1250" b="1">
-                <a:solidFill>
-                  <a:srgbClr val="FFFFFF"/>
-                </a:solidFill>
-                <a:latin typeface="Arial"/>
-              </a:rPr>
-              <a:t>Visita converte</a:t>
-            </a:r>
-          </a:p>
-        </p:txBody>
-      </p:sp>
-      <p:sp>
-        <p:nvSpPr>
-          <p:cNvPr id="18" name="TextBox 17"/>
-          <p:cNvSpPr txBox="1"/>
-          <p:nvPr/>
-        </p:nvSpPr>
-        <p:spPr>
-          <a:xfrm>
-            <a:off x="4178807" y="3097212"/>
-            <a:ext cx="1280160" cy="457200"/>
-          </a:xfrm>
-          <a:prstGeom prst="rect">
-            <a:avLst/>
-          </a:prstGeom>
-          <a:noFill/>
-        </p:spPr>
-        <p:txBody>
-          <a:bodyPr wrap="square" lIns="0" rIns="0" tIns="0" bIns="0" anchor="t">
-            <a:spAutoFit/>
-          </a:bodyPr>
-          <a:lstStyle/>
-          <a:p>
-            <a:pPr algn="l">
-              <a:lnSpc>
-                <a:spcPct val="100000"/>
-              </a:lnSpc>
-            </a:pPr>
-            <a:r>
-              <a:rPr sz="1250" b="0">
-                <a:solidFill>
-                  <a:srgbClr val="9BAAC0"/>
-                </a:solidFill>
-                <a:latin typeface="Consolas"/>
-              </a:rPr>
-              <a:t>38</a:t>
-            </a:r>
-          </a:p>
-        </p:txBody>
-      </p:sp>
-      <p:sp>
-        <p:nvSpPr>
-          <p:cNvPr id="19" name="TextBox 18"/>
-          <p:cNvSpPr txBox="1"/>
-          <p:nvPr/>
-        </p:nvSpPr>
-        <p:spPr>
-          <a:xfrm>
-            <a:off x="5733288" y="3097212"/>
-            <a:ext cx="5696712" cy="457200"/>
-          </a:xfrm>
-          <a:prstGeom prst="rect">
-            <a:avLst/>
-          </a:prstGeom>
-          <a:noFill/>
-        </p:spPr>
-        <p:txBody>
-          <a:bodyPr wrap="square" lIns="0" rIns="0" tIns="0" bIns="0" anchor="t">
-            <a:spAutoFit/>
-          </a:bodyPr>
-          <a:lstStyle/>
-          <a:p>
-            <a:pPr algn="l">
-              <a:lnSpc>
-                <a:spcPct val="100000"/>
-              </a:lnSpc>
-            </a:pPr>
-            <a:r>
-              <a:rPr sz="1250" b="0">
-                <a:solidFill>
-                  <a:srgbClr val="9BAAC0"/>
-                </a:solidFill>
-                <a:latin typeface="Consolas"/>
-              </a:rPr>
-              <a:t>Marca visita em vez de ligar</a:t>
-            </a:r>
-          </a:p>
-        </p:txBody>
-      </p:sp>
-      <p:sp>
-        <p:nvSpPr>
-          <p:cNvPr id="20" name="Rounded Rectangle 19"/>
-          <p:cNvSpPr/>
-          <p:nvPr/>
-        </p:nvSpPr>
-        <p:spPr>
-          <a:xfrm>
-            <a:off x="685800" y="3520440"/>
-            <a:ext cx="10820095" cy="457200"/>
-          </a:xfrm>
-          <a:prstGeom prst="roundRect">
-            <a:avLst>
-              <a:gd name="adj" fmla="val 8000"/>
-            </a:avLst>
-          </a:prstGeom>
-          <a:solidFill>
-            <a:srgbClr val="0D1522"/>
-          </a:solidFill>
-          <a:ln w="15875">
-            <a:solidFill>
-              <a:srgbClr val="1F3A5A"/>
-            </a:solidFill>
-          </a:ln>
-          <a:effectLst/>
-        </p:spPr>
-        <p:style>
-          <a:lnRef idx="1">
-            <a:schemeClr val="accent1"/>
-          </a:lnRef>
-          <a:fillRef idx="3">
-            <a:schemeClr val="accent1"/>
-          </a:fillRef>
-          <a:effectRef idx="2">
-            <a:schemeClr val="accent1"/>
-          </a:effectRef>
-          <a:fontRef idx="minor">
-            <a:schemeClr val="lt1"/>
-          </a:fontRef>
-        </p:style>
-        <p:txBody>
-          <a:bodyPr rtlCol="0" anchor="ctr"/>
-          <a:lstStyle/>
-          <a:p>
-            <a:pPr algn="ctr"/>
-          </a:p>
-        </p:txBody>
-      </p:sp>
-      <p:sp>
-        <p:nvSpPr>
-          <p:cNvPr id="21" name="TextBox 20"/>
-          <p:cNvSpPr txBox="1"/>
-          <p:nvPr/>
-        </p:nvSpPr>
-        <p:spPr>
-          <a:xfrm>
-            <a:off x="886968" y="3645852"/>
-            <a:ext cx="3017520" cy="457200"/>
-          </a:xfrm>
-          <a:prstGeom prst="rect">
-            <a:avLst/>
-          </a:prstGeom>
-          <a:noFill/>
-        </p:spPr>
-        <p:txBody>
-          <a:bodyPr wrap="square" lIns="0" rIns="0" tIns="0" bIns="0" anchor="t">
-            <a:spAutoFit/>
-          </a:bodyPr>
-          <a:lstStyle/>
-          <a:p>
-            <a:pPr algn="l">
-              <a:lnSpc>
-                <a:spcPct val="100000"/>
-              </a:lnSpc>
-            </a:pPr>
-            <a:r>
-              <a:rPr sz="1250" b="1">
-                <a:solidFill>
-                  <a:srgbClr val="FFFFFF"/>
-                </a:solidFill>
-                <a:latin typeface="Arial"/>
-              </a:rPr>
-              <a:t>Cliente grande</a:t>
-            </a:r>
-          </a:p>
-        </p:txBody>
-      </p:sp>
-      <p:sp>
-        <p:nvSpPr>
-          <p:cNvPr id="22" name="TextBox 21"/>
-          <p:cNvSpPr txBox="1"/>
-          <p:nvPr/>
-        </p:nvSpPr>
-        <p:spPr>
-          <a:xfrm>
-            <a:off x="4178807" y="3645852"/>
-            <a:ext cx="1280160" cy="457200"/>
-          </a:xfrm>
-          <a:prstGeom prst="rect">
-            <a:avLst/>
-          </a:prstGeom>
-          <a:noFill/>
-        </p:spPr>
-        <p:txBody>
-          <a:bodyPr wrap="square" lIns="0" rIns="0" tIns="0" bIns="0" anchor="t">
-            <a:spAutoFit/>
-          </a:bodyPr>
-          <a:lstStyle/>
-          <a:p>
-            <a:pPr algn="l">
-              <a:lnSpc>
-                <a:spcPct val="100000"/>
-              </a:lnSpc>
-            </a:pPr>
-            <a:r>
-              <a:rPr sz="1250" b="0">
-                <a:solidFill>
-                  <a:srgbClr val="9BAAC0"/>
-                </a:solidFill>
-                <a:latin typeface="Consolas"/>
-              </a:rPr>
-              <a:t>19</a:t>
-            </a:r>
-          </a:p>
-        </p:txBody>
-      </p:sp>
-      <p:sp>
-        <p:nvSpPr>
-          <p:cNvPr id="23" name="TextBox 22"/>
-          <p:cNvSpPr txBox="1"/>
-          <p:nvPr/>
-        </p:nvSpPr>
-        <p:spPr>
-          <a:xfrm>
-            <a:off x="5733288" y="3645852"/>
-            <a:ext cx="5696712" cy="457200"/>
-          </a:xfrm>
-          <a:prstGeom prst="rect">
-            <a:avLst/>
-          </a:prstGeom>
-          <a:noFill/>
-        </p:spPr>
-        <p:txBody>
-          <a:bodyPr wrap="square" lIns="0" rIns="0" tIns="0" bIns="0" anchor="t">
-            <a:spAutoFit/>
-          </a:bodyPr>
-          <a:lstStyle/>
-          <a:p>
-            <a:pPr algn="l">
-              <a:lnSpc>
-                <a:spcPct val="100000"/>
-              </a:lnSpc>
-            </a:pPr>
-            <a:r>
-              <a:rPr sz="1250" b="0">
-                <a:solidFill>
-                  <a:srgbClr val="9BAAC0"/>
-                </a:solidFill>
-                <a:latin typeface="Consolas"/>
-              </a:rPr>
-              <a:t>Relacionamento, não empurra produto</a:t>
-            </a:r>
-          </a:p>
-        </p:txBody>
-      </p:sp>
-      <p:sp>
-        <p:nvSpPr>
-          <p:cNvPr id="24" name="Rounded Rectangle 23"/>
-          <p:cNvSpPr/>
-          <p:nvPr/>
-        </p:nvSpPr>
-        <p:spPr>
-          <a:xfrm>
-            <a:off x="685800" y="4069080"/>
-            <a:ext cx="10820095" cy="457200"/>
-          </a:xfrm>
-          <a:prstGeom prst="roundRect">
-            <a:avLst>
-              <a:gd name="adj" fmla="val 8000"/>
-            </a:avLst>
-          </a:prstGeom>
-          <a:solidFill>
-            <a:srgbClr val="0D1522"/>
-          </a:solidFill>
-          <a:ln w="15875">
-            <a:solidFill>
-              <a:srgbClr val="1F3A5A"/>
-            </a:solidFill>
-          </a:ln>
-          <a:effectLst/>
-        </p:spPr>
-        <p:style>
-          <a:lnRef idx="1">
-            <a:schemeClr val="accent1"/>
-          </a:lnRef>
-          <a:fillRef idx="3">
-            <a:schemeClr val="accent1"/>
-          </a:fillRef>
-          <a:effectRef idx="2">
-            <a:schemeClr val="accent1"/>
-          </a:effectRef>
-          <a:fontRef idx="minor">
-            <a:schemeClr val="lt1"/>
-          </a:fontRef>
-        </p:style>
-        <p:txBody>
-          <a:bodyPr rtlCol="0" anchor="ctr"/>
-          <a:lstStyle/>
-          <a:p>
-            <a:pPr algn="ctr"/>
-          </a:p>
-        </p:txBody>
-      </p:sp>
-      <p:sp>
-        <p:nvSpPr>
-          <p:cNvPr id="25" name="TextBox 24"/>
-          <p:cNvSpPr txBox="1"/>
-          <p:nvPr/>
-        </p:nvSpPr>
-        <p:spPr>
-          <a:xfrm>
-            <a:off x="886968" y="4194492"/>
-            <a:ext cx="3017520" cy="457200"/>
-          </a:xfrm>
-          <a:prstGeom prst="rect">
-            <a:avLst/>
-          </a:prstGeom>
-          <a:noFill/>
-        </p:spPr>
-        <p:txBody>
-          <a:bodyPr wrap="square" lIns="0" rIns="0" tIns="0" bIns="0" anchor="t">
-            <a:spAutoFit/>
-          </a:bodyPr>
-          <a:lstStyle/>
-          <a:p>
-            <a:pPr algn="l">
-              <a:lnSpc>
-                <a:spcPct val="100000"/>
-              </a:lnSpc>
-            </a:pPr>
-            <a:r>
-              <a:rPr sz="1250" b="1">
-                <a:solidFill>
-                  <a:srgbClr val="FFFFFF"/>
-                </a:solidFill>
-                <a:latin typeface="Arial"/>
-              </a:rPr>
-              <a:t>Manutenção</a:t>
-            </a:r>
-          </a:p>
-        </p:txBody>
-      </p:sp>
-      <p:sp>
-        <p:nvSpPr>
-          <p:cNvPr id="26" name="TextBox 25"/>
-          <p:cNvSpPr txBox="1"/>
-          <p:nvPr/>
-        </p:nvSpPr>
-        <p:spPr>
-          <a:xfrm>
-            <a:off x="4178807" y="4194492"/>
-            <a:ext cx="1280160" cy="457200"/>
-          </a:xfrm>
-          <a:prstGeom prst="rect">
-            <a:avLst/>
-          </a:prstGeom>
-          <a:noFill/>
-        </p:spPr>
-        <p:txBody>
-          <a:bodyPr wrap="square" lIns="0" rIns="0" tIns="0" bIns="0" anchor="t">
-            <a:spAutoFit/>
-          </a:bodyPr>
-          <a:lstStyle/>
-          <a:p>
-            <a:pPr algn="l">
-              <a:lnSpc>
-                <a:spcPct val="100000"/>
-              </a:lnSpc>
-            </a:pPr>
-            <a:r>
-              <a:rPr sz="1250" b="0">
-                <a:solidFill>
-                  <a:srgbClr val="9BAAC0"/>
-                </a:solidFill>
-                <a:latin typeface="Consolas"/>
-              </a:rPr>
-              <a:t>12</a:t>
-            </a:r>
-          </a:p>
-        </p:txBody>
-      </p:sp>
-      <p:sp>
-        <p:nvSpPr>
-          <p:cNvPr id="27" name="TextBox 26"/>
-          <p:cNvSpPr txBox="1"/>
-          <p:nvPr/>
-        </p:nvSpPr>
-        <p:spPr>
-          <a:xfrm>
-            <a:off x="5733288" y="4194492"/>
-            <a:ext cx="5696712" cy="457200"/>
-          </a:xfrm>
-          <a:prstGeom prst="rect">
-            <a:avLst/>
-          </a:prstGeom>
-          <a:noFill/>
-        </p:spPr>
-        <p:txBody>
-          <a:bodyPr wrap="square" lIns="0" rIns="0" tIns="0" bIns="0" anchor="t">
-            <a:spAutoFit/>
-          </a:bodyPr>
-          <a:lstStyle/>
-          <a:p>
-            <a:pPr algn="l">
-              <a:lnSpc>
-                <a:spcPct val="100000"/>
-              </a:lnSpc>
-            </a:pPr>
-            <a:r>
-              <a:rPr sz="1250" b="0">
-                <a:solidFill>
-                  <a:srgbClr val="9BAAC0"/>
-                </a:solidFill>
-                <a:latin typeface="Consolas"/>
-              </a:rPr>
-              <a:t>Contato rápido de rotina</a:t>
-            </a:r>
-          </a:p>
-        </p:txBody>
-      </p:sp>
-      <p:sp>
-        <p:nvSpPr>
-          <p:cNvPr id="28" name="Rounded Rectangle 27"/>
-          <p:cNvSpPr/>
-          <p:nvPr/>
-        </p:nvSpPr>
-        <p:spPr>
-          <a:xfrm>
-            <a:off x="685800" y="4617720"/>
-            <a:ext cx="10820095" cy="457200"/>
-          </a:xfrm>
-          <a:prstGeom prst="roundRect">
-            <a:avLst>
-              <a:gd name="adj" fmla="val 8000"/>
-            </a:avLst>
-          </a:prstGeom>
-          <a:solidFill>
-            <a:srgbClr val="142337"/>
-          </a:solidFill>
-          <a:ln w="19050">
-            <a:solidFill>
-              <a:srgbClr val="FF6B5A"/>
-            </a:solidFill>
-          </a:ln>
-          <a:effectLst/>
-        </p:spPr>
-        <p:style>
-          <a:lnRef idx="1">
-            <a:schemeClr val="accent1"/>
-          </a:lnRef>
-          <a:fillRef idx="3">
-            <a:schemeClr val="accent1"/>
-          </a:fillRef>
-          <a:effectRef idx="2">
-            <a:schemeClr val="accent1"/>
-          </a:effectRef>
-          <a:fontRef idx="minor">
-            <a:schemeClr val="lt1"/>
-          </a:fontRef>
-        </p:style>
-        <p:txBody>
-          <a:bodyPr rtlCol="0" anchor="ctr"/>
-          <a:lstStyle/>
-          <a:p>
-            <a:pPr algn="ctr"/>
-          </a:p>
-        </p:txBody>
-      </p:sp>
-      <p:sp>
-        <p:nvSpPr>
-          <p:cNvPr id="29" name="TextBox 28"/>
-          <p:cNvSpPr txBox="1"/>
-          <p:nvPr/>
-        </p:nvSpPr>
-        <p:spPr>
-          <a:xfrm>
-            <a:off x="886968" y="4743132"/>
-            <a:ext cx="3017520" cy="457200"/>
-          </a:xfrm>
-          <a:prstGeom prst="rect">
-            <a:avLst/>
-          </a:prstGeom>
-          <a:noFill/>
-        </p:spPr>
-        <p:txBody>
-          <a:bodyPr wrap="square" lIns="0" rIns="0" tIns="0" bIns="0" anchor="t">
-            <a:spAutoFit/>
-          </a:bodyPr>
-          <a:lstStyle/>
-          <a:p>
-            <a:pPr algn="l">
-              <a:lnSpc>
-                <a:spcPct val="100000"/>
-              </a:lnSpc>
-            </a:pPr>
-            <a:r>
-              <a:rPr sz="1250" b="1">
-                <a:solidFill>
-                  <a:srgbClr val="FFFFFF"/>
-                </a:solidFill>
-                <a:latin typeface="Arial"/>
-              </a:rPr>
-              <a:t>Atrasado</a:t>
-            </a:r>
-          </a:p>
-        </p:txBody>
-      </p:sp>
-      <p:sp>
-        <p:nvSpPr>
-          <p:cNvPr id="30" name="TextBox 29"/>
-          <p:cNvSpPr txBox="1"/>
-          <p:nvPr/>
-        </p:nvSpPr>
-        <p:spPr>
-          <a:xfrm>
-            <a:off x="4178807" y="4743132"/>
-            <a:ext cx="1280160" cy="457200"/>
-          </a:xfrm>
-          <a:prstGeom prst="rect">
-            <a:avLst/>
-          </a:prstGeom>
-          <a:noFill/>
-        </p:spPr>
-        <p:txBody>
-          <a:bodyPr wrap="square" lIns="0" rIns="0" tIns="0" bIns="0" anchor="t">
-            <a:spAutoFit/>
-          </a:bodyPr>
-          <a:lstStyle/>
-          <a:p>
-            <a:pPr algn="l">
-              <a:lnSpc>
-                <a:spcPct val="100000"/>
-              </a:lnSpc>
-            </a:pPr>
-            <a:r>
-              <a:rPr sz="1250" b="1">
-                <a:solidFill>
-                  <a:srgbClr val="FF6B5A"/>
-                </a:solidFill>
-                <a:latin typeface="Consolas"/>
-              </a:rPr>
-              <a:t>4</a:t>
-            </a:r>
-          </a:p>
-        </p:txBody>
-      </p:sp>
-      <p:sp>
-        <p:nvSpPr>
-          <p:cNvPr id="31" name="TextBox 30"/>
-          <p:cNvSpPr txBox="1"/>
-          <p:nvPr/>
-        </p:nvSpPr>
-        <p:spPr>
-          <a:xfrm>
-            <a:off x="5733288" y="4743132"/>
-            <a:ext cx="5696712" cy="457200"/>
-          </a:xfrm>
-          <a:prstGeom prst="rect">
-            <a:avLst/>
-          </a:prstGeom>
-          <a:noFill/>
-        </p:spPr>
-        <p:txBody>
-          <a:bodyPr wrap="square" lIns="0" rIns="0" tIns="0" bIns="0" anchor="t">
-            <a:spAutoFit/>
-          </a:bodyPr>
-          <a:lstStyle/>
-          <a:p>
-            <a:pPr algn="l">
-              <a:lnSpc>
-                <a:spcPct val="100000"/>
-              </a:lnSpc>
-            </a:pPr>
-            <a:r>
-              <a:rPr sz="1250" b="1">
-                <a:solidFill>
-                  <a:srgbClr val="FF6B5A"/>
-                </a:solidFill>
-                <a:latin typeface="Consolas"/>
-              </a:rPr>
-              <a:t>Liga hoje — risco de perder</a:t>
-            </a:r>
-          </a:p>
-        </p:txBody>
-      </p:sp>
-      <p:sp>
-        <p:nvSpPr>
-          <p:cNvPr id="32" name="TextBox 31"/>
-          <p:cNvSpPr txBox="1"/>
-          <p:nvPr/>
-        </p:nvSpPr>
-        <p:spPr>
-          <a:xfrm>
-            <a:off x="685800" y="5943600"/>
-            <a:ext cx="10820095" cy="365760"/>
-          </a:xfrm>
-          <a:prstGeom prst="rect">
-            <a:avLst/>
-          </a:prstGeom>
-          <a:noFill/>
-        </p:spPr>
-        <p:txBody>
-          <a:bodyPr wrap="square" lIns="0" rIns="0" tIns="0" bIns="0" anchor="t">
-            <a:spAutoFit/>
-          </a:bodyPr>
-          <a:lstStyle/>
-          <a:p>
-            <a:pPr algn="l">
-              <a:lnSpc>
-                <a:spcPct val="100000"/>
-              </a:lnSpc>
-            </a:pPr>
-            <a:r>
-              <a:rPr sz="1400" b="1">
+              <a:rPr sz="1600" b="1">
                 <a:solidFill>
                   <a:srgbClr val="7CC8FF"/>
                 </a:solidFill>
                 <a:latin typeface="Arial"/>
               </a:rPr>
-              <a:t>Se os 200 saíssem com o mesmo motivo, a lista viraria enfeite. A ordem das regras é que garante isso.</a:t>
+              <a:t>Os 200 de maior score da base inteira — e a fatia de cada vendedor varia de 2 a 10.</a:t>
             </a:r>
           </a:p>
         </p:txBody>
@@ -30858,7 +30504,7 @@
                 </a:solidFill>
                 <a:latin typeface="Arial"/>
               </a:rPr>
-              <a:t>A RESPOSTA COMPLETA</a:t>
+              <a:t>A LISTA NÃO REPETE A MESMA DESCULPA</a:t>
             </a:r>
           </a:p>
         </p:txBody>
@@ -30897,7 +30543,7 @@
                 </a:solidFill>
                 <a:latin typeface="Arial"/>
               </a:rPr>
-              <a:t>Quais 200?</a:t>
+              <a:t>Seis motivos, 200 contatos</a:t>
             </a:r>
           </a:p>
         </p:txBody>
@@ -30949,8 +30595,8 @@
         </p:nvSpPr>
         <p:spPr>
           <a:xfrm>
-            <a:off x="4745736" y="1508760"/>
-            <a:ext cx="3108960" cy="274320"/>
+            <a:off x="886968" y="1508760"/>
+            <a:ext cx="3017520" cy="274320"/>
           </a:xfrm>
           <a:prstGeom prst="rect">
             <a:avLst/>
@@ -30969,13 +30615,13 @@
               </a:lnSpc>
             </a:pPr>
             <a:r>
-              <a:rPr sz="1100" b="1" spc="140">
+              <a:rPr sz="1100" b="1" spc="120">
                 <a:solidFill>
                   <a:srgbClr val="3B9DF5"/>
                 </a:solidFill>
                 <a:latin typeface="Arial"/>
               </a:rPr>
-              <a:t>ANTES</a:t>
+              <a:t>MOTIVO</a:t>
             </a:r>
           </a:p>
         </p:txBody>
@@ -30988,8 +30634,8 @@
         </p:nvSpPr>
         <p:spPr>
           <a:xfrm>
-            <a:off x="8129016" y="1508760"/>
-            <a:ext cx="3108960" cy="274320"/>
+            <a:off x="4178807" y="1508760"/>
+            <a:ext cx="1280160" cy="274320"/>
           </a:xfrm>
           <a:prstGeom prst="rect">
             <a:avLst/>
@@ -31008,27 +30654,66 @@
               </a:lnSpc>
             </a:pPr>
             <a:r>
-              <a:rPr sz="1100" b="1" spc="140">
+              <a:rPr sz="1100" b="1" spc="120">
                 <a:solidFill>
                   <a:srgbClr val="3B9DF5"/>
                 </a:solidFill>
                 <a:latin typeface="Arial"/>
               </a:rPr>
-              <a:t>DEPOIS</a:t>
-            </a:r>
-          </a:p>
-        </p:txBody>
-      </p:sp>
-      <p:sp>
-        <p:nvSpPr>
-          <p:cNvPr id="7" name="Rounded Rectangle 6"/>
+              <a:t>CONTATOS</a:t>
+            </a:r>
+          </a:p>
+        </p:txBody>
+      </p:sp>
+      <p:sp>
+        <p:nvSpPr>
+          <p:cNvPr id="7" name="TextBox 6"/>
+          <p:cNvSpPr txBox="1"/>
+          <p:nvPr/>
+        </p:nvSpPr>
+        <p:spPr>
+          <a:xfrm>
+            <a:off x="5733288" y="1508760"/>
+            <a:ext cx="5696712" cy="274320"/>
+          </a:xfrm>
+          <a:prstGeom prst="rect">
+            <a:avLst/>
+          </a:prstGeom>
+          <a:noFill/>
+        </p:spPr>
+        <p:txBody>
+          <a:bodyPr wrap="square" lIns="0" rIns="0" tIns="0" bIns="0" anchor="t">
+            <a:spAutoFit/>
+          </a:bodyPr>
+          <a:lstStyle/>
+          <a:p>
+            <a:pPr algn="l">
+              <a:lnSpc>
+                <a:spcPct val="100000"/>
+              </a:lnSpc>
+            </a:pPr>
+            <a:r>
+              <a:rPr sz="1100" b="1" spc="120">
+                <a:solidFill>
+                  <a:srgbClr val="3B9DF5"/>
+                </a:solidFill>
+                <a:latin typeface="Arial"/>
+              </a:rPr>
+              <a:t>O QUE O VENDEDOR FAZ</a:t>
+            </a:r>
+          </a:p>
+        </p:txBody>
+      </p:sp>
+      <p:sp>
+        <p:nvSpPr>
+          <p:cNvPr id="8" name="Rounded Rectangle 7"/>
           <p:cNvSpPr/>
           <p:nvPr/>
         </p:nvSpPr>
         <p:spPr>
           <a:xfrm>
             <a:off x="685800" y="1874520"/>
-            <a:ext cx="10820095" cy="548640"/>
+            <a:ext cx="10820095" cy="457200"/>
           </a:xfrm>
           <a:prstGeom prst="roundRect">
             <a:avLst>
@@ -31069,14 +30754,14 @@
       </p:sp>
       <p:sp>
         <p:nvSpPr>
-          <p:cNvPr id="8" name="TextBox 7"/>
-          <p:cNvSpPr txBox="1"/>
-          <p:nvPr/>
-        </p:nvSpPr>
-        <p:spPr>
-          <a:xfrm>
-            <a:off x="996696" y="2020824"/>
-            <a:ext cx="3657600" cy="548640"/>
+          <p:cNvPr id="9" name="TextBox 8"/>
+          <p:cNvSpPr txBox="1"/>
+          <p:nvPr/>
+        </p:nvSpPr>
+        <p:spPr>
+          <a:xfrm>
+            <a:off x="886968" y="1999932"/>
+            <a:ext cx="3017520" cy="457200"/>
           </a:xfrm>
           <a:prstGeom prst="rect">
             <a:avLst/>
@@ -31095,105 +30780,105 @@
               </a:lnSpc>
             </a:pPr>
             <a:r>
-              <a:rPr sz="1350" b="1">
+              <a:rPr sz="1250" b="1">
                 <a:solidFill>
                   <a:srgbClr val="FFFFFF"/>
                 </a:solidFill>
                 <a:latin typeface="Arial"/>
               </a:rPr>
-              <a:t>Critério</a:t>
-            </a:r>
-          </a:p>
-        </p:txBody>
-      </p:sp>
-      <p:sp>
-        <p:nvSpPr>
-          <p:cNvPr id="9" name="TextBox 8"/>
-          <p:cNvSpPr txBox="1"/>
-          <p:nvPr/>
-        </p:nvSpPr>
-        <p:spPr>
-          <a:xfrm>
-            <a:off x="4745736" y="2020824"/>
-            <a:ext cx="3200400" cy="548640"/>
-          </a:xfrm>
-          <a:prstGeom prst="rect">
-            <a:avLst/>
-          </a:prstGeom>
-          <a:noFill/>
-        </p:spPr>
-        <p:txBody>
-          <a:bodyPr wrap="square" lIns="0" rIns="0" tIns="0" bIns="0" anchor="t">
-            <a:spAutoFit/>
-          </a:bodyPr>
-          <a:lstStyle/>
-          <a:p>
-            <a:pPr algn="l">
-              <a:lnSpc>
-                <a:spcPct val="125000"/>
-              </a:lnSpc>
-            </a:pPr>
-            <a:r>
-              <a:rPr sz="1350" b="0">
+              <a:t>Comprou lançamento</a:t>
+            </a:r>
+          </a:p>
+        </p:txBody>
+      </p:sp>
+      <p:sp>
+        <p:nvSpPr>
+          <p:cNvPr id="10" name="TextBox 9"/>
+          <p:cNvSpPr txBox="1"/>
+          <p:nvPr/>
+        </p:nvSpPr>
+        <p:spPr>
+          <a:xfrm>
+            <a:off x="4178807" y="1999932"/>
+            <a:ext cx="1280160" cy="457200"/>
+          </a:xfrm>
+          <a:prstGeom prst="rect">
+            <a:avLst/>
+          </a:prstGeom>
+          <a:noFill/>
+        </p:spPr>
+        <p:txBody>
+          <a:bodyPr wrap="square" lIns="0" rIns="0" tIns="0" bIns="0" anchor="t">
+            <a:spAutoFit/>
+          </a:bodyPr>
+          <a:lstStyle/>
+          <a:p>
+            <a:pPr algn="l">
+              <a:lnSpc>
+                <a:spcPct val="100000"/>
+              </a:lnSpc>
+            </a:pPr>
+            <a:r>
+              <a:rPr sz="1250" b="0">
                 <a:solidFill>
                   <a:srgbClr val="9BAAC0"/>
                 </a:solidFill>
-                <a:latin typeface="Arial"/>
-              </a:rPr>
-              <a:t>Intuição do vendedor</a:t>
-            </a:r>
-          </a:p>
-        </p:txBody>
-      </p:sp>
-      <p:sp>
-        <p:nvSpPr>
-          <p:cNvPr id="10" name="TextBox 9"/>
-          <p:cNvSpPr txBox="1"/>
-          <p:nvPr/>
-        </p:nvSpPr>
-        <p:spPr>
-          <a:xfrm>
-            <a:off x="8129016" y="2020824"/>
-            <a:ext cx="3200400" cy="548640"/>
-          </a:xfrm>
-          <a:prstGeom prst="rect">
-            <a:avLst/>
-          </a:prstGeom>
-          <a:noFill/>
-        </p:spPr>
-        <p:txBody>
-          <a:bodyPr wrap="square" lIns="0" rIns="0" tIns="0" bIns="0" anchor="t">
-            <a:spAutoFit/>
-          </a:bodyPr>
-          <a:lstStyle/>
-          <a:p>
-            <a:pPr algn="l">
-              <a:lnSpc>
-                <a:spcPct val="125000"/>
-              </a:lnSpc>
-            </a:pPr>
-            <a:r>
-              <a:rPr sz="1350" b="0">
+                <a:latin typeface="Consolas"/>
+              </a:rPr>
+              <a:t>67</a:t>
+            </a:r>
+          </a:p>
+        </p:txBody>
+      </p:sp>
+      <p:sp>
+        <p:nvSpPr>
+          <p:cNvPr id="11" name="TextBox 10"/>
+          <p:cNvSpPr txBox="1"/>
+          <p:nvPr/>
+        </p:nvSpPr>
+        <p:spPr>
+          <a:xfrm>
+            <a:off x="5733288" y="1999932"/>
+            <a:ext cx="5696712" cy="457200"/>
+          </a:xfrm>
+          <a:prstGeom prst="rect">
+            <a:avLst/>
+          </a:prstGeom>
+          <a:noFill/>
+        </p:spPr>
+        <p:txBody>
+          <a:bodyPr wrap="square" lIns="0" rIns="0" tIns="0" bIns="0" anchor="t">
+            <a:spAutoFit/>
+          </a:bodyPr>
+          <a:lstStyle/>
+          <a:p>
+            <a:pPr algn="l">
+              <a:lnSpc>
+                <a:spcPct val="100000"/>
+              </a:lnSpc>
+            </a:pPr>
+            <a:r>
+              <a:rPr sz="1250" b="0">
                 <a:solidFill>
                   <a:srgbClr val="9BAAC0"/>
                 </a:solidFill>
-                <a:latin typeface="Arial"/>
-              </a:rPr>
-              <a:t>Score de propensão</a:t>
-            </a:r>
-          </a:p>
-        </p:txBody>
-      </p:sp>
-      <p:sp>
-        <p:nvSpPr>
-          <p:cNvPr id="11" name="Rounded Rectangle 10"/>
+                <a:latin typeface="Consolas"/>
+              </a:rPr>
+              <a:t>Oferece o resto da linha nova</a:t>
+            </a:r>
+          </a:p>
+        </p:txBody>
+      </p:sp>
+      <p:sp>
+        <p:nvSpPr>
+          <p:cNvPr id="12" name="Rounded Rectangle 11"/>
           <p:cNvSpPr/>
           <p:nvPr/>
         </p:nvSpPr>
         <p:spPr>
           <a:xfrm>
-            <a:off x="685800" y="2532888"/>
-            <a:ext cx="10820095" cy="548640"/>
+            <a:off x="685800" y="2423160"/>
+            <a:ext cx="10820095" cy="457200"/>
           </a:xfrm>
           <a:prstGeom prst="roundRect">
             <a:avLst>
@@ -31234,14 +30919,14 @@
       </p:sp>
       <p:sp>
         <p:nvSpPr>
-          <p:cNvPr id="12" name="TextBox 11"/>
-          <p:cNvSpPr txBox="1"/>
-          <p:nvPr/>
-        </p:nvSpPr>
-        <p:spPr>
-          <a:xfrm>
-            <a:off x="996696" y="2679192"/>
-            <a:ext cx="3657600" cy="548640"/>
+          <p:cNvPr id="13" name="TextBox 12"/>
+          <p:cNvSpPr txBox="1"/>
+          <p:nvPr/>
+        </p:nvSpPr>
+        <p:spPr>
+          <a:xfrm>
+            <a:off x="886968" y="2548572"/>
+            <a:ext cx="3017520" cy="457200"/>
           </a:xfrm>
           <a:prstGeom prst="rect">
             <a:avLst/>
@@ -31260,105 +30945,105 @@
               </a:lnSpc>
             </a:pPr>
             <a:r>
-              <a:rPr sz="1350" b="1">
+              <a:rPr sz="1250" b="1">
                 <a:solidFill>
                   <a:srgbClr val="FFFFFF"/>
                 </a:solidFill>
                 <a:latin typeface="Arial"/>
               </a:rPr>
-              <a:t>Cobertura</a:t>
-            </a:r>
-          </a:p>
-        </p:txBody>
-      </p:sp>
-      <p:sp>
-        <p:nvSpPr>
-          <p:cNvPr id="13" name="TextBox 12"/>
-          <p:cNvSpPr txBox="1"/>
-          <p:nvPr/>
-        </p:nvSpPr>
-        <p:spPr>
-          <a:xfrm>
-            <a:off x="4745736" y="2679192"/>
-            <a:ext cx="3200400" cy="548640"/>
-          </a:xfrm>
-          <a:prstGeom prst="rect">
-            <a:avLst/>
-          </a:prstGeom>
-          <a:noFill/>
-        </p:spPr>
-        <p:txBody>
-          <a:bodyPr wrap="square" lIns="0" rIns="0" tIns="0" bIns="0" anchor="t">
-            <a:spAutoFit/>
-          </a:bodyPr>
-          <a:lstStyle/>
-          <a:p>
-            <a:pPr algn="l">
-              <a:lnSpc>
-                <a:spcPct val="125000"/>
-              </a:lnSpc>
-            </a:pPr>
-            <a:r>
-              <a:rPr sz="1350" b="0">
+              <a:t>Ciclo curto</a:t>
+            </a:r>
+          </a:p>
+        </p:txBody>
+      </p:sp>
+      <p:sp>
+        <p:nvSpPr>
+          <p:cNvPr id="14" name="TextBox 13"/>
+          <p:cNvSpPr txBox="1"/>
+          <p:nvPr/>
+        </p:nvSpPr>
+        <p:spPr>
+          <a:xfrm>
+            <a:off x="4178807" y="2548572"/>
+            <a:ext cx="1280160" cy="457200"/>
+          </a:xfrm>
+          <a:prstGeom prst="rect">
+            <a:avLst/>
+          </a:prstGeom>
+          <a:noFill/>
+        </p:spPr>
+        <p:txBody>
+          <a:bodyPr wrap="square" lIns="0" rIns="0" tIns="0" bIns="0" anchor="t">
+            <a:spAutoFit/>
+          </a:bodyPr>
+          <a:lstStyle/>
+          <a:p>
+            <a:pPr algn="l">
+              <a:lnSpc>
+                <a:spcPct val="100000"/>
+              </a:lnSpc>
+            </a:pPr>
+            <a:r>
+              <a:rPr sz="1250" b="0">
                 <a:solidFill>
                   <a:srgbClr val="9BAAC0"/>
                 </a:solidFill>
-                <a:latin typeface="Arial"/>
-              </a:rPr>
-              <a:t>Os 20 que ele lembra</a:t>
-            </a:r>
-          </a:p>
-        </p:txBody>
-      </p:sp>
-      <p:sp>
-        <p:nvSpPr>
-          <p:cNvPr id="14" name="TextBox 13"/>
-          <p:cNvSpPr txBox="1"/>
-          <p:nvPr/>
-        </p:nvSpPr>
-        <p:spPr>
-          <a:xfrm>
-            <a:off x="8129016" y="2679192"/>
-            <a:ext cx="3200400" cy="548640"/>
-          </a:xfrm>
-          <a:prstGeom prst="rect">
-            <a:avLst/>
-          </a:prstGeom>
-          <a:noFill/>
-        </p:spPr>
-        <p:txBody>
-          <a:bodyPr wrap="square" lIns="0" rIns="0" tIns="0" bIns="0" anchor="t">
-            <a:spAutoFit/>
-          </a:bodyPr>
-          <a:lstStyle/>
-          <a:p>
-            <a:pPr algn="l">
-              <a:lnSpc>
-                <a:spcPct val="125000"/>
-              </a:lnSpc>
-            </a:pPr>
-            <a:r>
-              <a:rPr sz="1350" b="0">
+                <a:latin typeface="Consolas"/>
+              </a:rPr>
+              <a:t>60</a:t>
+            </a:r>
+          </a:p>
+        </p:txBody>
+      </p:sp>
+      <p:sp>
+        <p:nvSpPr>
+          <p:cNvPr id="15" name="TextBox 14"/>
+          <p:cNvSpPr txBox="1"/>
+          <p:nvPr/>
+        </p:nvSpPr>
+        <p:spPr>
+          <a:xfrm>
+            <a:off x="5733288" y="2548572"/>
+            <a:ext cx="5696712" cy="457200"/>
+          </a:xfrm>
+          <a:prstGeom prst="rect">
+            <a:avLst/>
+          </a:prstGeom>
+          <a:noFill/>
+        </p:spPr>
+        <p:txBody>
+          <a:bodyPr wrap="square" lIns="0" rIns="0" tIns="0" bIns="0" anchor="t">
+            <a:spAutoFit/>
+          </a:bodyPr>
+          <a:lstStyle/>
+          <a:p>
+            <a:pPr algn="l">
+              <a:lnSpc>
+                <a:spcPct val="100000"/>
+              </a:lnSpc>
+            </a:pPr>
+            <a:r>
+              <a:rPr sz="1250" b="0">
                 <a:solidFill>
                   <a:srgbClr val="9BAAC0"/>
                 </a:solidFill>
-                <a:latin typeface="Arial"/>
-              </a:rPr>
-              <a:t>Os 3.000 avaliados</a:t>
-            </a:r>
-          </a:p>
-        </p:txBody>
-      </p:sp>
-      <p:sp>
-        <p:nvSpPr>
-          <p:cNvPr id="15" name="Rounded Rectangle 14"/>
+                <a:latin typeface="Consolas"/>
+              </a:rPr>
+              <a:t>Mantém a cadência, não deixa esfriar</a:t>
+            </a:r>
+          </a:p>
+        </p:txBody>
+      </p:sp>
+      <p:sp>
+        <p:nvSpPr>
+          <p:cNvPr id="16" name="Rounded Rectangle 15"/>
           <p:cNvSpPr/>
           <p:nvPr/>
         </p:nvSpPr>
         <p:spPr>
           <a:xfrm>
-            <a:off x="685800" y="3191256"/>
-            <a:ext cx="10820095" cy="548640"/>
+            <a:off x="685800" y="2971800"/>
+            <a:ext cx="10820095" cy="457200"/>
           </a:xfrm>
           <a:prstGeom prst="roundRect">
             <a:avLst>
@@ -31399,14 +31084,14 @@
       </p:sp>
       <p:sp>
         <p:nvSpPr>
-          <p:cNvPr id="16" name="TextBox 15"/>
-          <p:cNvSpPr txBox="1"/>
-          <p:nvPr/>
-        </p:nvSpPr>
-        <p:spPr>
-          <a:xfrm>
-            <a:off x="996696" y="3337560"/>
-            <a:ext cx="3657600" cy="548640"/>
+          <p:cNvPr id="17" name="TextBox 16"/>
+          <p:cNvSpPr txBox="1"/>
+          <p:nvPr/>
+        </p:nvSpPr>
+        <p:spPr>
+          <a:xfrm>
+            <a:off x="886968" y="3097212"/>
+            <a:ext cx="3017520" cy="457200"/>
           </a:xfrm>
           <a:prstGeom prst="rect">
             <a:avLst/>
@@ -31425,105 +31110,105 @@
               </a:lnSpc>
             </a:pPr>
             <a:r>
-              <a:rPr sz="1350" b="1">
+              <a:rPr sz="1250" b="1">
                 <a:solidFill>
                   <a:srgbClr val="FFFFFF"/>
                 </a:solidFill>
                 <a:latin typeface="Arial"/>
               </a:rPr>
-              <a:t>Ordem</a:t>
-            </a:r>
-          </a:p>
-        </p:txBody>
-      </p:sp>
-      <p:sp>
-        <p:nvSpPr>
-          <p:cNvPr id="17" name="TextBox 16"/>
-          <p:cNvSpPr txBox="1"/>
-          <p:nvPr/>
-        </p:nvSpPr>
-        <p:spPr>
-          <a:xfrm>
-            <a:off x="4745736" y="3337560"/>
-            <a:ext cx="3200400" cy="548640"/>
-          </a:xfrm>
-          <a:prstGeom prst="rect">
-            <a:avLst/>
-          </a:prstGeom>
-          <a:noFill/>
-        </p:spPr>
-        <p:txBody>
-          <a:bodyPr wrap="square" lIns="0" rIns="0" tIns="0" bIns="0" anchor="t">
-            <a:spAutoFit/>
-          </a:bodyPr>
-          <a:lstStyle/>
-          <a:p>
-            <a:pPr algn="l">
-              <a:lnSpc>
-                <a:spcPct val="125000"/>
-              </a:lnSpc>
-            </a:pPr>
-            <a:r>
-              <a:rPr sz="1350" b="0">
+              <a:t>Visita converte</a:t>
+            </a:r>
+          </a:p>
+        </p:txBody>
+      </p:sp>
+      <p:sp>
+        <p:nvSpPr>
+          <p:cNvPr id="18" name="TextBox 17"/>
+          <p:cNvSpPr txBox="1"/>
+          <p:nvPr/>
+        </p:nvSpPr>
+        <p:spPr>
+          <a:xfrm>
+            <a:off x="4178807" y="3097212"/>
+            <a:ext cx="1280160" cy="457200"/>
+          </a:xfrm>
+          <a:prstGeom prst="rect">
+            <a:avLst/>
+          </a:prstGeom>
+          <a:noFill/>
+        </p:spPr>
+        <p:txBody>
+          <a:bodyPr wrap="square" lIns="0" rIns="0" tIns="0" bIns="0" anchor="t">
+            <a:spAutoFit/>
+          </a:bodyPr>
+          <a:lstStyle/>
+          <a:p>
+            <a:pPr algn="l">
+              <a:lnSpc>
+                <a:spcPct val="100000"/>
+              </a:lnSpc>
+            </a:pPr>
+            <a:r>
+              <a:rPr sz="1250" b="0">
                 <a:solidFill>
                   <a:srgbClr val="9BAAC0"/>
                 </a:solidFill>
-                <a:latin typeface="Arial"/>
-              </a:rPr>
-              <a:t>Aleatória</a:t>
-            </a:r>
-          </a:p>
-        </p:txBody>
-      </p:sp>
-      <p:sp>
-        <p:nvSpPr>
-          <p:cNvPr id="18" name="TextBox 17"/>
-          <p:cNvSpPr txBox="1"/>
-          <p:nvPr/>
-        </p:nvSpPr>
-        <p:spPr>
-          <a:xfrm>
-            <a:off x="8129016" y="3337560"/>
-            <a:ext cx="3200400" cy="548640"/>
-          </a:xfrm>
-          <a:prstGeom prst="rect">
-            <a:avLst/>
-          </a:prstGeom>
-          <a:noFill/>
-        </p:spPr>
-        <p:txBody>
-          <a:bodyPr wrap="square" lIns="0" rIns="0" tIns="0" bIns="0" anchor="t">
-            <a:spAutoFit/>
-          </a:bodyPr>
-          <a:lstStyle/>
-          <a:p>
-            <a:pPr algn="l">
-              <a:lnSpc>
-                <a:spcPct val="125000"/>
-              </a:lnSpc>
-            </a:pPr>
-            <a:r>
-              <a:rPr sz="1350" b="0">
+                <a:latin typeface="Consolas"/>
+              </a:rPr>
+              <a:t>38</a:t>
+            </a:r>
+          </a:p>
+        </p:txBody>
+      </p:sp>
+      <p:sp>
+        <p:nvSpPr>
+          <p:cNvPr id="19" name="TextBox 18"/>
+          <p:cNvSpPr txBox="1"/>
+          <p:nvPr/>
+        </p:nvSpPr>
+        <p:spPr>
+          <a:xfrm>
+            <a:off x="5733288" y="3097212"/>
+            <a:ext cx="5696712" cy="457200"/>
+          </a:xfrm>
+          <a:prstGeom prst="rect">
+            <a:avLst/>
+          </a:prstGeom>
+          <a:noFill/>
+        </p:spPr>
+        <p:txBody>
+          <a:bodyPr wrap="square" lIns="0" rIns="0" tIns="0" bIns="0" anchor="t">
+            <a:spAutoFit/>
+          </a:bodyPr>
+          <a:lstStyle/>
+          <a:p>
+            <a:pPr algn="l">
+              <a:lnSpc>
+                <a:spcPct val="100000"/>
+              </a:lnSpc>
+            </a:pPr>
+            <a:r>
+              <a:rPr sz="1250" b="0">
                 <a:solidFill>
                   <a:srgbClr val="9BAAC0"/>
                 </a:solidFill>
-                <a:latin typeface="Arial"/>
-              </a:rPr>
-              <a:t>Por probabilidade</a:t>
-            </a:r>
-          </a:p>
-        </p:txBody>
-      </p:sp>
-      <p:sp>
-        <p:nvSpPr>
-          <p:cNvPr id="19" name="Rounded Rectangle 18"/>
+                <a:latin typeface="Consolas"/>
+              </a:rPr>
+              <a:t>Marca visita em vez de ligar</a:t>
+            </a:r>
+          </a:p>
+        </p:txBody>
+      </p:sp>
+      <p:sp>
+        <p:nvSpPr>
+          <p:cNvPr id="20" name="Rounded Rectangle 19"/>
           <p:cNvSpPr/>
           <p:nvPr/>
         </p:nvSpPr>
         <p:spPr>
           <a:xfrm>
-            <a:off x="685800" y="3849624"/>
-            <a:ext cx="10820095" cy="768096"/>
+            <a:off x="685800" y="3520440"/>
+            <a:ext cx="10820095" cy="457200"/>
           </a:xfrm>
           <a:prstGeom prst="roundRect">
             <a:avLst>
@@ -31564,14 +31249,14 @@
       </p:sp>
       <p:sp>
         <p:nvSpPr>
-          <p:cNvPr id="20" name="TextBox 19"/>
-          <p:cNvSpPr txBox="1"/>
-          <p:nvPr/>
-        </p:nvSpPr>
-        <p:spPr>
-          <a:xfrm>
-            <a:off x="996696" y="3995928"/>
-            <a:ext cx="3657600" cy="768096"/>
+          <p:cNvPr id="21" name="TextBox 20"/>
+          <p:cNvSpPr txBox="1"/>
+          <p:nvPr/>
+        </p:nvSpPr>
+        <p:spPr>
+          <a:xfrm>
+            <a:off x="886968" y="3645852"/>
+            <a:ext cx="3017520" cy="457200"/>
           </a:xfrm>
           <a:prstGeom prst="rect">
             <a:avLst/>
@@ -31590,137 +31275,270 @@
               </a:lnSpc>
             </a:pPr>
             <a:r>
-              <a:rPr sz="1350" b="1">
+              <a:rPr sz="1250" b="1">
                 <a:solidFill>
                   <a:srgbClr val="FFFFFF"/>
                 </a:solidFill>
                 <a:latin typeface="Arial"/>
               </a:rPr>
-              <a:t>Contexto</a:t>
-            </a:r>
-          </a:p>
-        </p:txBody>
-      </p:sp>
-      <p:sp>
-        <p:nvSpPr>
-          <p:cNvPr id="21" name="TextBox 20"/>
-          <p:cNvSpPr txBox="1"/>
-          <p:nvPr/>
-        </p:nvSpPr>
-        <p:spPr>
-          <a:xfrm>
-            <a:off x="4745736" y="3995928"/>
-            <a:ext cx="3200400" cy="768096"/>
-          </a:xfrm>
-          <a:prstGeom prst="rect">
-            <a:avLst/>
-          </a:prstGeom>
-          <a:noFill/>
-        </p:spPr>
-        <p:txBody>
-          <a:bodyPr wrap="square" lIns="0" rIns="0" tIns="0" bIns="0" anchor="t">
-            <a:spAutoFit/>
-          </a:bodyPr>
-          <a:lstStyle/>
-          <a:p>
-            <a:pPr algn="l">
-              <a:lnSpc>
-                <a:spcPct val="125000"/>
-              </a:lnSpc>
-            </a:pPr>
-            <a:r>
-              <a:rPr sz="1350" b="0">
+              <a:t>Cliente grande</a:t>
+            </a:r>
+          </a:p>
+        </p:txBody>
+      </p:sp>
+      <p:sp>
+        <p:nvSpPr>
+          <p:cNvPr id="22" name="TextBox 21"/>
+          <p:cNvSpPr txBox="1"/>
+          <p:nvPr/>
+        </p:nvSpPr>
+        <p:spPr>
+          <a:xfrm>
+            <a:off x="4178807" y="3645852"/>
+            <a:ext cx="1280160" cy="457200"/>
+          </a:xfrm>
+          <a:prstGeom prst="rect">
+            <a:avLst/>
+          </a:prstGeom>
+          <a:noFill/>
+        </p:spPr>
+        <p:txBody>
+          <a:bodyPr wrap="square" lIns="0" rIns="0" tIns="0" bIns="0" anchor="t">
+            <a:spAutoFit/>
+          </a:bodyPr>
+          <a:lstStyle/>
+          <a:p>
+            <a:pPr algn="l">
+              <a:lnSpc>
+                <a:spcPct val="100000"/>
+              </a:lnSpc>
+            </a:pPr>
+            <a:r>
+              <a:rPr sz="1250" b="0">
                 <a:solidFill>
                   <a:srgbClr val="9BAAC0"/>
                 </a:solidFill>
-                <a:latin typeface="Arial"/>
-              </a:rPr>
-              <a:t>“Faz tempo que não falo</a:t>
-            </a:r>
-          </a:p>
-          <a:p>
-            <a:pPr algn="l">
-              <a:lnSpc>
-                <a:spcPct val="125000"/>
-              </a:lnSpc>
-            </a:pPr>
-            <a:r>
-              <a:rPr sz="1350" b="0">
+                <a:latin typeface="Consolas"/>
+              </a:rPr>
+              <a:t>19</a:t>
+            </a:r>
+          </a:p>
+        </p:txBody>
+      </p:sp>
+      <p:sp>
+        <p:nvSpPr>
+          <p:cNvPr id="23" name="TextBox 22"/>
+          <p:cNvSpPr txBox="1"/>
+          <p:nvPr/>
+        </p:nvSpPr>
+        <p:spPr>
+          <a:xfrm>
+            <a:off x="5733288" y="3645852"/>
+            <a:ext cx="5696712" cy="457200"/>
+          </a:xfrm>
+          <a:prstGeom prst="rect">
+            <a:avLst/>
+          </a:prstGeom>
+          <a:noFill/>
+        </p:spPr>
+        <p:txBody>
+          <a:bodyPr wrap="square" lIns="0" rIns="0" tIns="0" bIns="0" anchor="t">
+            <a:spAutoFit/>
+          </a:bodyPr>
+          <a:lstStyle/>
+          <a:p>
+            <a:pPr algn="l">
+              <a:lnSpc>
+                <a:spcPct val="100000"/>
+              </a:lnSpc>
+            </a:pPr>
+            <a:r>
+              <a:rPr sz="1250" b="0">
                 <a:solidFill>
                   <a:srgbClr val="9BAAC0"/>
                 </a:solidFill>
-                <a:latin typeface="Arial"/>
-              </a:rPr>
-              <a:t>com ele”</a:t>
-            </a:r>
-          </a:p>
-        </p:txBody>
-      </p:sp>
-      <p:sp>
-        <p:nvSpPr>
-          <p:cNvPr id="22" name="TextBox 21"/>
-          <p:cNvSpPr txBox="1"/>
-          <p:nvPr/>
-        </p:nvSpPr>
-        <p:spPr>
-          <a:xfrm>
-            <a:off x="8129016" y="3995928"/>
-            <a:ext cx="3200400" cy="768096"/>
-          </a:xfrm>
-          <a:prstGeom prst="rect">
-            <a:avLst/>
-          </a:prstGeom>
-          <a:noFill/>
-        </p:spPr>
-        <p:txBody>
-          <a:bodyPr wrap="square" lIns="0" rIns="0" tIns="0" bIns="0" anchor="t">
-            <a:spAutoFit/>
-          </a:bodyPr>
-          <a:lstStyle/>
-          <a:p>
-            <a:pPr algn="l">
-              <a:lnSpc>
-                <a:spcPct val="125000"/>
-              </a:lnSpc>
-            </a:pPr>
-            <a:r>
-              <a:rPr sz="1350" b="0">
+                <a:latin typeface="Consolas"/>
+              </a:rPr>
+              <a:t>Relacionamento, não empurra produto</a:t>
+            </a:r>
+          </a:p>
+        </p:txBody>
+      </p:sp>
+      <p:sp>
+        <p:nvSpPr>
+          <p:cNvPr id="24" name="Rounded Rectangle 23"/>
+          <p:cNvSpPr/>
+          <p:nvPr/>
+        </p:nvSpPr>
+        <p:spPr>
+          <a:xfrm>
+            <a:off x="685800" y="4069080"/>
+            <a:ext cx="10820095" cy="457200"/>
+          </a:xfrm>
+          <a:prstGeom prst="roundRect">
+            <a:avLst>
+              <a:gd name="adj" fmla="val 8000"/>
+            </a:avLst>
+          </a:prstGeom>
+          <a:solidFill>
+            <a:srgbClr val="0D1522"/>
+          </a:solidFill>
+          <a:ln w="15875">
+            <a:solidFill>
+              <a:srgbClr val="1F3A5A"/>
+            </a:solidFill>
+          </a:ln>
+          <a:effectLst/>
+        </p:spPr>
+        <p:style>
+          <a:lnRef idx="1">
+            <a:schemeClr val="accent1"/>
+          </a:lnRef>
+          <a:fillRef idx="3">
+            <a:schemeClr val="accent1"/>
+          </a:fillRef>
+          <a:effectRef idx="2">
+            <a:schemeClr val="accent1"/>
+          </a:effectRef>
+          <a:fontRef idx="minor">
+            <a:schemeClr val="lt1"/>
+          </a:fontRef>
+        </p:style>
+        <p:txBody>
+          <a:bodyPr rtlCol="0" anchor="ctr"/>
+          <a:lstStyle/>
+          <a:p>
+            <a:pPr algn="ctr"/>
+          </a:p>
+        </p:txBody>
+      </p:sp>
+      <p:sp>
+        <p:nvSpPr>
+          <p:cNvPr id="25" name="TextBox 24"/>
+          <p:cNvSpPr txBox="1"/>
+          <p:nvPr/>
+        </p:nvSpPr>
+        <p:spPr>
+          <a:xfrm>
+            <a:off x="886968" y="4194492"/>
+            <a:ext cx="3017520" cy="457200"/>
+          </a:xfrm>
+          <a:prstGeom prst="rect">
+            <a:avLst/>
+          </a:prstGeom>
+          <a:noFill/>
+        </p:spPr>
+        <p:txBody>
+          <a:bodyPr wrap="square" lIns="0" rIns="0" tIns="0" bIns="0" anchor="t">
+            <a:spAutoFit/>
+          </a:bodyPr>
+          <a:lstStyle/>
+          <a:p>
+            <a:pPr algn="l">
+              <a:lnSpc>
+                <a:spcPct val="100000"/>
+              </a:lnSpc>
+            </a:pPr>
+            <a:r>
+              <a:rPr sz="1250" b="1">
+                <a:solidFill>
+                  <a:srgbClr val="FFFFFF"/>
+                </a:solidFill>
+                <a:latin typeface="Arial"/>
+              </a:rPr>
+              <a:t>Manutenção</a:t>
+            </a:r>
+          </a:p>
+        </p:txBody>
+      </p:sp>
+      <p:sp>
+        <p:nvSpPr>
+          <p:cNvPr id="26" name="TextBox 25"/>
+          <p:cNvSpPr txBox="1"/>
+          <p:nvPr/>
+        </p:nvSpPr>
+        <p:spPr>
+          <a:xfrm>
+            <a:off x="4178807" y="4194492"/>
+            <a:ext cx="1280160" cy="457200"/>
+          </a:xfrm>
+          <a:prstGeom prst="rect">
+            <a:avLst/>
+          </a:prstGeom>
+          <a:noFill/>
+        </p:spPr>
+        <p:txBody>
+          <a:bodyPr wrap="square" lIns="0" rIns="0" tIns="0" bIns="0" anchor="t">
+            <a:spAutoFit/>
+          </a:bodyPr>
+          <a:lstStyle/>
+          <a:p>
+            <a:pPr algn="l">
+              <a:lnSpc>
+                <a:spcPct val="100000"/>
+              </a:lnSpc>
+            </a:pPr>
+            <a:r>
+              <a:rPr sz="1250" b="0">
                 <a:solidFill>
                   <a:srgbClr val="9BAAC0"/>
                 </a:solidFill>
-                <a:latin typeface="Arial"/>
-              </a:rPr>
-              <a:t>Atraso relativo, histórico,</a:t>
-            </a:r>
-          </a:p>
-          <a:p>
-            <a:pPr algn="l">
-              <a:lnSpc>
-                <a:spcPct val="125000"/>
-              </a:lnSpc>
-            </a:pPr>
-            <a:r>
-              <a:rPr sz="1350" b="0">
+                <a:latin typeface="Consolas"/>
+              </a:rPr>
+              <a:t>12</a:t>
+            </a:r>
+          </a:p>
+        </p:txBody>
+      </p:sp>
+      <p:sp>
+        <p:nvSpPr>
+          <p:cNvPr id="27" name="TextBox 26"/>
+          <p:cNvSpPr txBox="1"/>
+          <p:nvPr/>
+        </p:nvSpPr>
+        <p:spPr>
+          <a:xfrm>
+            <a:off x="5733288" y="4194492"/>
+            <a:ext cx="5696712" cy="457200"/>
+          </a:xfrm>
+          <a:prstGeom prst="rect">
+            <a:avLst/>
+          </a:prstGeom>
+          <a:noFill/>
+        </p:spPr>
+        <p:txBody>
+          <a:bodyPr wrap="square" lIns="0" rIns="0" tIns="0" bIns="0" anchor="t">
+            <a:spAutoFit/>
+          </a:bodyPr>
+          <a:lstStyle/>
+          <a:p>
+            <a:pPr algn="l">
+              <a:lnSpc>
+                <a:spcPct val="100000"/>
+              </a:lnSpc>
+            </a:pPr>
+            <a:r>
+              <a:rPr sz="1250" b="0">
                 <a:solidFill>
                   <a:srgbClr val="9BAAC0"/>
                 </a:solidFill>
-                <a:latin typeface="Arial"/>
-              </a:rPr>
-              <a:t>sugestão</a:t>
-            </a:r>
-          </a:p>
-        </p:txBody>
-      </p:sp>
-      <p:sp>
-        <p:nvSpPr>
-          <p:cNvPr id="23" name="Rounded Rectangle 22"/>
+                <a:latin typeface="Consolas"/>
+              </a:rPr>
+              <a:t>Contato rápido de rotina</a:t>
+            </a:r>
+          </a:p>
+        </p:txBody>
+      </p:sp>
+      <p:sp>
+        <p:nvSpPr>
+          <p:cNvPr id="28" name="Rounded Rectangle 27"/>
           <p:cNvSpPr/>
           <p:nvPr/>
         </p:nvSpPr>
         <p:spPr>
           <a:xfrm>
-            <a:off x="685800" y="4727448"/>
-            <a:ext cx="10820095" cy="548640"/>
+            <a:off x="685800" y="4617720"/>
+            <a:ext cx="10820095" cy="457200"/>
           </a:xfrm>
           <a:prstGeom prst="roundRect">
             <a:avLst>
@@ -31732,7 +31550,7 @@
           </a:solidFill>
           <a:ln w="19050">
             <a:solidFill>
-              <a:srgbClr val="3B9DF5"/>
+              <a:srgbClr val="FF6B5A"/>
             </a:solidFill>
           </a:ln>
           <a:effectLst/>
@@ -31761,14 +31579,14 @@
       </p:sp>
       <p:sp>
         <p:nvSpPr>
-          <p:cNvPr id="24" name="TextBox 23"/>
-          <p:cNvSpPr txBox="1"/>
-          <p:nvPr/>
-        </p:nvSpPr>
-        <p:spPr>
-          <a:xfrm>
-            <a:off x="996696" y="4873752"/>
-            <a:ext cx="3657600" cy="548640"/>
+          <p:cNvPr id="29" name="TextBox 28"/>
+          <p:cNvSpPr txBox="1"/>
+          <p:nvPr/>
+        </p:nvSpPr>
+        <p:spPr>
+          <a:xfrm>
+            <a:off x="886968" y="4743132"/>
+            <a:ext cx="3017520" cy="457200"/>
           </a:xfrm>
           <a:prstGeom prst="rect">
             <a:avLst/>
@@ -31787,178 +31605,130 @@
               </a:lnSpc>
             </a:pPr>
             <a:r>
-              <a:rPr sz="1350" b="1">
-                <a:solidFill>
-                  <a:srgbClr val="3B9DF5"/>
-                </a:solidFill>
-                <a:latin typeface="Arial"/>
-              </a:rPr>
-              <a:t>Resultado medido</a:t>
-            </a:r>
-          </a:p>
-        </p:txBody>
-      </p:sp>
-      <p:sp>
-        <p:nvSpPr>
-          <p:cNvPr id="25" name="TextBox 24"/>
-          <p:cNvSpPr txBox="1"/>
-          <p:nvPr/>
-        </p:nvSpPr>
-        <p:spPr>
-          <a:xfrm>
-            <a:off x="4745736" y="4873752"/>
-            <a:ext cx="3200400" cy="548640"/>
-          </a:xfrm>
-          <a:prstGeom prst="rect">
-            <a:avLst/>
-          </a:prstGeom>
-          <a:noFill/>
-        </p:spPr>
-        <p:txBody>
-          <a:bodyPr wrap="square" lIns="0" rIns="0" tIns="0" bIns="0" anchor="t">
-            <a:spAutoFit/>
-          </a:bodyPr>
-          <a:lstStyle/>
-          <a:p>
-            <a:pPr algn="l">
-              <a:lnSpc>
-                <a:spcPct val="125000"/>
-              </a:lnSpc>
-            </a:pPr>
-            <a:r>
-              <a:rPr sz="1350" b="0">
-                <a:solidFill>
-                  <a:srgbClr val="9BAAC0"/>
-                </a:solidFill>
-                <a:latin typeface="Arial"/>
-              </a:rPr>
-              <a:t>20 vendas</a:t>
-            </a:r>
-          </a:p>
-        </p:txBody>
-      </p:sp>
-      <p:sp>
-        <p:nvSpPr>
-          <p:cNvPr id="26" name="TextBox 25"/>
-          <p:cNvSpPr txBox="1"/>
-          <p:nvPr/>
-        </p:nvSpPr>
-        <p:spPr>
-          <a:xfrm>
-            <a:off x="8129016" y="4873752"/>
-            <a:ext cx="3200400" cy="548640"/>
-          </a:xfrm>
-          <a:prstGeom prst="rect">
-            <a:avLst/>
-          </a:prstGeom>
-          <a:noFill/>
-        </p:spPr>
-        <p:txBody>
-          <a:bodyPr wrap="square" lIns="0" rIns="0" tIns="0" bIns="0" anchor="t">
-            <a:spAutoFit/>
-          </a:bodyPr>
-          <a:lstStyle/>
-          <a:p>
-            <a:pPr algn="l">
-              <a:lnSpc>
-                <a:spcPct val="125000"/>
-              </a:lnSpc>
-            </a:pPr>
-            <a:r>
-              <a:rPr sz="1350" b="1">
+              <a:rPr sz="1250" b="1">
                 <a:solidFill>
                   <a:srgbClr val="FFFFFF"/>
                 </a:solidFill>
                 <a:latin typeface="Arial"/>
               </a:rPr>
-              <a:t>86 vendas</a:t>
-            </a:r>
-          </a:p>
-        </p:txBody>
-      </p:sp>
-      <p:sp>
-        <p:nvSpPr>
-          <p:cNvPr id="27" name="Rounded Rectangle 26"/>
-          <p:cNvSpPr/>
-          <p:nvPr/>
-        </p:nvSpPr>
-        <p:spPr>
-          <a:xfrm>
-            <a:off x="685800" y="5742432"/>
-            <a:ext cx="10820095" cy="621792"/>
-          </a:xfrm>
-          <a:prstGeom prst="roundRect">
-            <a:avLst>
-              <a:gd name="adj" fmla="val 8000"/>
-            </a:avLst>
-          </a:prstGeom>
-          <a:solidFill>
-            <a:srgbClr val="142337"/>
-          </a:solidFill>
-          <a:ln w="19050">
-            <a:solidFill>
-              <a:srgbClr val="3B9DF5"/>
-            </a:solidFill>
-          </a:ln>
-          <a:effectLst/>
-        </p:spPr>
-        <p:style>
-          <a:lnRef idx="1">
-            <a:schemeClr val="accent1"/>
-          </a:lnRef>
-          <a:fillRef idx="3">
-            <a:schemeClr val="accent1"/>
-          </a:fillRef>
-          <a:effectRef idx="2">
-            <a:schemeClr val="accent1"/>
-          </a:effectRef>
-          <a:fontRef idx="minor">
-            <a:schemeClr val="lt1"/>
-          </a:fontRef>
-        </p:style>
-        <p:txBody>
-          <a:bodyPr rtlCol="0" anchor="ctr"/>
-          <a:lstStyle/>
-          <a:p>
-            <a:pPr algn="ctr"/>
-          </a:p>
-        </p:txBody>
-      </p:sp>
-      <p:sp>
-        <p:nvSpPr>
-          <p:cNvPr id="28" name="TextBox 27"/>
-          <p:cNvSpPr txBox="1"/>
-          <p:nvPr/>
-        </p:nvSpPr>
-        <p:spPr>
-          <a:xfrm>
-            <a:off x="1069848" y="5941568"/>
-            <a:ext cx="10051999" cy="621792"/>
-          </a:xfrm>
-          <a:prstGeom prst="rect">
-            <a:avLst/>
-          </a:prstGeom>
-          <a:noFill/>
-        </p:spPr>
-        <p:txBody>
-          <a:bodyPr wrap="square" lIns="0" rIns="0" tIns="0" bIns="0" anchor="t">
-            <a:spAutoFit/>
-          </a:bodyPr>
-          <a:lstStyle/>
-          <a:p>
-            <a:pPr algn="l">
-              <a:lnSpc>
-                <a:spcPct val="128000"/>
-              </a:lnSpc>
-            </a:pPr>
-            <a:r>
-              <a:rPr sz="1600" b="1">
-                <a:solidFill>
-                  <a:srgbClr val="FFFFFF"/>
-                </a:solidFill>
-                <a:latin typeface="Arial"/>
-              </a:rPr>
-              <a:t>Mesmo time. Mesmas 200 ligações. Mais de quatro vezes o resultado.</a:t>
+              <a:t>Atrasado</a:t>
+            </a:r>
+          </a:p>
+        </p:txBody>
+      </p:sp>
+      <p:sp>
+        <p:nvSpPr>
+          <p:cNvPr id="30" name="TextBox 29"/>
+          <p:cNvSpPr txBox="1"/>
+          <p:nvPr/>
+        </p:nvSpPr>
+        <p:spPr>
+          <a:xfrm>
+            <a:off x="4178807" y="4743132"/>
+            <a:ext cx="1280160" cy="457200"/>
+          </a:xfrm>
+          <a:prstGeom prst="rect">
+            <a:avLst/>
+          </a:prstGeom>
+          <a:noFill/>
+        </p:spPr>
+        <p:txBody>
+          <a:bodyPr wrap="square" lIns="0" rIns="0" tIns="0" bIns="0" anchor="t">
+            <a:spAutoFit/>
+          </a:bodyPr>
+          <a:lstStyle/>
+          <a:p>
+            <a:pPr algn="l">
+              <a:lnSpc>
+                <a:spcPct val="100000"/>
+              </a:lnSpc>
+            </a:pPr>
+            <a:r>
+              <a:rPr sz="1250" b="1">
+                <a:solidFill>
+                  <a:srgbClr val="FF6B5A"/>
+                </a:solidFill>
+                <a:latin typeface="Consolas"/>
+              </a:rPr>
+              <a:t>4</a:t>
+            </a:r>
+          </a:p>
+        </p:txBody>
+      </p:sp>
+      <p:sp>
+        <p:nvSpPr>
+          <p:cNvPr id="31" name="TextBox 30"/>
+          <p:cNvSpPr txBox="1"/>
+          <p:nvPr/>
+        </p:nvSpPr>
+        <p:spPr>
+          <a:xfrm>
+            <a:off x="5733288" y="4743132"/>
+            <a:ext cx="5696712" cy="457200"/>
+          </a:xfrm>
+          <a:prstGeom prst="rect">
+            <a:avLst/>
+          </a:prstGeom>
+          <a:noFill/>
+        </p:spPr>
+        <p:txBody>
+          <a:bodyPr wrap="square" lIns="0" rIns="0" tIns="0" bIns="0" anchor="t">
+            <a:spAutoFit/>
+          </a:bodyPr>
+          <a:lstStyle/>
+          <a:p>
+            <a:pPr algn="l">
+              <a:lnSpc>
+                <a:spcPct val="100000"/>
+              </a:lnSpc>
+            </a:pPr>
+            <a:r>
+              <a:rPr sz="1250" b="1">
+                <a:solidFill>
+                  <a:srgbClr val="FF6B5A"/>
+                </a:solidFill>
+                <a:latin typeface="Consolas"/>
+              </a:rPr>
+              <a:t>Liga hoje — risco de perder</a:t>
+            </a:r>
+          </a:p>
+        </p:txBody>
+      </p:sp>
+      <p:sp>
+        <p:nvSpPr>
+          <p:cNvPr id="32" name="TextBox 31"/>
+          <p:cNvSpPr txBox="1"/>
+          <p:nvPr/>
+        </p:nvSpPr>
+        <p:spPr>
+          <a:xfrm>
+            <a:off x="685800" y="5943600"/>
+            <a:ext cx="10820095" cy="365760"/>
+          </a:xfrm>
+          <a:prstGeom prst="rect">
+            <a:avLst/>
+          </a:prstGeom>
+          <a:noFill/>
+        </p:spPr>
+        <p:txBody>
+          <a:bodyPr wrap="square" lIns="0" rIns="0" tIns="0" bIns="0" anchor="t">
+            <a:spAutoFit/>
+          </a:bodyPr>
+          <a:lstStyle/>
+          <a:p>
+            <a:pPr algn="l">
+              <a:lnSpc>
+                <a:spcPct val="100000"/>
+              </a:lnSpc>
+            </a:pPr>
+            <a:r>
+              <a:rPr sz="1400" b="1">
+                <a:solidFill>
+                  <a:srgbClr val="7CC8FF"/>
+                </a:solidFill>
+                <a:latin typeface="Arial"/>
+              </a:rPr>
+              <a:t>Se os 200 saíssem com o mesmo motivo, a lista viraria enfeite. A ordem das regras é que garante isso.</a:t>
             </a:r>
           </a:p>
         </p:txBody>
@@ -32023,7 +31793,7 @@
                 </a:solidFill>
                 <a:latin typeface="Arial"/>
               </a:rPr>
-              <a:t>DE ONDE A GENTE VEIO</a:t>
+              <a:t>A RESPOSTA COMPLETA</a:t>
             </a:r>
           </a:p>
         </p:txBody>
@@ -32062,7 +31832,7 @@
                 </a:solidFill>
                 <a:latin typeface="Arial"/>
               </a:rPr>
-              <a:t>O arco de três noites</a:t>
+              <a:t>Quais 200?</a:t>
             </a:r>
           </a:p>
         </p:txBody>
@@ -32108,14 +31878,92 @@
       </p:sp>
       <p:sp>
         <p:nvSpPr>
-          <p:cNvPr id="5" name="Rounded Rectangle 4"/>
+          <p:cNvPr id="5" name="TextBox 4"/>
+          <p:cNvSpPr txBox="1"/>
+          <p:nvPr/>
+        </p:nvSpPr>
+        <p:spPr>
+          <a:xfrm>
+            <a:off x="4745736" y="1508760"/>
+            <a:ext cx="3108960" cy="274320"/>
+          </a:xfrm>
+          <a:prstGeom prst="rect">
+            <a:avLst/>
+          </a:prstGeom>
+          <a:noFill/>
+        </p:spPr>
+        <p:txBody>
+          <a:bodyPr wrap="square" lIns="0" rIns="0" tIns="0" bIns="0" anchor="t">
+            <a:spAutoFit/>
+          </a:bodyPr>
+          <a:lstStyle/>
+          <a:p>
+            <a:pPr algn="l">
+              <a:lnSpc>
+                <a:spcPct val="100000"/>
+              </a:lnSpc>
+            </a:pPr>
+            <a:r>
+              <a:rPr sz="1100" b="1" spc="140">
+                <a:solidFill>
+                  <a:srgbClr val="3B9DF5"/>
+                </a:solidFill>
+                <a:latin typeface="Arial"/>
+              </a:rPr>
+              <a:t>ANTES</a:t>
+            </a:r>
+          </a:p>
+        </p:txBody>
+      </p:sp>
+      <p:sp>
+        <p:nvSpPr>
+          <p:cNvPr id="6" name="TextBox 5"/>
+          <p:cNvSpPr txBox="1"/>
+          <p:nvPr/>
+        </p:nvSpPr>
+        <p:spPr>
+          <a:xfrm>
+            <a:off x="8129016" y="1508760"/>
+            <a:ext cx="3108960" cy="274320"/>
+          </a:xfrm>
+          <a:prstGeom prst="rect">
+            <a:avLst/>
+          </a:prstGeom>
+          <a:noFill/>
+        </p:spPr>
+        <p:txBody>
+          <a:bodyPr wrap="square" lIns="0" rIns="0" tIns="0" bIns="0" anchor="t">
+            <a:spAutoFit/>
+          </a:bodyPr>
+          <a:lstStyle/>
+          <a:p>
+            <a:pPr algn="l">
+              <a:lnSpc>
+                <a:spcPct val="100000"/>
+              </a:lnSpc>
+            </a:pPr>
+            <a:r>
+              <a:rPr sz="1100" b="1" spc="140">
+                <a:solidFill>
+                  <a:srgbClr val="3B9DF5"/>
+                </a:solidFill>
+                <a:latin typeface="Arial"/>
+              </a:rPr>
+              <a:t>DEPOIS</a:t>
+            </a:r>
+          </a:p>
+        </p:txBody>
+      </p:sp>
+      <p:sp>
+        <p:nvSpPr>
+          <p:cNvPr id="7" name="Rounded Rectangle 6"/>
           <p:cNvSpPr/>
           <p:nvPr/>
         </p:nvSpPr>
         <p:spPr>
           <a:xfrm>
-            <a:off x="685800" y="1554480"/>
-            <a:ext cx="10820095" cy="3246120"/>
+            <a:off x="685800" y="1874520"/>
+            <a:ext cx="10820095" cy="548640"/>
           </a:xfrm>
           <a:prstGeom prst="roundRect">
             <a:avLst>
@@ -32156,149 +32004,14 @@
       </p:sp>
       <p:sp>
         <p:nvSpPr>
-          <p:cNvPr id="6" name="TextBox 5"/>
-          <p:cNvSpPr txBox="1"/>
-          <p:nvPr/>
-        </p:nvSpPr>
-        <p:spPr>
-          <a:xfrm>
-            <a:off x="3466947" y="1810512"/>
-            <a:ext cx="8038947" cy="3246120"/>
-          </a:xfrm>
-          <a:prstGeom prst="rect">
-            <a:avLst/>
-          </a:prstGeom>
-          <a:noFill/>
-        </p:spPr>
-        <p:txBody>
-          <a:bodyPr wrap="square" lIns="0" rIns="0" tIns="0" bIns="0" anchor="t">
-            <a:spAutoFit/>
-          </a:bodyPr>
-          <a:lstStyle/>
-          <a:p>
-            <a:pPr algn="l">
-              <a:lnSpc>
-                <a:spcPct val="150000"/>
-              </a:lnSpc>
-            </a:pPr>
-            <a:r>
-              <a:rPr sz="1500" b="1">
-                <a:solidFill>
-                  <a:srgbClr val="7CC8FF"/>
-                </a:solidFill>
-                <a:latin typeface="Consolas"/>
-              </a:rPr>
-              <a:t>CSV sujo numa pasta                    segunda</a:t>
-            </a:r>
-          </a:p>
-          <a:p>
-            <a:pPr algn="l">
-              <a:lnSpc>
-                <a:spcPct val="150000"/>
-              </a:lnSpc>
-            </a:pPr>
-            <a:r>
-              <a:rPr sz="1500" b="1">
-                <a:solidFill>
-                  <a:srgbClr val="7CC8FF"/>
-                </a:solidFill>
-                <a:latin typeface="Consolas"/>
-              </a:rPr>
-              <a:t>         ↓</a:t>
-            </a:r>
-          </a:p>
-          <a:p>
-            <a:pPr algn="l">
-              <a:lnSpc>
-                <a:spcPct val="150000"/>
-              </a:lnSpc>
-            </a:pPr>
-            <a:r>
-              <a:rPr sz="1500" b="1">
-                <a:solidFill>
-                  <a:srgbClr val="7CC8FF"/>
-                </a:solidFill>
-                <a:latin typeface="Consolas"/>
-              </a:rPr>
-              <a:t>Bronze · Silver · Gold                   terça</a:t>
-            </a:r>
-          </a:p>
-          <a:p>
-            <a:pPr algn="l">
-              <a:lnSpc>
-                <a:spcPct val="150000"/>
-              </a:lnSpc>
-            </a:pPr>
-            <a:r>
-              <a:rPr sz="1500" b="1">
-                <a:solidFill>
-                  <a:srgbClr val="7CC8FF"/>
-                </a:solidFill>
-                <a:latin typeface="Consolas"/>
-              </a:rPr>
-              <a:t>         ↓</a:t>
-            </a:r>
-          </a:p>
-          <a:p>
-            <a:pPr algn="l">
-              <a:lnSpc>
-                <a:spcPct val="150000"/>
-              </a:lnSpc>
-            </a:pPr>
-            <a:r>
-              <a:rPr sz="1500" b="1">
-                <a:solidFill>
-                  <a:srgbClr val="7CC8FF"/>
-                </a:solidFill>
-                <a:latin typeface="Consolas"/>
-              </a:rPr>
-              <a:t>Features · Modelo · MLflow              quarta</a:t>
-            </a:r>
-          </a:p>
-          <a:p>
-            <a:pPr algn="l">
-              <a:lnSpc>
-                <a:spcPct val="150000"/>
-              </a:lnSpc>
-            </a:pPr>
-            <a:r>
-              <a:rPr sz="1500" b="1">
-                <a:solidFill>
-                  <a:srgbClr val="7CC8FF"/>
-                </a:solidFill>
-                <a:latin typeface="Consolas"/>
-              </a:rPr>
-              <a:t>         ↓</a:t>
-            </a:r>
-          </a:p>
-          <a:p>
-            <a:pPr algn="l">
-              <a:lnSpc>
-                <a:spcPct val="150000"/>
-              </a:lnSpc>
-            </a:pPr>
-            <a:r>
-              <a:rPr sz="1500" b="1">
-                <a:solidFill>
-                  <a:srgbClr val="7CC8FF"/>
-                </a:solidFill>
-                <a:latin typeface="Consolas"/>
-              </a:rPr>
-              <a:t>"Ligue para esses 200"                  quarta</a:t>
-            </a:r>
-          </a:p>
-        </p:txBody>
-      </p:sp>
-      <p:sp>
-        <p:nvSpPr>
-          <p:cNvPr id="7" name="TextBox 6"/>
-          <p:cNvSpPr txBox="1"/>
-          <p:nvPr/>
-        </p:nvSpPr>
-        <p:spPr>
-          <a:xfrm>
-            <a:off x="685800" y="5779008"/>
-            <a:ext cx="10820095" cy="411480"/>
+          <p:cNvPr id="8" name="TextBox 7"/>
+          <p:cNvSpPr txBox="1"/>
+          <p:nvPr/>
+        </p:nvSpPr>
+        <p:spPr>
+          <a:xfrm>
+            <a:off x="996696" y="2020824"/>
+            <a:ext cx="3657600" cy="548640"/>
           </a:xfrm>
           <a:prstGeom prst="rect">
             <a:avLst/>
@@ -32317,13 +32030,870 @@
               </a:lnSpc>
             </a:pPr>
             <a:r>
-              <a:rPr sz="1800" b="1" spc="-15">
-                <a:solidFill>
-                  <a:srgbClr val="7CC8FF"/>
-                </a:solidFill>
-                <a:latin typeface="Arial"/>
-              </a:rPr>
-              <a:t>E vocês construíram junto. Não assistiram.</a:t>
+              <a:rPr sz="1350" b="1">
+                <a:solidFill>
+                  <a:srgbClr val="FFFFFF"/>
+                </a:solidFill>
+                <a:latin typeface="Arial"/>
+              </a:rPr>
+              <a:t>Critério</a:t>
+            </a:r>
+          </a:p>
+        </p:txBody>
+      </p:sp>
+      <p:sp>
+        <p:nvSpPr>
+          <p:cNvPr id="9" name="TextBox 8"/>
+          <p:cNvSpPr txBox="1"/>
+          <p:nvPr/>
+        </p:nvSpPr>
+        <p:spPr>
+          <a:xfrm>
+            <a:off x="4745736" y="2020824"/>
+            <a:ext cx="3200400" cy="548640"/>
+          </a:xfrm>
+          <a:prstGeom prst="rect">
+            <a:avLst/>
+          </a:prstGeom>
+          <a:noFill/>
+        </p:spPr>
+        <p:txBody>
+          <a:bodyPr wrap="square" lIns="0" rIns="0" tIns="0" bIns="0" anchor="t">
+            <a:spAutoFit/>
+          </a:bodyPr>
+          <a:lstStyle/>
+          <a:p>
+            <a:pPr algn="l">
+              <a:lnSpc>
+                <a:spcPct val="125000"/>
+              </a:lnSpc>
+            </a:pPr>
+            <a:r>
+              <a:rPr sz="1350" b="0">
+                <a:solidFill>
+                  <a:srgbClr val="9BAAC0"/>
+                </a:solidFill>
+                <a:latin typeface="Arial"/>
+              </a:rPr>
+              <a:t>Intuição do vendedor</a:t>
+            </a:r>
+          </a:p>
+        </p:txBody>
+      </p:sp>
+      <p:sp>
+        <p:nvSpPr>
+          <p:cNvPr id="10" name="TextBox 9"/>
+          <p:cNvSpPr txBox="1"/>
+          <p:nvPr/>
+        </p:nvSpPr>
+        <p:spPr>
+          <a:xfrm>
+            <a:off x="8129016" y="2020824"/>
+            <a:ext cx="3200400" cy="548640"/>
+          </a:xfrm>
+          <a:prstGeom prst="rect">
+            <a:avLst/>
+          </a:prstGeom>
+          <a:noFill/>
+        </p:spPr>
+        <p:txBody>
+          <a:bodyPr wrap="square" lIns="0" rIns="0" tIns="0" bIns="0" anchor="t">
+            <a:spAutoFit/>
+          </a:bodyPr>
+          <a:lstStyle/>
+          <a:p>
+            <a:pPr algn="l">
+              <a:lnSpc>
+                <a:spcPct val="125000"/>
+              </a:lnSpc>
+            </a:pPr>
+            <a:r>
+              <a:rPr sz="1350" b="0">
+                <a:solidFill>
+                  <a:srgbClr val="9BAAC0"/>
+                </a:solidFill>
+                <a:latin typeface="Arial"/>
+              </a:rPr>
+              <a:t>Score de propensão</a:t>
+            </a:r>
+          </a:p>
+        </p:txBody>
+      </p:sp>
+      <p:sp>
+        <p:nvSpPr>
+          <p:cNvPr id="11" name="Rounded Rectangle 10"/>
+          <p:cNvSpPr/>
+          <p:nvPr/>
+        </p:nvSpPr>
+        <p:spPr>
+          <a:xfrm>
+            <a:off x="685800" y="2532888"/>
+            <a:ext cx="10820095" cy="548640"/>
+          </a:xfrm>
+          <a:prstGeom prst="roundRect">
+            <a:avLst>
+              <a:gd name="adj" fmla="val 8000"/>
+            </a:avLst>
+          </a:prstGeom>
+          <a:solidFill>
+            <a:srgbClr val="0D1522"/>
+          </a:solidFill>
+          <a:ln w="15875">
+            <a:solidFill>
+              <a:srgbClr val="1F3A5A"/>
+            </a:solidFill>
+          </a:ln>
+          <a:effectLst/>
+        </p:spPr>
+        <p:style>
+          <a:lnRef idx="1">
+            <a:schemeClr val="accent1"/>
+          </a:lnRef>
+          <a:fillRef idx="3">
+            <a:schemeClr val="accent1"/>
+          </a:fillRef>
+          <a:effectRef idx="2">
+            <a:schemeClr val="accent1"/>
+          </a:effectRef>
+          <a:fontRef idx="minor">
+            <a:schemeClr val="lt1"/>
+          </a:fontRef>
+        </p:style>
+        <p:txBody>
+          <a:bodyPr rtlCol="0" anchor="ctr"/>
+          <a:lstStyle/>
+          <a:p>
+            <a:pPr algn="ctr"/>
+          </a:p>
+        </p:txBody>
+      </p:sp>
+      <p:sp>
+        <p:nvSpPr>
+          <p:cNvPr id="12" name="TextBox 11"/>
+          <p:cNvSpPr txBox="1"/>
+          <p:nvPr/>
+        </p:nvSpPr>
+        <p:spPr>
+          <a:xfrm>
+            <a:off x="996696" y="2679192"/>
+            <a:ext cx="3657600" cy="548640"/>
+          </a:xfrm>
+          <a:prstGeom prst="rect">
+            <a:avLst/>
+          </a:prstGeom>
+          <a:noFill/>
+        </p:spPr>
+        <p:txBody>
+          <a:bodyPr wrap="square" lIns="0" rIns="0" tIns="0" bIns="0" anchor="t">
+            <a:spAutoFit/>
+          </a:bodyPr>
+          <a:lstStyle/>
+          <a:p>
+            <a:pPr algn="l">
+              <a:lnSpc>
+                <a:spcPct val="100000"/>
+              </a:lnSpc>
+            </a:pPr>
+            <a:r>
+              <a:rPr sz="1350" b="1">
+                <a:solidFill>
+                  <a:srgbClr val="FFFFFF"/>
+                </a:solidFill>
+                <a:latin typeface="Arial"/>
+              </a:rPr>
+              <a:t>Cobertura</a:t>
+            </a:r>
+          </a:p>
+        </p:txBody>
+      </p:sp>
+      <p:sp>
+        <p:nvSpPr>
+          <p:cNvPr id="13" name="TextBox 12"/>
+          <p:cNvSpPr txBox="1"/>
+          <p:nvPr/>
+        </p:nvSpPr>
+        <p:spPr>
+          <a:xfrm>
+            <a:off x="4745736" y="2679192"/>
+            <a:ext cx="3200400" cy="548640"/>
+          </a:xfrm>
+          <a:prstGeom prst="rect">
+            <a:avLst/>
+          </a:prstGeom>
+          <a:noFill/>
+        </p:spPr>
+        <p:txBody>
+          <a:bodyPr wrap="square" lIns="0" rIns="0" tIns="0" bIns="0" anchor="t">
+            <a:spAutoFit/>
+          </a:bodyPr>
+          <a:lstStyle/>
+          <a:p>
+            <a:pPr algn="l">
+              <a:lnSpc>
+                <a:spcPct val="125000"/>
+              </a:lnSpc>
+            </a:pPr>
+            <a:r>
+              <a:rPr sz="1350" b="0">
+                <a:solidFill>
+                  <a:srgbClr val="9BAAC0"/>
+                </a:solidFill>
+                <a:latin typeface="Arial"/>
+              </a:rPr>
+              <a:t>Os 20 que ele lembra</a:t>
+            </a:r>
+          </a:p>
+        </p:txBody>
+      </p:sp>
+      <p:sp>
+        <p:nvSpPr>
+          <p:cNvPr id="14" name="TextBox 13"/>
+          <p:cNvSpPr txBox="1"/>
+          <p:nvPr/>
+        </p:nvSpPr>
+        <p:spPr>
+          <a:xfrm>
+            <a:off x="8129016" y="2679192"/>
+            <a:ext cx="3200400" cy="548640"/>
+          </a:xfrm>
+          <a:prstGeom prst="rect">
+            <a:avLst/>
+          </a:prstGeom>
+          <a:noFill/>
+        </p:spPr>
+        <p:txBody>
+          <a:bodyPr wrap="square" lIns="0" rIns="0" tIns="0" bIns="0" anchor="t">
+            <a:spAutoFit/>
+          </a:bodyPr>
+          <a:lstStyle/>
+          <a:p>
+            <a:pPr algn="l">
+              <a:lnSpc>
+                <a:spcPct val="125000"/>
+              </a:lnSpc>
+            </a:pPr>
+            <a:r>
+              <a:rPr sz="1350" b="0">
+                <a:solidFill>
+                  <a:srgbClr val="9BAAC0"/>
+                </a:solidFill>
+                <a:latin typeface="Arial"/>
+              </a:rPr>
+              <a:t>Os 3.000 avaliados</a:t>
+            </a:r>
+          </a:p>
+        </p:txBody>
+      </p:sp>
+      <p:sp>
+        <p:nvSpPr>
+          <p:cNvPr id="15" name="Rounded Rectangle 14"/>
+          <p:cNvSpPr/>
+          <p:nvPr/>
+        </p:nvSpPr>
+        <p:spPr>
+          <a:xfrm>
+            <a:off x="685800" y="3191256"/>
+            <a:ext cx="10820095" cy="548640"/>
+          </a:xfrm>
+          <a:prstGeom prst="roundRect">
+            <a:avLst>
+              <a:gd name="adj" fmla="val 8000"/>
+            </a:avLst>
+          </a:prstGeom>
+          <a:solidFill>
+            <a:srgbClr val="0D1522"/>
+          </a:solidFill>
+          <a:ln w="15875">
+            <a:solidFill>
+              <a:srgbClr val="1F3A5A"/>
+            </a:solidFill>
+          </a:ln>
+          <a:effectLst/>
+        </p:spPr>
+        <p:style>
+          <a:lnRef idx="1">
+            <a:schemeClr val="accent1"/>
+          </a:lnRef>
+          <a:fillRef idx="3">
+            <a:schemeClr val="accent1"/>
+          </a:fillRef>
+          <a:effectRef idx="2">
+            <a:schemeClr val="accent1"/>
+          </a:effectRef>
+          <a:fontRef idx="minor">
+            <a:schemeClr val="lt1"/>
+          </a:fontRef>
+        </p:style>
+        <p:txBody>
+          <a:bodyPr rtlCol="0" anchor="ctr"/>
+          <a:lstStyle/>
+          <a:p>
+            <a:pPr algn="ctr"/>
+          </a:p>
+        </p:txBody>
+      </p:sp>
+      <p:sp>
+        <p:nvSpPr>
+          <p:cNvPr id="16" name="TextBox 15"/>
+          <p:cNvSpPr txBox="1"/>
+          <p:nvPr/>
+        </p:nvSpPr>
+        <p:spPr>
+          <a:xfrm>
+            <a:off x="996696" y="3337560"/>
+            <a:ext cx="3657600" cy="548640"/>
+          </a:xfrm>
+          <a:prstGeom prst="rect">
+            <a:avLst/>
+          </a:prstGeom>
+          <a:noFill/>
+        </p:spPr>
+        <p:txBody>
+          <a:bodyPr wrap="square" lIns="0" rIns="0" tIns="0" bIns="0" anchor="t">
+            <a:spAutoFit/>
+          </a:bodyPr>
+          <a:lstStyle/>
+          <a:p>
+            <a:pPr algn="l">
+              <a:lnSpc>
+                <a:spcPct val="100000"/>
+              </a:lnSpc>
+            </a:pPr>
+            <a:r>
+              <a:rPr sz="1350" b="1">
+                <a:solidFill>
+                  <a:srgbClr val="FFFFFF"/>
+                </a:solidFill>
+                <a:latin typeface="Arial"/>
+              </a:rPr>
+              <a:t>Ordem</a:t>
+            </a:r>
+          </a:p>
+        </p:txBody>
+      </p:sp>
+      <p:sp>
+        <p:nvSpPr>
+          <p:cNvPr id="17" name="TextBox 16"/>
+          <p:cNvSpPr txBox="1"/>
+          <p:nvPr/>
+        </p:nvSpPr>
+        <p:spPr>
+          <a:xfrm>
+            <a:off x="4745736" y="3337560"/>
+            <a:ext cx="3200400" cy="548640"/>
+          </a:xfrm>
+          <a:prstGeom prst="rect">
+            <a:avLst/>
+          </a:prstGeom>
+          <a:noFill/>
+        </p:spPr>
+        <p:txBody>
+          <a:bodyPr wrap="square" lIns="0" rIns="0" tIns="0" bIns="0" anchor="t">
+            <a:spAutoFit/>
+          </a:bodyPr>
+          <a:lstStyle/>
+          <a:p>
+            <a:pPr algn="l">
+              <a:lnSpc>
+                <a:spcPct val="125000"/>
+              </a:lnSpc>
+            </a:pPr>
+            <a:r>
+              <a:rPr sz="1350" b="0">
+                <a:solidFill>
+                  <a:srgbClr val="9BAAC0"/>
+                </a:solidFill>
+                <a:latin typeface="Arial"/>
+              </a:rPr>
+              <a:t>Aleatória</a:t>
+            </a:r>
+          </a:p>
+        </p:txBody>
+      </p:sp>
+      <p:sp>
+        <p:nvSpPr>
+          <p:cNvPr id="18" name="TextBox 17"/>
+          <p:cNvSpPr txBox="1"/>
+          <p:nvPr/>
+        </p:nvSpPr>
+        <p:spPr>
+          <a:xfrm>
+            <a:off x="8129016" y="3337560"/>
+            <a:ext cx="3200400" cy="548640"/>
+          </a:xfrm>
+          <a:prstGeom prst="rect">
+            <a:avLst/>
+          </a:prstGeom>
+          <a:noFill/>
+        </p:spPr>
+        <p:txBody>
+          <a:bodyPr wrap="square" lIns="0" rIns="0" tIns="0" bIns="0" anchor="t">
+            <a:spAutoFit/>
+          </a:bodyPr>
+          <a:lstStyle/>
+          <a:p>
+            <a:pPr algn="l">
+              <a:lnSpc>
+                <a:spcPct val="125000"/>
+              </a:lnSpc>
+            </a:pPr>
+            <a:r>
+              <a:rPr sz="1350" b="0">
+                <a:solidFill>
+                  <a:srgbClr val="9BAAC0"/>
+                </a:solidFill>
+                <a:latin typeface="Arial"/>
+              </a:rPr>
+              <a:t>Por probabilidade</a:t>
+            </a:r>
+          </a:p>
+        </p:txBody>
+      </p:sp>
+      <p:sp>
+        <p:nvSpPr>
+          <p:cNvPr id="19" name="Rounded Rectangle 18"/>
+          <p:cNvSpPr/>
+          <p:nvPr/>
+        </p:nvSpPr>
+        <p:spPr>
+          <a:xfrm>
+            <a:off x="685800" y="3849624"/>
+            <a:ext cx="10820095" cy="768096"/>
+          </a:xfrm>
+          <a:prstGeom prst="roundRect">
+            <a:avLst>
+              <a:gd name="adj" fmla="val 8000"/>
+            </a:avLst>
+          </a:prstGeom>
+          <a:solidFill>
+            <a:srgbClr val="0D1522"/>
+          </a:solidFill>
+          <a:ln w="15875">
+            <a:solidFill>
+              <a:srgbClr val="1F3A5A"/>
+            </a:solidFill>
+          </a:ln>
+          <a:effectLst/>
+        </p:spPr>
+        <p:style>
+          <a:lnRef idx="1">
+            <a:schemeClr val="accent1"/>
+          </a:lnRef>
+          <a:fillRef idx="3">
+            <a:schemeClr val="accent1"/>
+          </a:fillRef>
+          <a:effectRef idx="2">
+            <a:schemeClr val="accent1"/>
+          </a:effectRef>
+          <a:fontRef idx="minor">
+            <a:schemeClr val="lt1"/>
+          </a:fontRef>
+        </p:style>
+        <p:txBody>
+          <a:bodyPr rtlCol="0" anchor="ctr"/>
+          <a:lstStyle/>
+          <a:p>
+            <a:pPr algn="ctr"/>
+          </a:p>
+        </p:txBody>
+      </p:sp>
+      <p:sp>
+        <p:nvSpPr>
+          <p:cNvPr id="20" name="TextBox 19"/>
+          <p:cNvSpPr txBox="1"/>
+          <p:nvPr/>
+        </p:nvSpPr>
+        <p:spPr>
+          <a:xfrm>
+            <a:off x="996696" y="3995928"/>
+            <a:ext cx="3657600" cy="768096"/>
+          </a:xfrm>
+          <a:prstGeom prst="rect">
+            <a:avLst/>
+          </a:prstGeom>
+          <a:noFill/>
+        </p:spPr>
+        <p:txBody>
+          <a:bodyPr wrap="square" lIns="0" rIns="0" tIns="0" bIns="0" anchor="t">
+            <a:spAutoFit/>
+          </a:bodyPr>
+          <a:lstStyle/>
+          <a:p>
+            <a:pPr algn="l">
+              <a:lnSpc>
+                <a:spcPct val="100000"/>
+              </a:lnSpc>
+            </a:pPr>
+            <a:r>
+              <a:rPr sz="1350" b="1">
+                <a:solidFill>
+                  <a:srgbClr val="FFFFFF"/>
+                </a:solidFill>
+                <a:latin typeface="Arial"/>
+              </a:rPr>
+              <a:t>Contexto</a:t>
+            </a:r>
+          </a:p>
+        </p:txBody>
+      </p:sp>
+      <p:sp>
+        <p:nvSpPr>
+          <p:cNvPr id="21" name="TextBox 20"/>
+          <p:cNvSpPr txBox="1"/>
+          <p:nvPr/>
+        </p:nvSpPr>
+        <p:spPr>
+          <a:xfrm>
+            <a:off x="4745736" y="3995928"/>
+            <a:ext cx="3200400" cy="768096"/>
+          </a:xfrm>
+          <a:prstGeom prst="rect">
+            <a:avLst/>
+          </a:prstGeom>
+          <a:noFill/>
+        </p:spPr>
+        <p:txBody>
+          <a:bodyPr wrap="square" lIns="0" rIns="0" tIns="0" bIns="0" anchor="t">
+            <a:spAutoFit/>
+          </a:bodyPr>
+          <a:lstStyle/>
+          <a:p>
+            <a:pPr algn="l">
+              <a:lnSpc>
+                <a:spcPct val="125000"/>
+              </a:lnSpc>
+            </a:pPr>
+            <a:r>
+              <a:rPr sz="1350" b="0">
+                <a:solidFill>
+                  <a:srgbClr val="9BAAC0"/>
+                </a:solidFill>
+                <a:latin typeface="Arial"/>
+              </a:rPr>
+              <a:t>“Faz tempo que não falo</a:t>
+            </a:r>
+          </a:p>
+          <a:p>
+            <a:pPr algn="l">
+              <a:lnSpc>
+                <a:spcPct val="125000"/>
+              </a:lnSpc>
+            </a:pPr>
+            <a:r>
+              <a:rPr sz="1350" b="0">
+                <a:solidFill>
+                  <a:srgbClr val="9BAAC0"/>
+                </a:solidFill>
+                <a:latin typeface="Arial"/>
+              </a:rPr>
+              <a:t>com ele”</a:t>
+            </a:r>
+          </a:p>
+        </p:txBody>
+      </p:sp>
+      <p:sp>
+        <p:nvSpPr>
+          <p:cNvPr id="22" name="TextBox 21"/>
+          <p:cNvSpPr txBox="1"/>
+          <p:nvPr/>
+        </p:nvSpPr>
+        <p:spPr>
+          <a:xfrm>
+            <a:off x="8129016" y="3995928"/>
+            <a:ext cx="3200400" cy="768096"/>
+          </a:xfrm>
+          <a:prstGeom prst="rect">
+            <a:avLst/>
+          </a:prstGeom>
+          <a:noFill/>
+        </p:spPr>
+        <p:txBody>
+          <a:bodyPr wrap="square" lIns="0" rIns="0" tIns="0" bIns="0" anchor="t">
+            <a:spAutoFit/>
+          </a:bodyPr>
+          <a:lstStyle/>
+          <a:p>
+            <a:pPr algn="l">
+              <a:lnSpc>
+                <a:spcPct val="125000"/>
+              </a:lnSpc>
+            </a:pPr>
+            <a:r>
+              <a:rPr sz="1350" b="0">
+                <a:solidFill>
+                  <a:srgbClr val="9BAAC0"/>
+                </a:solidFill>
+                <a:latin typeface="Arial"/>
+              </a:rPr>
+              <a:t>Atraso relativo, histórico,</a:t>
+            </a:r>
+          </a:p>
+          <a:p>
+            <a:pPr algn="l">
+              <a:lnSpc>
+                <a:spcPct val="125000"/>
+              </a:lnSpc>
+            </a:pPr>
+            <a:r>
+              <a:rPr sz="1350" b="0">
+                <a:solidFill>
+                  <a:srgbClr val="9BAAC0"/>
+                </a:solidFill>
+                <a:latin typeface="Arial"/>
+              </a:rPr>
+              <a:t>sugestão</a:t>
+            </a:r>
+          </a:p>
+        </p:txBody>
+      </p:sp>
+      <p:sp>
+        <p:nvSpPr>
+          <p:cNvPr id="23" name="Rounded Rectangle 22"/>
+          <p:cNvSpPr/>
+          <p:nvPr/>
+        </p:nvSpPr>
+        <p:spPr>
+          <a:xfrm>
+            <a:off x="685800" y="4727448"/>
+            <a:ext cx="10820095" cy="548640"/>
+          </a:xfrm>
+          <a:prstGeom prst="roundRect">
+            <a:avLst>
+              <a:gd name="adj" fmla="val 8000"/>
+            </a:avLst>
+          </a:prstGeom>
+          <a:solidFill>
+            <a:srgbClr val="142337"/>
+          </a:solidFill>
+          <a:ln w="19050">
+            <a:solidFill>
+              <a:srgbClr val="3B9DF5"/>
+            </a:solidFill>
+          </a:ln>
+          <a:effectLst/>
+        </p:spPr>
+        <p:style>
+          <a:lnRef idx="1">
+            <a:schemeClr val="accent1"/>
+          </a:lnRef>
+          <a:fillRef idx="3">
+            <a:schemeClr val="accent1"/>
+          </a:fillRef>
+          <a:effectRef idx="2">
+            <a:schemeClr val="accent1"/>
+          </a:effectRef>
+          <a:fontRef idx="minor">
+            <a:schemeClr val="lt1"/>
+          </a:fontRef>
+        </p:style>
+        <p:txBody>
+          <a:bodyPr rtlCol="0" anchor="ctr"/>
+          <a:lstStyle/>
+          <a:p>
+            <a:pPr algn="ctr"/>
+          </a:p>
+        </p:txBody>
+      </p:sp>
+      <p:sp>
+        <p:nvSpPr>
+          <p:cNvPr id="24" name="TextBox 23"/>
+          <p:cNvSpPr txBox="1"/>
+          <p:nvPr/>
+        </p:nvSpPr>
+        <p:spPr>
+          <a:xfrm>
+            <a:off x="996696" y="4873752"/>
+            <a:ext cx="3657600" cy="548640"/>
+          </a:xfrm>
+          <a:prstGeom prst="rect">
+            <a:avLst/>
+          </a:prstGeom>
+          <a:noFill/>
+        </p:spPr>
+        <p:txBody>
+          <a:bodyPr wrap="square" lIns="0" rIns="0" tIns="0" bIns="0" anchor="t">
+            <a:spAutoFit/>
+          </a:bodyPr>
+          <a:lstStyle/>
+          <a:p>
+            <a:pPr algn="l">
+              <a:lnSpc>
+                <a:spcPct val="100000"/>
+              </a:lnSpc>
+            </a:pPr>
+            <a:r>
+              <a:rPr sz="1350" b="1">
+                <a:solidFill>
+                  <a:srgbClr val="3B9DF5"/>
+                </a:solidFill>
+                <a:latin typeface="Arial"/>
+              </a:rPr>
+              <a:t>Resultado medido</a:t>
+            </a:r>
+          </a:p>
+        </p:txBody>
+      </p:sp>
+      <p:sp>
+        <p:nvSpPr>
+          <p:cNvPr id="25" name="TextBox 24"/>
+          <p:cNvSpPr txBox="1"/>
+          <p:nvPr/>
+        </p:nvSpPr>
+        <p:spPr>
+          <a:xfrm>
+            <a:off x="4745736" y="4873752"/>
+            <a:ext cx="3200400" cy="548640"/>
+          </a:xfrm>
+          <a:prstGeom prst="rect">
+            <a:avLst/>
+          </a:prstGeom>
+          <a:noFill/>
+        </p:spPr>
+        <p:txBody>
+          <a:bodyPr wrap="square" lIns="0" rIns="0" tIns="0" bIns="0" anchor="t">
+            <a:spAutoFit/>
+          </a:bodyPr>
+          <a:lstStyle/>
+          <a:p>
+            <a:pPr algn="l">
+              <a:lnSpc>
+                <a:spcPct val="125000"/>
+              </a:lnSpc>
+            </a:pPr>
+            <a:r>
+              <a:rPr sz="1350" b="0">
+                <a:solidFill>
+                  <a:srgbClr val="9BAAC0"/>
+                </a:solidFill>
+                <a:latin typeface="Arial"/>
+              </a:rPr>
+              <a:t>20 vendas</a:t>
+            </a:r>
+          </a:p>
+        </p:txBody>
+      </p:sp>
+      <p:sp>
+        <p:nvSpPr>
+          <p:cNvPr id="26" name="TextBox 25"/>
+          <p:cNvSpPr txBox="1"/>
+          <p:nvPr/>
+        </p:nvSpPr>
+        <p:spPr>
+          <a:xfrm>
+            <a:off x="8129016" y="4873752"/>
+            <a:ext cx="3200400" cy="548640"/>
+          </a:xfrm>
+          <a:prstGeom prst="rect">
+            <a:avLst/>
+          </a:prstGeom>
+          <a:noFill/>
+        </p:spPr>
+        <p:txBody>
+          <a:bodyPr wrap="square" lIns="0" rIns="0" tIns="0" bIns="0" anchor="t">
+            <a:spAutoFit/>
+          </a:bodyPr>
+          <a:lstStyle/>
+          <a:p>
+            <a:pPr algn="l">
+              <a:lnSpc>
+                <a:spcPct val="125000"/>
+              </a:lnSpc>
+            </a:pPr>
+            <a:r>
+              <a:rPr sz="1350" b="1">
+                <a:solidFill>
+                  <a:srgbClr val="FFFFFF"/>
+                </a:solidFill>
+                <a:latin typeface="Arial"/>
+              </a:rPr>
+              <a:t>86 vendas</a:t>
+            </a:r>
+          </a:p>
+        </p:txBody>
+      </p:sp>
+      <p:sp>
+        <p:nvSpPr>
+          <p:cNvPr id="27" name="Rounded Rectangle 26"/>
+          <p:cNvSpPr/>
+          <p:nvPr/>
+        </p:nvSpPr>
+        <p:spPr>
+          <a:xfrm>
+            <a:off x="685800" y="5742432"/>
+            <a:ext cx="10820095" cy="621792"/>
+          </a:xfrm>
+          <a:prstGeom prst="roundRect">
+            <a:avLst>
+              <a:gd name="adj" fmla="val 8000"/>
+            </a:avLst>
+          </a:prstGeom>
+          <a:solidFill>
+            <a:srgbClr val="142337"/>
+          </a:solidFill>
+          <a:ln w="19050">
+            <a:solidFill>
+              <a:srgbClr val="3B9DF5"/>
+            </a:solidFill>
+          </a:ln>
+          <a:effectLst/>
+        </p:spPr>
+        <p:style>
+          <a:lnRef idx="1">
+            <a:schemeClr val="accent1"/>
+          </a:lnRef>
+          <a:fillRef idx="3">
+            <a:schemeClr val="accent1"/>
+          </a:fillRef>
+          <a:effectRef idx="2">
+            <a:schemeClr val="accent1"/>
+          </a:effectRef>
+          <a:fontRef idx="minor">
+            <a:schemeClr val="lt1"/>
+          </a:fontRef>
+        </p:style>
+        <p:txBody>
+          <a:bodyPr rtlCol="0" anchor="ctr"/>
+          <a:lstStyle/>
+          <a:p>
+            <a:pPr algn="ctr"/>
+          </a:p>
+        </p:txBody>
+      </p:sp>
+      <p:sp>
+        <p:nvSpPr>
+          <p:cNvPr id="28" name="TextBox 27"/>
+          <p:cNvSpPr txBox="1"/>
+          <p:nvPr/>
+        </p:nvSpPr>
+        <p:spPr>
+          <a:xfrm>
+            <a:off x="1069848" y="5941568"/>
+            <a:ext cx="10051999" cy="621792"/>
+          </a:xfrm>
+          <a:prstGeom prst="rect">
+            <a:avLst/>
+          </a:prstGeom>
+          <a:noFill/>
+        </p:spPr>
+        <p:txBody>
+          <a:bodyPr wrap="square" lIns="0" rIns="0" tIns="0" bIns="0" anchor="t">
+            <a:spAutoFit/>
+          </a:bodyPr>
+          <a:lstStyle/>
+          <a:p>
+            <a:pPr algn="l">
+              <a:lnSpc>
+                <a:spcPct val="128000"/>
+              </a:lnSpc>
+            </a:pPr>
+            <a:r>
+              <a:rPr sz="1600" b="1">
+                <a:solidFill>
+                  <a:srgbClr val="FFFFFF"/>
+                </a:solidFill>
+                <a:latin typeface="Arial"/>
+              </a:rPr>
+              <a:t>Mesmo time. Mesmas 200 ligações. Mais de quatro vezes o resultado.</a:t>
             </a:r>
           </a:p>
         </p:txBody>
@@ -32337,6 +32907,371 @@
 </file>
 
 <file path=ppt/slides/slide45.xml><?xml version="1.0" encoding="utf-8"?>
+<p:sld xmlns:a="http://schemas.openxmlformats.org/drawingml/2006/main" xmlns:p="http://schemas.openxmlformats.org/presentationml/2006/main" xmlns:r="http://schemas.openxmlformats.org/officeDocument/2006/relationships">
+  <p:cSld>
+    <p:bg>
+      <p:bgPr>
+        <a:solidFill>
+          <a:srgbClr val="070C16"/>
+        </a:solidFill>
+        <a:effectLst/>
+      </p:bgPr>
+    </p:bg>
+    <p:spTree>
+      <p:nvGrpSpPr>
+        <p:cNvPr id="1" name=""/>
+        <p:cNvGrpSpPr/>
+        <p:nvPr/>
+      </p:nvGrpSpPr>
+      <p:grpSpPr/>
+      <p:sp>
+        <p:nvSpPr>
+          <p:cNvPr id="2" name="TextBox 1"/>
+          <p:cNvSpPr txBox="1"/>
+          <p:nvPr/>
+        </p:nvSpPr>
+        <p:spPr>
+          <a:xfrm>
+            <a:off x="685800" y="457200"/>
+            <a:ext cx="10820095" cy="256032"/>
+          </a:xfrm>
+          <a:prstGeom prst="rect">
+            <a:avLst/>
+          </a:prstGeom>
+          <a:noFill/>
+        </p:spPr>
+        <p:txBody>
+          <a:bodyPr wrap="square" lIns="0" rIns="0" tIns="0" bIns="0" anchor="t">
+            <a:spAutoFit/>
+          </a:bodyPr>
+          <a:lstStyle/>
+          <a:p>
+            <a:pPr algn="l">
+              <a:lnSpc>
+                <a:spcPct val="100000"/>
+              </a:lnSpc>
+            </a:pPr>
+            <a:r>
+              <a:rPr sz="1150" b="1" spc="180">
+                <a:solidFill>
+                  <a:srgbClr val="3B9DF5"/>
+                </a:solidFill>
+                <a:latin typeface="Arial"/>
+              </a:rPr>
+              <a:t>DE ONDE A GENTE VEIO</a:t>
+            </a:r>
+          </a:p>
+        </p:txBody>
+      </p:sp>
+      <p:sp>
+        <p:nvSpPr>
+          <p:cNvPr id="3" name="TextBox 2"/>
+          <p:cNvSpPr txBox="1"/>
+          <p:nvPr/>
+        </p:nvSpPr>
+        <p:spPr>
+          <a:xfrm>
+            <a:off x="685800" y="804672"/>
+            <a:ext cx="10820095" cy="566928"/>
+          </a:xfrm>
+          <a:prstGeom prst="rect">
+            <a:avLst/>
+          </a:prstGeom>
+          <a:noFill/>
+        </p:spPr>
+        <p:txBody>
+          <a:bodyPr wrap="square" lIns="0" rIns="0" tIns="0" bIns="0" anchor="t">
+            <a:spAutoFit/>
+          </a:bodyPr>
+          <a:lstStyle/>
+          <a:p>
+            <a:pPr algn="l">
+              <a:lnSpc>
+                <a:spcPct val="95000"/>
+              </a:lnSpc>
+            </a:pPr>
+            <a:r>
+              <a:rPr sz="3600" b="1" spc="-30">
+                <a:solidFill>
+                  <a:srgbClr val="FFFFFF"/>
+                </a:solidFill>
+                <a:latin typeface="Arial"/>
+              </a:rPr>
+              <a:t>O arco de três noites</a:t>
+            </a:r>
+          </a:p>
+        </p:txBody>
+      </p:sp>
+      <p:sp>
+        <p:nvSpPr>
+          <p:cNvPr id="4" name="TextBox 3"/>
+          <p:cNvSpPr txBox="1"/>
+          <p:nvPr/>
+        </p:nvSpPr>
+        <p:spPr>
+          <a:xfrm>
+            <a:off x="685800" y="6382512"/>
+            <a:ext cx="5486400" cy="274320"/>
+          </a:xfrm>
+          <a:prstGeom prst="rect">
+            <a:avLst/>
+          </a:prstGeom>
+          <a:noFill/>
+        </p:spPr>
+        <p:txBody>
+          <a:bodyPr wrap="square" lIns="0" rIns="0" tIns="0" bIns="0" anchor="t">
+            <a:spAutoFit/>
+          </a:bodyPr>
+          <a:lstStyle/>
+          <a:p>
+            <a:pPr algn="l">
+              <a:lnSpc>
+                <a:spcPct val="100000"/>
+              </a:lnSpc>
+            </a:pPr>
+            <a:r>
+              <a:rPr sz="900" b="1" spc="120">
+                <a:solidFill>
+                  <a:srgbClr val="566A85"/>
+                </a:solidFill>
+                <a:latin typeface="Arial"/>
+              </a:rPr>
+              <a:t>JORNADA DE DADOS</a:t>
+            </a:r>
+          </a:p>
+        </p:txBody>
+      </p:sp>
+      <p:sp>
+        <p:nvSpPr>
+          <p:cNvPr id="5" name="Rounded Rectangle 4"/>
+          <p:cNvSpPr/>
+          <p:nvPr/>
+        </p:nvSpPr>
+        <p:spPr>
+          <a:xfrm>
+            <a:off x="685800" y="1554480"/>
+            <a:ext cx="10820095" cy="3246120"/>
+          </a:xfrm>
+          <a:prstGeom prst="roundRect">
+            <a:avLst>
+              <a:gd name="adj" fmla="val 8000"/>
+            </a:avLst>
+          </a:prstGeom>
+          <a:solidFill>
+            <a:srgbClr val="0D1522"/>
+          </a:solidFill>
+          <a:ln w="15875">
+            <a:solidFill>
+              <a:srgbClr val="1F3A5A"/>
+            </a:solidFill>
+          </a:ln>
+          <a:effectLst/>
+        </p:spPr>
+        <p:style>
+          <a:lnRef idx="1">
+            <a:schemeClr val="accent1"/>
+          </a:lnRef>
+          <a:fillRef idx="3">
+            <a:schemeClr val="accent1"/>
+          </a:fillRef>
+          <a:effectRef idx="2">
+            <a:schemeClr val="accent1"/>
+          </a:effectRef>
+          <a:fontRef idx="minor">
+            <a:schemeClr val="lt1"/>
+          </a:fontRef>
+        </p:style>
+        <p:txBody>
+          <a:bodyPr rtlCol="0" anchor="ctr"/>
+          <a:lstStyle/>
+          <a:p>
+            <a:pPr algn="ctr"/>
+          </a:p>
+        </p:txBody>
+      </p:sp>
+      <p:sp>
+        <p:nvSpPr>
+          <p:cNvPr id="6" name="TextBox 5"/>
+          <p:cNvSpPr txBox="1"/>
+          <p:nvPr/>
+        </p:nvSpPr>
+        <p:spPr>
+          <a:xfrm>
+            <a:off x="3466947" y="1810512"/>
+            <a:ext cx="8038947" cy="3246120"/>
+          </a:xfrm>
+          <a:prstGeom prst="rect">
+            <a:avLst/>
+          </a:prstGeom>
+          <a:noFill/>
+        </p:spPr>
+        <p:txBody>
+          <a:bodyPr wrap="square" lIns="0" rIns="0" tIns="0" bIns="0" anchor="t">
+            <a:spAutoFit/>
+          </a:bodyPr>
+          <a:lstStyle/>
+          <a:p>
+            <a:pPr algn="l">
+              <a:lnSpc>
+                <a:spcPct val="150000"/>
+              </a:lnSpc>
+            </a:pPr>
+            <a:r>
+              <a:rPr sz="1500" b="1">
+                <a:solidFill>
+                  <a:srgbClr val="7CC8FF"/>
+                </a:solidFill>
+                <a:latin typeface="Consolas"/>
+              </a:rPr>
+              <a:t>CSV sujo numa pasta                    segunda</a:t>
+            </a:r>
+          </a:p>
+          <a:p>
+            <a:pPr algn="l">
+              <a:lnSpc>
+                <a:spcPct val="150000"/>
+              </a:lnSpc>
+            </a:pPr>
+            <a:r>
+              <a:rPr sz="1500" b="1">
+                <a:solidFill>
+                  <a:srgbClr val="7CC8FF"/>
+                </a:solidFill>
+                <a:latin typeface="Consolas"/>
+              </a:rPr>
+              <a:t>         ↓</a:t>
+            </a:r>
+          </a:p>
+          <a:p>
+            <a:pPr algn="l">
+              <a:lnSpc>
+                <a:spcPct val="150000"/>
+              </a:lnSpc>
+            </a:pPr>
+            <a:r>
+              <a:rPr sz="1500" b="1">
+                <a:solidFill>
+                  <a:srgbClr val="7CC8FF"/>
+                </a:solidFill>
+                <a:latin typeface="Consolas"/>
+              </a:rPr>
+              <a:t>Bronze · Silver · Gold                   terça</a:t>
+            </a:r>
+          </a:p>
+          <a:p>
+            <a:pPr algn="l">
+              <a:lnSpc>
+                <a:spcPct val="150000"/>
+              </a:lnSpc>
+            </a:pPr>
+            <a:r>
+              <a:rPr sz="1500" b="1">
+                <a:solidFill>
+                  <a:srgbClr val="7CC8FF"/>
+                </a:solidFill>
+                <a:latin typeface="Consolas"/>
+              </a:rPr>
+              <a:t>         ↓</a:t>
+            </a:r>
+          </a:p>
+          <a:p>
+            <a:pPr algn="l">
+              <a:lnSpc>
+                <a:spcPct val="150000"/>
+              </a:lnSpc>
+            </a:pPr>
+            <a:r>
+              <a:rPr sz="1500" b="1">
+                <a:solidFill>
+                  <a:srgbClr val="7CC8FF"/>
+                </a:solidFill>
+                <a:latin typeface="Consolas"/>
+              </a:rPr>
+              <a:t>Features · Modelo · MLflow              quarta</a:t>
+            </a:r>
+          </a:p>
+          <a:p>
+            <a:pPr algn="l">
+              <a:lnSpc>
+                <a:spcPct val="150000"/>
+              </a:lnSpc>
+            </a:pPr>
+            <a:r>
+              <a:rPr sz="1500" b="1">
+                <a:solidFill>
+                  <a:srgbClr val="7CC8FF"/>
+                </a:solidFill>
+                <a:latin typeface="Consolas"/>
+              </a:rPr>
+              <a:t>         ↓</a:t>
+            </a:r>
+          </a:p>
+          <a:p>
+            <a:pPr algn="l">
+              <a:lnSpc>
+                <a:spcPct val="150000"/>
+              </a:lnSpc>
+            </a:pPr>
+            <a:r>
+              <a:rPr sz="1500" b="1">
+                <a:solidFill>
+                  <a:srgbClr val="7CC8FF"/>
+                </a:solidFill>
+                <a:latin typeface="Consolas"/>
+              </a:rPr>
+              <a:t>"Ligue para esses 200"                  quarta</a:t>
+            </a:r>
+          </a:p>
+        </p:txBody>
+      </p:sp>
+      <p:sp>
+        <p:nvSpPr>
+          <p:cNvPr id="7" name="TextBox 6"/>
+          <p:cNvSpPr txBox="1"/>
+          <p:nvPr/>
+        </p:nvSpPr>
+        <p:spPr>
+          <a:xfrm>
+            <a:off x="685800" y="5779008"/>
+            <a:ext cx="10820095" cy="411480"/>
+          </a:xfrm>
+          <a:prstGeom prst="rect">
+            <a:avLst/>
+          </a:prstGeom>
+          <a:noFill/>
+        </p:spPr>
+        <p:txBody>
+          <a:bodyPr wrap="square" lIns="0" rIns="0" tIns="0" bIns="0" anchor="t">
+            <a:spAutoFit/>
+          </a:bodyPr>
+          <a:lstStyle/>
+          <a:p>
+            <a:pPr algn="l">
+              <a:lnSpc>
+                <a:spcPct val="100000"/>
+              </a:lnSpc>
+            </a:pPr>
+            <a:r>
+              <a:rPr sz="1800" b="1" spc="-15">
+                <a:solidFill>
+                  <a:srgbClr val="7CC8FF"/>
+                </a:solidFill>
+                <a:latin typeface="Arial"/>
+              </a:rPr>
+              <a:t>E vocês construíram junto. Não assistiram.</a:t>
+            </a:r>
+          </a:p>
+        </p:txBody>
+      </p:sp>
+    </p:spTree>
+  </p:cSld>
+  <p:clrMapOvr>
+    <a:masterClrMapping/>
+  </p:clrMapOvr>
+</p:sld>
+</file>
+
+<file path=ppt/slides/slide46.xml><?xml version="1.0" encoding="utf-8"?>
 <p:sld xmlns:a="http://schemas.openxmlformats.org/drawingml/2006/main" xmlns:p="http://schemas.openxmlformats.org/presentationml/2006/main" xmlns:r="http://schemas.openxmlformats.org/officeDocument/2006/relationships">
   <p:cSld>
     <p:bg>
@@ -34987,14 +35922,131 @@
       </p:sp>
       <p:sp>
         <p:nvSpPr>
-          <p:cNvPr id="5" name="Rounded Rectangle 4"/>
+          <p:cNvPr id="5" name="TextBox 4"/>
+          <p:cNvSpPr txBox="1"/>
+          <p:nvPr/>
+        </p:nvSpPr>
+        <p:spPr>
+          <a:xfrm>
+            <a:off x="886968" y="1508760"/>
+            <a:ext cx="1554480" cy="274320"/>
+          </a:xfrm>
+          <a:prstGeom prst="rect">
+            <a:avLst/>
+          </a:prstGeom>
+          <a:noFill/>
+        </p:spPr>
+        <p:txBody>
+          <a:bodyPr wrap="square" lIns="0" rIns="0" tIns="0" bIns="0" anchor="t">
+            <a:spAutoFit/>
+          </a:bodyPr>
+          <a:lstStyle/>
+          <a:p>
+            <a:pPr algn="l">
+              <a:lnSpc>
+                <a:spcPct val="100000"/>
+              </a:lnSpc>
+            </a:pPr>
+            <a:r>
+              <a:rPr sz="1100" b="1" spc="120">
+                <a:solidFill>
+                  <a:srgbClr val="3B9DF5"/>
+                </a:solidFill>
+                <a:latin typeface="Arial"/>
+              </a:rPr>
+              <a:t/>
+            </a:r>
+          </a:p>
+        </p:txBody>
+      </p:sp>
+      <p:sp>
+        <p:nvSpPr>
+          <p:cNvPr id="6" name="TextBox 5"/>
+          <p:cNvSpPr txBox="1"/>
+          <p:nvPr/>
+        </p:nvSpPr>
+        <p:spPr>
+          <a:xfrm>
+            <a:off x="2715768" y="1508760"/>
+            <a:ext cx="5120640" cy="274320"/>
+          </a:xfrm>
+          <a:prstGeom prst="rect">
+            <a:avLst/>
+          </a:prstGeom>
+          <a:noFill/>
+        </p:spPr>
+        <p:txBody>
+          <a:bodyPr wrap="square" lIns="0" rIns="0" tIns="0" bIns="0" anchor="t">
+            <a:spAutoFit/>
+          </a:bodyPr>
+          <a:lstStyle/>
+          <a:p>
+            <a:pPr algn="l">
+              <a:lnSpc>
+                <a:spcPct val="100000"/>
+              </a:lnSpc>
+            </a:pPr>
+            <a:r>
+              <a:rPr sz="1100" b="1" spc="120">
+                <a:solidFill>
+                  <a:srgbClr val="3B9DF5"/>
+                </a:solidFill>
+                <a:latin typeface="Arial"/>
+              </a:rPr>
+              <a:t>O QUE SAI DE CADA UM</a:t>
+            </a:r>
+          </a:p>
+        </p:txBody>
+      </p:sp>
+      <p:sp>
+        <p:nvSpPr>
+          <p:cNvPr id="7" name="TextBox 6"/>
+          <p:cNvSpPr txBox="1"/>
+          <p:nvPr/>
+        </p:nvSpPr>
+        <p:spPr>
+          <a:xfrm>
+            <a:off x="8110728" y="1508760"/>
+            <a:ext cx="3319272" cy="274320"/>
+          </a:xfrm>
+          <a:prstGeom prst="rect">
+            <a:avLst/>
+          </a:prstGeom>
+          <a:noFill/>
+        </p:spPr>
+        <p:txBody>
+          <a:bodyPr wrap="square" lIns="0" rIns="0" tIns="0" bIns="0" anchor="t">
+            <a:spAutoFit/>
+          </a:bodyPr>
+          <a:lstStyle/>
+          <a:p>
+            <a:pPr algn="l">
+              <a:lnSpc>
+                <a:spcPct val="100000"/>
+              </a:lnSpc>
+            </a:pPr>
+            <a:r>
+              <a:rPr sz="1100" b="1" spc="120">
+                <a:solidFill>
+                  <a:srgbClr val="3B9DF5"/>
+                </a:solidFill>
+                <a:latin typeface="Arial"/>
+              </a:rPr>
+              <a:t>ONDE ISSO FICA</a:t>
+            </a:r>
+          </a:p>
+        </p:txBody>
+      </p:sp>
+      <p:sp>
+        <p:nvSpPr>
+          <p:cNvPr id="8" name="Rounded Rectangle 7"/>
           <p:cNvSpPr/>
           <p:nvPr/>
         </p:nvSpPr>
         <p:spPr>
           <a:xfrm>
-            <a:off x="685800" y="1508760"/>
-            <a:ext cx="3448202" cy="2487168"/>
+            <a:off x="685800" y="1874520"/>
+            <a:ext cx="10820095" cy="777240"/>
           </a:xfrm>
           <a:prstGeom prst="roundRect">
             <a:avLst>
@@ -35035,33 +36087,33 @@
       </p:sp>
       <p:sp>
         <p:nvSpPr>
-          <p:cNvPr id="6" name="TextBox 5"/>
-          <p:cNvSpPr txBox="1"/>
-          <p:nvPr/>
-        </p:nvSpPr>
-        <p:spPr>
-          <a:xfrm>
-            <a:off x="941832" y="1746504"/>
-            <a:ext cx="2936138" cy="822960"/>
-          </a:xfrm>
-          <a:prstGeom prst="rect">
-            <a:avLst/>
-          </a:prstGeom>
-          <a:noFill/>
-        </p:spPr>
-        <p:txBody>
-          <a:bodyPr wrap="square" lIns="0" rIns="0" tIns="0" bIns="0" anchor="t">
-            <a:spAutoFit/>
-          </a:bodyPr>
-          <a:lstStyle/>
-          <a:p>
-            <a:pPr algn="l">
-              <a:lnSpc>
-                <a:spcPct val="105000"/>
-              </a:lnSpc>
-            </a:pPr>
-            <a:r>
-              <a:rPr sz="1900" b="1">
+          <p:cNvPr id="9" name="TextBox 8"/>
+          <p:cNvSpPr txBox="1"/>
+          <p:nvPr/>
+        </p:nvSpPr>
+        <p:spPr>
+          <a:xfrm>
+            <a:off x="886968" y="2147570"/>
+            <a:ext cx="1554480" cy="777240"/>
+          </a:xfrm>
+          <a:prstGeom prst="rect">
+            <a:avLst/>
+          </a:prstGeom>
+          <a:noFill/>
+        </p:spPr>
+        <p:txBody>
+          <a:bodyPr wrap="square" lIns="0" rIns="0" tIns="0" bIns="0" anchor="t">
+            <a:spAutoFit/>
+          </a:bodyPr>
+          <a:lstStyle/>
+          <a:p>
+            <a:pPr algn="l">
+              <a:lnSpc>
+                <a:spcPct val="100000"/>
+              </a:lnSpc>
+            </a:pPr>
+            <a:r>
+              <a:rPr sz="1400" b="1">
                 <a:solidFill>
                   <a:srgbClr val="FFFFFF"/>
                 </a:solidFill>
@@ -35070,137 +36122,96 @@
               <a:t>PROMPT 1</a:t>
             </a:r>
           </a:p>
-          <a:p>
-            <a:pPr algn="l">
-              <a:lnSpc>
-                <a:spcPct val="105000"/>
-              </a:lnSpc>
-            </a:pPr>
-            <a:r>
-              <a:rPr sz="1900" b="1">
-                <a:solidFill>
-                  <a:srgbClr val="FFFFFF"/>
-                </a:solidFill>
-                <a:latin typeface="Arial"/>
-              </a:rPr>
-              <a:t>Features</a:t>
-            </a:r>
-          </a:p>
-        </p:txBody>
-      </p:sp>
-      <p:sp>
-        <p:nvSpPr>
-          <p:cNvPr id="7" name="TextBox 6"/>
-          <p:cNvSpPr txBox="1"/>
-          <p:nvPr/>
-        </p:nvSpPr>
-        <p:spPr>
-          <a:xfrm>
-            <a:off x="941832" y="2481580"/>
-            <a:ext cx="2936138" cy="2487168"/>
-          </a:xfrm>
-          <a:prstGeom prst="rect">
-            <a:avLst/>
-          </a:prstGeom>
-          <a:noFill/>
-        </p:spPr>
-        <p:txBody>
-          <a:bodyPr wrap="square" lIns="0" rIns="0" tIns="0" bIns="0" anchor="t">
-            <a:spAutoFit/>
-          </a:bodyPr>
-          <a:lstStyle/>
-          <a:p>
-            <a:pPr algn="l">
-              <a:lnSpc>
-                <a:spcPct val="128000"/>
-              </a:lnSpc>
-            </a:pPr>
-            <a:r>
-              <a:rPr sz="1250" b="0">
+        </p:txBody>
+      </p:sp>
+      <p:sp>
+        <p:nvSpPr>
+          <p:cNvPr id="10" name="TextBox 9"/>
+          <p:cNvSpPr txBox="1"/>
+          <p:nvPr/>
+        </p:nvSpPr>
+        <p:spPr>
+          <a:xfrm>
+            <a:off x="2715768" y="2147570"/>
+            <a:ext cx="5120640" cy="777240"/>
+          </a:xfrm>
+          <a:prstGeom prst="rect">
+            <a:avLst/>
+          </a:prstGeom>
+          <a:noFill/>
+        </p:spPr>
+        <p:txBody>
+          <a:bodyPr wrap="square" lIns="0" rIns="0" tIns="0" bIns="0" anchor="t">
+            <a:spAutoFit/>
+          </a:bodyPr>
+          <a:lstStyle/>
+          <a:p>
+            <a:pPr algn="l">
+              <a:lnSpc>
+                <a:spcPct val="100000"/>
+              </a:lnSpc>
+            </a:pPr>
+            <a:r>
+              <a:rPr sz="1400" b="0">
                 <a:solidFill>
                   <a:srgbClr val="9BAAC0"/>
                 </a:solidFill>
-                <a:latin typeface="Arial"/>
-              </a:rPr>
-              <a:t>Uma linha por cliente, 20 colunas que</a:t>
-            </a:r>
-          </a:p>
-          <a:p>
-            <a:pPr algn="l">
-              <a:lnSpc>
-                <a:spcPct val="128000"/>
-              </a:lnSpc>
-            </a:pPr>
-            <a:r>
-              <a:rPr sz="1250" b="0">
+                <a:latin typeface="Consolas"/>
+              </a:rPr>
+              <a:t>Uma tabela com uma linha por cliente</a:t>
+            </a:r>
+          </a:p>
+        </p:txBody>
+      </p:sp>
+      <p:sp>
+        <p:nvSpPr>
+          <p:cNvPr id="11" name="TextBox 10"/>
+          <p:cNvSpPr txBox="1"/>
+          <p:nvPr/>
+        </p:nvSpPr>
+        <p:spPr>
+          <a:xfrm>
+            <a:off x="8110728" y="2147570"/>
+            <a:ext cx="3319272" cy="777240"/>
+          </a:xfrm>
+          <a:prstGeom prst="rect">
+            <a:avLst/>
+          </a:prstGeom>
+          <a:noFill/>
+        </p:spPr>
+        <p:txBody>
+          <a:bodyPr wrap="square" lIns="0" rIns="0" tIns="0" bIns="0" anchor="t">
+            <a:spAutoFit/>
+          </a:bodyPr>
+          <a:lstStyle/>
+          <a:p>
+            <a:pPr algn="l">
+              <a:lnSpc>
+                <a:spcPct val="100000"/>
+              </a:lnSpc>
+            </a:pPr>
+            <a:r>
+              <a:rPr sz="1400" b="0">
                 <a:solidFill>
                   <a:srgbClr val="9BAAC0"/>
                 </a:solidFill>
-                <a:latin typeface="Arial"/>
-              </a:rPr>
-              <a:t>descrevem o comportamento dele.</a:t>
-            </a:r>
-          </a:p>
-          <a:p>
-            <a:pPr algn="l">
-              <a:lnSpc>
-                <a:spcPct val="128000"/>
-              </a:lnSpc>
-            </a:pPr>
-            <a:r>
-              <a:rPr sz="1250" b="0">
-                <a:solidFill>
-                  <a:srgbClr val="9BAAC0"/>
-                </a:solidFill>
-                <a:latin typeface="Arial"/>
-              </a:rPr>
-              <a:t/>
-            </a:r>
-          </a:p>
-          <a:p>
-            <a:pPr algn="l">
-              <a:lnSpc>
-                <a:spcPct val="128000"/>
-              </a:lnSpc>
-            </a:pPr>
-            <a:r>
-              <a:rPr sz="1250" b="0">
-                <a:solidFill>
-                  <a:srgbClr val="9BAAC0"/>
-                </a:solidFill>
-                <a:latin typeface="Arial"/>
-              </a:rPr>
-              <a:t>→ gold.features_cliente</a:t>
-            </a:r>
-          </a:p>
-          <a:p>
-            <a:pPr algn="l">
-              <a:lnSpc>
-                <a:spcPct val="128000"/>
-              </a:lnSpc>
-            </a:pPr>
-            <a:r>
-              <a:rPr sz="1250" b="0">
-                <a:solidFill>
-                  <a:srgbClr val="9BAAC0"/>
-                </a:solidFill>
-                <a:latin typeface="Arial"/>
-              </a:rPr>
-              <a:t>→ gold.features_treino</a:t>
-            </a:r>
-          </a:p>
-        </p:txBody>
-      </p:sp>
-      <p:sp>
-        <p:nvSpPr>
-          <p:cNvPr id="8" name="Rounded Rectangle 7"/>
+                <a:latin typeface="Consolas"/>
+              </a:rPr>
+              <a:t>gold.features_cliente</a:t>
+            </a:r>
+          </a:p>
+        </p:txBody>
+      </p:sp>
+      <p:sp>
+        <p:nvSpPr>
+          <p:cNvPr id="12" name="Rounded Rectangle 11"/>
           <p:cNvSpPr/>
           <p:nvPr/>
         </p:nvSpPr>
         <p:spPr>
           <a:xfrm>
-            <a:off x="4371746" y="1508760"/>
-            <a:ext cx="3448202" cy="2487168"/>
+            <a:off x="685800" y="2743200"/>
+            <a:ext cx="10820095" cy="777240"/>
           </a:xfrm>
           <a:prstGeom prst="roundRect">
             <a:avLst>
@@ -35241,33 +36252,33 @@
       </p:sp>
       <p:sp>
         <p:nvSpPr>
-          <p:cNvPr id="9" name="TextBox 8"/>
-          <p:cNvSpPr txBox="1"/>
-          <p:nvPr/>
-        </p:nvSpPr>
-        <p:spPr>
-          <a:xfrm>
-            <a:off x="4627778" y="1746504"/>
-            <a:ext cx="2936138" cy="822960"/>
-          </a:xfrm>
-          <a:prstGeom prst="rect">
-            <a:avLst/>
-          </a:prstGeom>
-          <a:noFill/>
-        </p:spPr>
-        <p:txBody>
-          <a:bodyPr wrap="square" lIns="0" rIns="0" tIns="0" bIns="0" anchor="t">
-            <a:spAutoFit/>
-          </a:bodyPr>
-          <a:lstStyle/>
-          <a:p>
-            <a:pPr algn="l">
-              <a:lnSpc>
-                <a:spcPct val="105000"/>
-              </a:lnSpc>
-            </a:pPr>
-            <a:r>
-              <a:rPr sz="1900" b="1">
+          <p:cNvPr id="13" name="TextBox 12"/>
+          <p:cNvSpPr txBox="1"/>
+          <p:nvPr/>
+        </p:nvSpPr>
+        <p:spPr>
+          <a:xfrm>
+            <a:off x="886968" y="3016250"/>
+            <a:ext cx="1554480" cy="777240"/>
+          </a:xfrm>
+          <a:prstGeom prst="rect">
+            <a:avLst/>
+          </a:prstGeom>
+          <a:noFill/>
+        </p:spPr>
+        <p:txBody>
+          <a:bodyPr wrap="square" lIns="0" rIns="0" tIns="0" bIns="0" anchor="t">
+            <a:spAutoFit/>
+          </a:bodyPr>
+          <a:lstStyle/>
+          <a:p>
+            <a:pPr algn="l">
+              <a:lnSpc>
+                <a:spcPct val="100000"/>
+              </a:lnSpc>
+            </a:pPr>
+            <a:r>
+              <a:rPr sz="1400" b="1">
                 <a:solidFill>
                   <a:srgbClr val="FFFFFF"/>
                 </a:solidFill>
@@ -35276,137 +36287,96 @@
               <a:t>PROMPT 2</a:t>
             </a:r>
           </a:p>
-          <a:p>
-            <a:pPr algn="l">
-              <a:lnSpc>
-                <a:spcPct val="105000"/>
-              </a:lnSpc>
-            </a:pPr>
-            <a:r>
-              <a:rPr sz="1900" b="1">
-                <a:solidFill>
-                  <a:srgbClr val="FFFFFF"/>
-                </a:solidFill>
-                <a:latin typeface="Arial"/>
-              </a:rPr>
-              <a:t>Modelo</a:t>
-            </a:r>
-          </a:p>
-        </p:txBody>
-      </p:sp>
-      <p:sp>
-        <p:nvSpPr>
-          <p:cNvPr id="10" name="TextBox 9"/>
-          <p:cNvSpPr txBox="1"/>
-          <p:nvPr/>
-        </p:nvSpPr>
-        <p:spPr>
-          <a:xfrm>
-            <a:off x="4627778" y="2481580"/>
-            <a:ext cx="2936138" cy="2487168"/>
-          </a:xfrm>
-          <a:prstGeom prst="rect">
-            <a:avLst/>
-          </a:prstGeom>
-          <a:noFill/>
-        </p:spPr>
-        <p:txBody>
-          <a:bodyPr wrap="square" lIns="0" rIns="0" tIns="0" bIns="0" anchor="t">
-            <a:spAutoFit/>
-          </a:bodyPr>
-          <a:lstStyle/>
-          <a:p>
-            <a:pPr algn="l">
-              <a:lnSpc>
-                <a:spcPct val="128000"/>
-              </a:lnSpc>
-            </a:pPr>
-            <a:r>
-              <a:rPr sz="1250" b="0">
+        </p:txBody>
+      </p:sp>
+      <p:sp>
+        <p:nvSpPr>
+          <p:cNvPr id="14" name="TextBox 13"/>
+          <p:cNvSpPr txBox="1"/>
+          <p:nvPr/>
+        </p:nvSpPr>
+        <p:spPr>
+          <a:xfrm>
+            <a:off x="2715768" y="3016250"/>
+            <a:ext cx="5120640" cy="777240"/>
+          </a:xfrm>
+          <a:prstGeom prst="rect">
+            <a:avLst/>
+          </a:prstGeom>
+          <a:noFill/>
+        </p:spPr>
+        <p:txBody>
+          <a:bodyPr wrap="square" lIns="0" rIns="0" tIns="0" bIns="0" anchor="t">
+            <a:spAutoFit/>
+          </a:bodyPr>
+          <a:lstStyle/>
+          <a:p>
+            <a:pPr algn="l">
+              <a:lnSpc>
+                <a:spcPct val="100000"/>
+              </a:lnSpc>
+            </a:pPr>
+            <a:r>
+              <a:rPr sz="1400" b="0">
                 <a:solidFill>
                   <a:srgbClr val="9BAAC0"/>
                 </a:solidFill>
-                <a:latin typeface="Arial"/>
-              </a:rPr>
-              <a:t>Baseline, treino, MLflow, registro no</a:t>
-            </a:r>
-          </a:p>
-          <a:p>
-            <a:pPr algn="l">
-              <a:lnSpc>
-                <a:spcPct val="128000"/>
-              </a:lnSpc>
-            </a:pPr>
-            <a:r>
-              <a:rPr sz="1250" b="0">
+                <a:latin typeface="Consolas"/>
+              </a:rPr>
+              <a:t>Uma nota de 0 a 1 para cada cliente</a:t>
+            </a:r>
+          </a:p>
+        </p:txBody>
+      </p:sp>
+      <p:sp>
+        <p:nvSpPr>
+          <p:cNvPr id="15" name="TextBox 14"/>
+          <p:cNvSpPr txBox="1"/>
+          <p:nvPr/>
+        </p:nvSpPr>
+        <p:spPr>
+          <a:xfrm>
+            <a:off x="8110728" y="3016250"/>
+            <a:ext cx="3319272" cy="777240"/>
+          </a:xfrm>
+          <a:prstGeom prst="rect">
+            <a:avLst/>
+          </a:prstGeom>
+          <a:noFill/>
+        </p:spPr>
+        <p:txBody>
+          <a:bodyPr wrap="square" lIns="0" rIns="0" tIns="0" bIns="0" anchor="t">
+            <a:spAutoFit/>
+          </a:bodyPr>
+          <a:lstStyle/>
+          <a:p>
+            <a:pPr algn="l">
+              <a:lnSpc>
+                <a:spcPct val="100000"/>
+              </a:lnSpc>
+            </a:pPr>
+            <a:r>
+              <a:rPr sz="1400" b="0">
                 <a:solidFill>
                   <a:srgbClr val="9BAAC0"/>
                 </a:solidFill>
-                <a:latin typeface="Arial"/>
-              </a:rPr>
-              <a:t>Unity Catalog e a nota de cada um.</a:t>
-            </a:r>
-          </a:p>
-          <a:p>
-            <a:pPr algn="l">
-              <a:lnSpc>
-                <a:spcPct val="128000"/>
-              </a:lnSpc>
-            </a:pPr>
-            <a:r>
-              <a:rPr sz="1250" b="0">
-                <a:solidFill>
-                  <a:srgbClr val="9BAAC0"/>
-                </a:solidFill>
-                <a:latin typeface="Arial"/>
-              </a:rPr>
-              <a:t/>
-            </a:r>
-          </a:p>
-          <a:p>
-            <a:pPr algn="l">
-              <a:lnSpc>
-                <a:spcPct val="128000"/>
-              </a:lnSpc>
-            </a:pPr>
-            <a:r>
-              <a:rPr sz="1250" b="0">
-                <a:solidFill>
-                  <a:srgbClr val="9BAAC0"/>
-                </a:solidFill>
-                <a:latin typeface="Arial"/>
-              </a:rPr>
-              <a:t>→ o modelo no catálogo</a:t>
-            </a:r>
-          </a:p>
-          <a:p>
-            <a:pPr algn="l">
-              <a:lnSpc>
-                <a:spcPct val="128000"/>
-              </a:lnSpc>
-            </a:pPr>
-            <a:r>
-              <a:rPr sz="1250" b="0">
-                <a:solidFill>
-                  <a:srgbClr val="9BAAC0"/>
-                </a:solidFill>
-                <a:latin typeface="Arial"/>
-              </a:rPr>
-              <a:t>→ gold.score_propensao</a:t>
-            </a:r>
-          </a:p>
-        </p:txBody>
-      </p:sp>
-      <p:sp>
-        <p:nvSpPr>
-          <p:cNvPr id="11" name="Rounded Rectangle 10"/>
+                <a:latin typeface="Consolas"/>
+              </a:rPr>
+              <a:t>gold.score_propensao</a:t>
+            </a:r>
+          </a:p>
+        </p:txBody>
+      </p:sp>
+      <p:sp>
+        <p:nvSpPr>
+          <p:cNvPr id="16" name="Rounded Rectangle 15"/>
           <p:cNvSpPr/>
           <p:nvPr/>
         </p:nvSpPr>
         <p:spPr>
           <a:xfrm>
-            <a:off x="8057692" y="1508760"/>
-            <a:ext cx="3448202" cy="2487168"/>
+            <a:off x="685800" y="3611880"/>
+            <a:ext cx="10820095" cy="777240"/>
           </a:xfrm>
           <a:prstGeom prst="roundRect">
             <a:avLst>
@@ -35447,171 +36417,130 @@
       </p:sp>
       <p:sp>
         <p:nvSpPr>
-          <p:cNvPr id="12" name="TextBox 11"/>
-          <p:cNvSpPr txBox="1"/>
-          <p:nvPr/>
-        </p:nvSpPr>
-        <p:spPr>
-          <a:xfrm>
-            <a:off x="8313724" y="1746504"/>
-            <a:ext cx="2936138" cy="822960"/>
-          </a:xfrm>
-          <a:prstGeom prst="rect">
-            <a:avLst/>
-          </a:prstGeom>
-          <a:noFill/>
-        </p:spPr>
-        <p:txBody>
-          <a:bodyPr wrap="square" lIns="0" rIns="0" tIns="0" bIns="0" anchor="t">
-            <a:spAutoFit/>
-          </a:bodyPr>
-          <a:lstStyle/>
-          <a:p>
-            <a:pPr algn="l">
-              <a:lnSpc>
-                <a:spcPct val="105000"/>
-              </a:lnSpc>
-            </a:pPr>
-            <a:r>
-              <a:rPr sz="1900" b="1">
+          <p:cNvPr id="17" name="TextBox 16"/>
+          <p:cNvSpPr txBox="1"/>
+          <p:nvPr/>
+        </p:nvSpPr>
+        <p:spPr>
+          <a:xfrm>
+            <a:off x="886968" y="3884930"/>
+            <a:ext cx="1554480" cy="777240"/>
+          </a:xfrm>
+          <a:prstGeom prst="rect">
+            <a:avLst/>
+          </a:prstGeom>
+          <a:noFill/>
+        </p:spPr>
+        <p:txBody>
+          <a:bodyPr wrap="square" lIns="0" rIns="0" tIns="0" bIns="0" anchor="t">
+            <a:spAutoFit/>
+          </a:bodyPr>
+          <a:lstStyle/>
+          <a:p>
+            <a:pPr algn="l">
+              <a:lnSpc>
+                <a:spcPct val="100000"/>
+              </a:lnSpc>
+            </a:pPr>
+            <a:r>
+              <a:rPr sz="1400" b="1">
+                <a:solidFill>
+                  <a:srgbClr val="FFFFFF"/>
+                </a:solidFill>
+                <a:latin typeface="Arial"/>
+              </a:rPr>
+              <a:t>PROMPT 3</a:t>
+            </a:r>
+          </a:p>
+        </p:txBody>
+      </p:sp>
+      <p:sp>
+        <p:nvSpPr>
+          <p:cNvPr id="18" name="TextBox 17"/>
+          <p:cNvSpPr txBox="1"/>
+          <p:nvPr/>
+        </p:nvSpPr>
+        <p:spPr>
+          <a:xfrm>
+            <a:off x="2715768" y="3884930"/>
+            <a:ext cx="5120640" cy="777240"/>
+          </a:xfrm>
+          <a:prstGeom prst="rect">
+            <a:avLst/>
+          </a:prstGeom>
+          <a:noFill/>
+        </p:spPr>
+        <p:txBody>
+          <a:bodyPr wrap="square" lIns="0" rIns="0" tIns="0" bIns="0" anchor="t">
+            <a:spAutoFit/>
+          </a:bodyPr>
+          <a:lstStyle/>
+          <a:p>
+            <a:pPr algn="l">
+              <a:lnSpc>
+                <a:spcPct val="100000"/>
+              </a:lnSpc>
+            </a:pPr>
+            <a:r>
+              <a:rPr sz="1400" b="1">
                 <a:solidFill>
                   <a:srgbClr val="3B9DF5"/>
                 </a:solidFill>
-                <a:latin typeface="Arial"/>
-              </a:rPr>
-              <a:t>PROMPT 3</a:t>
-            </a:r>
-          </a:p>
-          <a:p>
-            <a:pPr algn="l">
-              <a:lnSpc>
-                <a:spcPct val="105000"/>
-              </a:lnSpc>
-            </a:pPr>
-            <a:r>
-              <a:rPr sz="1900" b="1">
+                <a:latin typeface="Consolas"/>
+              </a:rPr>
+              <a:t>A lista dos 200, com nome e motivo</a:t>
+            </a:r>
+          </a:p>
+        </p:txBody>
+      </p:sp>
+      <p:sp>
+        <p:nvSpPr>
+          <p:cNvPr id="19" name="TextBox 18"/>
+          <p:cNvSpPr txBox="1"/>
+          <p:nvPr/>
+        </p:nvSpPr>
+        <p:spPr>
+          <a:xfrm>
+            <a:off x="8110728" y="3884930"/>
+            <a:ext cx="3319272" cy="777240"/>
+          </a:xfrm>
+          <a:prstGeom prst="rect">
+            <a:avLst/>
+          </a:prstGeom>
+          <a:noFill/>
+        </p:spPr>
+        <p:txBody>
+          <a:bodyPr wrap="square" lIns="0" rIns="0" tIns="0" bIns="0" anchor="t">
+            <a:spAutoFit/>
+          </a:bodyPr>
+          <a:lstStyle/>
+          <a:p>
+            <a:pPr algn="l">
+              <a:lnSpc>
+                <a:spcPct val="100000"/>
+              </a:lnSpc>
+            </a:pPr>
+            <a:r>
+              <a:rPr sz="1400" b="1">
                 <a:solidFill>
                   <a:srgbClr val="3B9DF5"/>
                 </a:solidFill>
-                <a:latin typeface="Arial"/>
-              </a:rPr>
-              <a:t>A fila</a:t>
-            </a:r>
-          </a:p>
-        </p:txBody>
-      </p:sp>
-      <p:sp>
-        <p:nvSpPr>
-          <p:cNvPr id="13" name="TextBox 12"/>
-          <p:cNvSpPr txBox="1"/>
-          <p:nvPr/>
-        </p:nvSpPr>
-        <p:spPr>
-          <a:xfrm>
-            <a:off x="8313724" y="2481580"/>
-            <a:ext cx="2936138" cy="2487168"/>
-          </a:xfrm>
-          <a:prstGeom prst="rect">
-            <a:avLst/>
-          </a:prstGeom>
-          <a:noFill/>
-        </p:spPr>
-        <p:txBody>
-          <a:bodyPr wrap="square" lIns="0" rIns="0" tIns="0" bIns="0" anchor="t">
-            <a:spAutoFit/>
-          </a:bodyPr>
-          <a:lstStyle/>
-          <a:p>
-            <a:pPr algn="l">
-              <a:lnSpc>
-                <a:spcPct val="128000"/>
-              </a:lnSpc>
-            </a:pPr>
-            <a:r>
-              <a:rPr sz="1250" b="0">
-                <a:solidFill>
-                  <a:srgbClr val="9BAAC0"/>
-                </a:solidFill>
-                <a:latin typeface="Arial"/>
-              </a:rPr>
-              <a:t>Os 200 da semana, com motivo em</a:t>
-            </a:r>
-          </a:p>
-          <a:p>
-            <a:pPr algn="l">
-              <a:lnSpc>
-                <a:spcPct val="128000"/>
-              </a:lnSpc>
-            </a:pPr>
-            <a:r>
-              <a:rPr sz="1250" b="0">
-                <a:solidFill>
-                  <a:srgbClr val="9BAAC0"/>
-                </a:solidFill>
-                <a:latin typeface="Arial"/>
-              </a:rPr>
-              <a:t>português e o que oferecer.</a:t>
-            </a:r>
-          </a:p>
-          <a:p>
-            <a:pPr algn="l">
-              <a:lnSpc>
-                <a:spcPct val="128000"/>
-              </a:lnSpc>
-            </a:pPr>
-            <a:r>
-              <a:rPr sz="1250" b="0">
-                <a:solidFill>
-                  <a:srgbClr val="9BAAC0"/>
-                </a:solidFill>
-                <a:latin typeface="Arial"/>
-              </a:rPr>
-              <a:t/>
-            </a:r>
-          </a:p>
-          <a:p>
-            <a:pPr algn="l">
-              <a:lnSpc>
-                <a:spcPct val="128000"/>
-              </a:lnSpc>
-            </a:pPr>
-            <a:r>
-              <a:rPr sz="1250" b="0">
-                <a:solidFill>
-                  <a:srgbClr val="9BAAC0"/>
-                </a:solidFill>
-                <a:latin typeface="Arial"/>
-              </a:rPr>
-              <a:t>→ gold.fila_semanal</a:t>
-            </a:r>
-          </a:p>
-          <a:p>
-            <a:pPr algn="l">
-              <a:lnSpc>
-                <a:spcPct val="128000"/>
-              </a:lnSpc>
-            </a:pPr>
-            <a:r>
-              <a:rPr sz="1250" b="0">
-                <a:solidFill>
-                  <a:srgbClr val="9BAAC0"/>
-                </a:solidFill>
-                <a:latin typeface="Arial"/>
-              </a:rPr>
-              <a:t>→ as 4 ferramentas</a:t>
-            </a:r>
-          </a:p>
-        </p:txBody>
-      </p:sp>
-      <p:sp>
-        <p:nvSpPr>
-          <p:cNvPr id="14" name="Rounded Rectangle 13"/>
+                <a:latin typeface="Consolas"/>
+              </a:rPr>
+              <a:t>gold.fila_semanal</a:t>
+            </a:r>
+          </a:p>
+        </p:txBody>
+      </p:sp>
+      <p:sp>
+        <p:nvSpPr>
+          <p:cNvPr id="20" name="Rounded Rectangle 19"/>
           <p:cNvSpPr/>
           <p:nvPr/>
         </p:nvSpPr>
         <p:spPr>
           <a:xfrm>
-            <a:off x="685800" y="4233672"/>
+            <a:off x="685800" y="4526280"/>
             <a:ext cx="10820095" cy="960120"/>
           </a:xfrm>
           <a:prstGeom prst="roundRect">
@@ -35653,13 +36582,13 @@
       </p:sp>
       <p:sp>
         <p:nvSpPr>
-          <p:cNvPr id="15" name="TextBox 14"/>
-          <p:cNvSpPr txBox="1"/>
-          <p:nvPr/>
-        </p:nvSpPr>
-        <p:spPr>
-          <a:xfrm>
-            <a:off x="1069848" y="4471924"/>
+          <p:cNvPr id="21" name="TextBox 20"/>
+          <p:cNvSpPr txBox="1"/>
+          <p:nvPr/>
+        </p:nvSpPr>
+        <p:spPr>
+          <a:xfrm>
+            <a:off x="1069848" y="4764532"/>
             <a:ext cx="10051999" cy="960120"/>
           </a:xfrm>
           <a:prstGeom prst="rect">
@@ -35685,7 +36614,7 @@
                 </a:solidFill>
                 <a:latin typeface="Arial"/>
               </a:rPr>
-              <a:t>Cada prompt termina em DEPLOY. Não é protótipo que vira produção</a:t>
+              <a:t>Cada prompt termina em DEPLOY, e o de baixo é a resposta do diretor.</a:t>
             </a:r>
           </a:p>
           <a:p>
@@ -35701,7 +36630,7 @@
                 </a:solidFill>
                 <a:latin typeface="Arial"/>
               </a:rPr>
-              <a:t>depois: já nasce dentro do pipeline que roda sozinho todo dia.</a:t>
+              <a:t>Não é protótipo que vira produção depois: já nasce no pipeline.</a:t>
             </a:r>
           </a:p>
         </p:txBody>
